--- a/screen-with-gpt-models.pptx
+++ b/screen-with-gpt-models.pptx
@@ -5,7 +5,7 @@
     <p:sldMasterId id="2147483693" r:id="rId1"/>
   </p:sldMasterIdLst>
   <p:notesMasterIdLst>
-    <p:notesMasterId r:id="rId19"/>
+    <p:notesMasterId r:id="rId20"/>
   </p:notesMasterIdLst>
   <p:sldIdLst>
     <p:sldId id="509" r:id="rId2"/>
@@ -19,12 +19,13 @@
     <p:sldId id="549" r:id="rId10"/>
     <p:sldId id="553" r:id="rId11"/>
     <p:sldId id="554" r:id="rId12"/>
-    <p:sldId id="545" r:id="rId13"/>
-    <p:sldId id="544" r:id="rId14"/>
-    <p:sldId id="548" r:id="rId15"/>
-    <p:sldId id="536" r:id="rId16"/>
-    <p:sldId id="555" r:id="rId17"/>
-    <p:sldId id="551" r:id="rId18"/>
+    <p:sldId id="557" r:id="rId13"/>
+    <p:sldId id="545" r:id="rId14"/>
+    <p:sldId id="544" r:id="rId15"/>
+    <p:sldId id="548" r:id="rId16"/>
+    <p:sldId id="536" r:id="rId17"/>
+    <p:sldId id="555" r:id="rId18"/>
+    <p:sldId id="551" r:id="rId19"/>
   </p:sldIdLst>
   <p:sldSz cx="12192000" cy="6858000"/>
   <p:notesSz cx="6858000" cy="9144000"/>
@@ -142,6 +143,7 @@
             <p14:sldId id="549"/>
             <p14:sldId id="553"/>
             <p14:sldId id="554"/>
+            <p14:sldId id="557"/>
             <p14:sldId id="545"/>
             <p14:sldId id="544"/>
             <p14:sldId id="548"/>
@@ -241,7 +243,7 @@
           <a:p>
             <a:fld id="{7BEB8190-3B91-4E7B-8634-E458355F2E20}" type="datetimeFigureOut">
               <a:rPr lang="en-GB" smtClean="0"/>
-              <a:t>16/04/2026</a:t>
+              <a:t>20/04/2026</a:t>
             </a:fld>
             <a:endParaRPr lang="en-GB"/>
           </a:p>
@@ -44523,25 +44525,53 @@
             <p:ph type="body" sz="quarter" idx="10"/>
           </p:nvPr>
         </p:nvSpPr>
-        <p:spPr/>
+        <p:spPr>
+          <a:xfrm>
+            <a:off x="579141" y="3886534"/>
+            <a:ext cx="5002951" cy="2142126"/>
+          </a:xfrm>
+        </p:spPr>
         <p:txBody>
           <a:bodyPr/>
           <a:lstStyle/>
           <a:p>
+            <a:pPr>
+              <a:spcBef>
+                <a:spcPts val="0"/>
+              </a:spcBef>
+            </a:pPr>
             <a:r>
               <a:rPr lang="en-US" dirty="0"/>
               <a:t>Mikkel H. Vembye, PhD.</a:t>
             </a:r>
           </a:p>
           <a:p>
+            <a:pPr>
+              <a:spcBef>
+                <a:spcPts val="0"/>
+              </a:spcBef>
+            </a:pPr>
             <a:r>
               <a:rPr lang="en-US" dirty="0"/>
-              <a:t>Researcher – The Danish Center for Social Science Research.</a:t>
-            </a:r>
-          </a:p>
-          <a:p>
-            <a:r>
+              <a:t>Researcher </a:t>
+            </a:r>
+            <a:br>
               <a:rPr lang="en-US" dirty="0"/>
+            </a:br>
+            <a:r>
+              <a:rPr lang="en-US" dirty="0"/>
+              <a:t>The Danish Center for Social Science Research</a:t>
+            </a:r>
+          </a:p>
+          <a:p>
+            <a:endParaRPr lang="en-US" dirty="0"/>
+          </a:p>
+          <a:p>
+            <a:endParaRPr lang="en-US" dirty="0"/>
+          </a:p>
+          <a:p>
+            <a:r>
+              <a:rPr lang="en-US" i="1" dirty="0"/>
               <a:t>IRM 2026, Cologne, April 24</a:t>
             </a:r>
           </a:p>
@@ -44569,7 +44599,7 @@
           <a:p>
             <a:r>
               <a:rPr lang="en-US" sz="2800" dirty="0"/>
-              <a:t>How to use generative pretrained transformer (GPT)  models as reliable second screeners of titles and abstracts in systematic reviews</a:t>
+              <a:t>How to Use Generative Pretrained Transformer (GPT)  Models as Reliable Second Screeners of Titles and Abstracts in Systematic Reviews</a:t>
             </a:r>
             <a:endParaRPr lang="da-DK" sz="2800" dirty="0"/>
           </a:p>
@@ -45392,7 +45422,7 @@
           <a:p>
             <a:r>
               <a:rPr lang="en-US" dirty="0"/>
-              <a:t>Future research I</a:t>
+              <a:t>Future research</a:t>
             </a:r>
           </a:p>
         </p:txBody>
@@ -45528,6 +45558,193 @@
 </file>
 
 <file path=ppt/slides/slide12.xml><?xml version="1.0" encoding="utf-8"?>
+<p:sld xmlns:a="http://schemas.openxmlformats.org/drawingml/2006/main" xmlns:r="http://schemas.openxmlformats.org/officeDocument/2006/relationships" xmlns:p="http://schemas.openxmlformats.org/presentationml/2006/main">
+  <p:cSld>
+    <p:spTree>
+      <p:nvGrpSpPr>
+        <p:cNvPr id="1" name=""/>
+        <p:cNvGrpSpPr/>
+        <p:nvPr/>
+      </p:nvGrpSpPr>
+      <p:grpSpPr>
+        <a:xfrm>
+          <a:off x="0" y="0"/>
+          <a:ext cx="0" cy="0"/>
+          <a:chOff x="0" y="0"/>
+          <a:chExt cx="0" cy="0"/>
+        </a:xfrm>
+      </p:grpSpPr>
+      <p:sp>
+        <p:nvSpPr>
+          <p:cNvPr id="2" name="Title 1">
+            <a:extLst>
+              <a:ext uri="{FF2B5EF4-FFF2-40B4-BE49-F238E27FC236}">
+                <a16:creationId xmlns:a16="http://schemas.microsoft.com/office/drawing/2014/main" id="{A05D2F4B-2F1B-4E25-91F5-84B9657D5A0D}"/>
+              </a:ext>
+            </a:extLst>
+          </p:cNvPr>
+          <p:cNvSpPr>
+            <a:spLocks noGrp="1"/>
+          </p:cNvSpPr>
+          <p:nvPr>
+            <p:ph type="title"/>
+          </p:nvPr>
+        </p:nvSpPr>
+        <p:spPr/>
+        <p:txBody>
+          <a:bodyPr/>
+          <a:lstStyle/>
+          <a:p>
+            <a:r>
+              <a:rPr lang="da-DK" dirty="0"/>
+              <a:t>Future </a:t>
+            </a:r>
+            <a:r>
+              <a:rPr lang="da-DK" dirty="0" err="1"/>
+              <a:t>perspectives</a:t>
+            </a:r>
+            <a:r>
+              <a:rPr lang="da-DK" dirty="0"/>
+              <a:t> – the future is AI.</a:t>
+            </a:r>
+            <a:endParaRPr lang="en-US" dirty="0"/>
+          </a:p>
+        </p:txBody>
+      </p:sp>
+      <p:sp>
+        <p:nvSpPr>
+          <p:cNvPr id="3" name="Text Placeholder 2">
+            <a:extLst>
+              <a:ext uri="{FF2B5EF4-FFF2-40B4-BE49-F238E27FC236}">
+                <a16:creationId xmlns:a16="http://schemas.microsoft.com/office/drawing/2014/main" id="{603B0754-7E32-4245-8E5E-2D4F888965C1}"/>
+              </a:ext>
+            </a:extLst>
+          </p:cNvPr>
+          <p:cNvSpPr>
+            <a:spLocks noGrp="1"/>
+          </p:cNvSpPr>
+          <p:nvPr>
+            <p:ph type="body" sz="quarter" idx="10"/>
+          </p:nvPr>
+        </p:nvSpPr>
+        <p:spPr/>
+        <p:txBody>
+          <a:bodyPr/>
+          <a:lstStyle/>
+          <a:p>
+            <a:pPr>
+              <a:spcAft>
+                <a:spcPts val="800"/>
+              </a:spcAft>
+            </a:pPr>
+            <a:r>
+              <a:rPr lang="da-DK" dirty="0"/>
+              <a:t>My </a:t>
+            </a:r>
+            <a:r>
+              <a:rPr lang="da-DK"/>
+              <a:t>projection</a:t>
+            </a:r>
+            <a:r>
+              <a:rPr lang="da-DK" dirty="0"/>
+              <a:t>: Title and abstract and </a:t>
+            </a:r>
+            <a:r>
+              <a:rPr lang="da-DK" dirty="0" err="1"/>
+              <a:t>full</a:t>
+            </a:r>
+            <a:r>
+              <a:rPr lang="da-DK" dirty="0"/>
+              <a:t> </a:t>
+            </a:r>
+            <a:r>
+              <a:rPr lang="da-DK" dirty="0" err="1"/>
+              <a:t>text</a:t>
+            </a:r>
+            <a:r>
+              <a:rPr lang="da-DK" dirty="0"/>
+              <a:t> screening </a:t>
+            </a:r>
+            <a:r>
+              <a:rPr lang="da-DK" dirty="0" err="1"/>
+              <a:t>will</a:t>
+            </a:r>
+            <a:r>
+              <a:rPr lang="da-DK" dirty="0"/>
+              <a:t> </a:t>
+            </a:r>
+            <a:r>
+              <a:rPr lang="da-DK" dirty="0" err="1"/>
+              <a:t>be</a:t>
+            </a:r>
+            <a:r>
+              <a:rPr lang="da-DK" dirty="0"/>
+              <a:t> more of </a:t>
+            </a:r>
+            <a:r>
+              <a:rPr lang="da-DK" dirty="0" err="1"/>
+              <a:t>less</a:t>
+            </a:r>
+            <a:r>
+              <a:rPr lang="da-DK" dirty="0"/>
+              <a:t> </a:t>
+            </a:r>
+            <a:r>
+              <a:rPr lang="da-DK" dirty="0" err="1"/>
+              <a:t>eradicted</a:t>
+            </a:r>
+            <a:r>
+              <a:rPr lang="da-DK" dirty="0"/>
+              <a:t> </a:t>
+            </a:r>
+            <a:r>
+              <a:rPr lang="da-DK" dirty="0" err="1"/>
+              <a:t>within</a:t>
+            </a:r>
+            <a:r>
+              <a:rPr lang="da-DK" dirty="0"/>
+              <a:t> 10 </a:t>
+            </a:r>
+            <a:r>
+              <a:rPr lang="da-DK" dirty="0" err="1"/>
+              <a:t>year</a:t>
+            </a:r>
+            <a:r>
+              <a:rPr lang="da-DK" dirty="0"/>
+              <a:t>.</a:t>
+            </a:r>
+          </a:p>
+          <a:p>
+            <a:pPr marL="317500" lvl="1" indent="0">
+              <a:spcAft>
+                <a:spcPts val="800"/>
+              </a:spcAft>
+              <a:buNone/>
+            </a:pPr>
+            <a:endParaRPr lang="en-US" dirty="0"/>
+          </a:p>
+          <a:p>
+            <a:pPr marL="0" indent="0">
+              <a:buNone/>
+            </a:pPr>
+            <a:endParaRPr lang="en-US" dirty="0"/>
+          </a:p>
+        </p:txBody>
+      </p:sp>
+    </p:spTree>
+    <p:extLst>
+      <p:ext uri="{BB962C8B-B14F-4D97-AF65-F5344CB8AC3E}">
+        <p14:creationId xmlns:p14="http://schemas.microsoft.com/office/powerpoint/2010/main" val="651300954"/>
+      </p:ext>
+    </p:extLst>
+  </p:cSld>
+  <p:clrMapOvr>
+    <a:masterClrMapping/>
+  </p:clrMapOvr>
+</p:sld>
+</file>
+
+<file path=ppt/slides/slide13.xml><?xml version="1.0" encoding="utf-8"?>
 <p:sld xmlns:a="http://schemas.openxmlformats.org/drawingml/2006/main" xmlns:r="http://schemas.openxmlformats.org/officeDocument/2006/relationships" xmlns:p="http://schemas.openxmlformats.org/presentationml/2006/main">
   <p:cSld>
     <p:spTree>
@@ -45709,7 +45926,7 @@
 </p:sld>
 </file>
 
-<file path=ppt/slides/slide13.xml><?xml version="1.0" encoding="utf-8"?>
+<file path=ppt/slides/slide14.xml><?xml version="1.0" encoding="utf-8"?>
 <p:sld xmlns:a="http://schemas.openxmlformats.org/drawingml/2006/main" xmlns:r="http://schemas.openxmlformats.org/officeDocument/2006/relationships" xmlns:p="http://schemas.openxmlformats.org/presentationml/2006/main">
   <p:cSld>
     <p:spTree>
@@ -46707,7 +46924,7 @@
 </p:sld>
 </file>
 
-<file path=ppt/slides/slide14.xml><?xml version="1.0" encoding="utf-8"?>
+<file path=ppt/slides/slide15.xml><?xml version="1.0" encoding="utf-8"?>
 <p:sld xmlns:a="http://schemas.openxmlformats.org/drawingml/2006/main" xmlns:r="http://schemas.openxmlformats.org/officeDocument/2006/relationships" xmlns:p="http://schemas.openxmlformats.org/presentationml/2006/main">
   <p:cSld>
     <p:spTree>
@@ -47437,7 +47654,7 @@
 </p:sld>
 </file>
 
-<file path=ppt/slides/slide15.xml><?xml version="1.0" encoding="utf-8"?>
+<file path=ppt/slides/slide16.xml><?xml version="1.0" encoding="utf-8"?>
 <p:sld xmlns:a="http://schemas.openxmlformats.org/drawingml/2006/main" xmlns:r="http://schemas.openxmlformats.org/officeDocument/2006/relationships" xmlns:p="http://schemas.openxmlformats.org/presentationml/2006/main">
   <p:cSld>
     <p:spTree>
@@ -47531,7 +47748,7 @@
 </p:sld>
 </file>
 
-<file path=ppt/slides/slide16.xml><?xml version="1.0" encoding="utf-8"?>
+<file path=ppt/slides/slide17.xml><?xml version="1.0" encoding="utf-8"?>
 <p:sld xmlns:a="http://schemas.openxmlformats.org/drawingml/2006/main" xmlns:r="http://schemas.openxmlformats.org/officeDocument/2006/relationships" xmlns:p="http://schemas.openxmlformats.org/presentationml/2006/main">
   <p:cSld>
     <p:spTree>
@@ -47800,7 +48017,7 @@
 </p:sld>
 </file>
 
-<file path=ppt/slides/slide17.xml><?xml version="1.0" encoding="utf-8"?>
+<file path=ppt/slides/slide18.xml><?xml version="1.0" encoding="utf-8"?>
 <p:sld xmlns:a="http://schemas.openxmlformats.org/drawingml/2006/main" xmlns:r="http://schemas.openxmlformats.org/officeDocument/2006/relationships" xmlns:p="http://schemas.openxmlformats.org/presentationml/2006/main">
   <p:cSld>
     <p:spTree>
@@ -48927,7 +49144,7 @@
         <p:spPr>
           <a:xfrm>
             <a:off x="1013519" y="1722474"/>
-            <a:ext cx="10158611" cy="4399049"/>
+            <a:ext cx="10363318" cy="4399049"/>
           </a:xfrm>
         </p:spPr>
         <p:txBody>
@@ -48944,7 +49161,7 @@
             </a:pPr>
             <a:r>
               <a:rPr lang="en-US" dirty="0"/>
-              <a:t>Avoids copy-paste procedures, and it is easier to bypass model hallucination (perhaps updated?).</a:t>
+              <a:t>Avoids copy-paste procedures, and it is easier to bypass model hallucination (perhaps outdated?).</a:t>
             </a:r>
           </a:p>
           <a:p>
@@ -49120,20 +49337,24 @@
           <a:lstStyle/>
           <a:p>
             <a:r>
+              <a:rPr lang="da-DK" dirty="0"/>
+              <a:t>A </a:t>
+            </a:r>
+            <a:r>
               <a:rPr lang="da-DK" dirty="0" err="1"/>
-              <a:t>What</a:t>
+              <a:t>precondition</a:t>
             </a:r>
             <a:r>
               <a:rPr lang="da-DK" dirty="0"/>
-              <a:t> </a:t>
+              <a:t> for </a:t>
             </a:r>
             <a:r>
               <a:rPr lang="da-DK" dirty="0" err="1"/>
-              <a:t>are</a:t>
+              <a:t>assessing</a:t>
             </a:r>
             <a:r>
               <a:rPr lang="da-DK" dirty="0"/>
-              <a:t> common human screener performances?</a:t>
+              <a:t> AI screening</a:t>
             </a:r>
             <a:endParaRPr lang="en-US" dirty="0"/>
           </a:p>
@@ -49155,11 +49376,36 @@
             <p:ph type="body" sz="quarter" idx="10"/>
           </p:nvPr>
         </p:nvSpPr>
-        <p:spPr/>
+        <p:spPr>
+          <a:xfrm>
+            <a:off x="1013520" y="1956389"/>
+            <a:ext cx="10158611" cy="3888687"/>
+          </a:xfrm>
+        </p:spPr>
         <p:txBody>
           <a:bodyPr/>
           <a:lstStyle/>
           <a:p>
+            <a:r>
+              <a:rPr lang="da-DK" dirty="0"/>
+              <a:t>To </a:t>
+            </a:r>
+            <a:r>
+              <a:rPr lang="da-DK" dirty="0" err="1"/>
+              <a:t>know</a:t>
+            </a:r>
+            <a:r>
+              <a:rPr lang="da-DK" dirty="0"/>
+              <a:t> common human screening </a:t>
+            </a:r>
+            <a:r>
+              <a:rPr lang="da-DK" dirty="0" err="1"/>
+              <a:t>behavior</a:t>
+            </a:r>
+            <a:r>
+              <a:rPr lang="da-DK" dirty="0"/>
+              <a:t> </a:t>
+            </a:r>
             <a:endParaRPr lang="en-US" dirty="0"/>
           </a:p>
         </p:txBody>

--- a/screen-with-gpt-models.pptx
+++ b/screen-with-gpt-models.pptx
@@ -45642,7 +45642,7 @@
               <a:t>My </a:t>
             </a:r>
             <a:r>
-              <a:rPr lang="da-DK"/>
+              <a:rPr lang="da-DK" dirty="0" err="1"/>
               <a:t>projection</a:t>
             </a:r>
             <a:r>

--- a/screen-with-gpt-models.pptx
+++ b/screen-with-gpt-models.pptx
@@ -5,7 +5,7 @@
     <p:sldMasterId id="2147483693" r:id="rId1"/>
   </p:sldMasterIdLst>
   <p:notesMasterIdLst>
-    <p:notesMasterId r:id="rId20"/>
+    <p:notesMasterId r:id="rId21"/>
   </p:notesMasterIdLst>
   <p:sldIdLst>
     <p:sldId id="509" r:id="rId2"/>
@@ -14,18 +14,19 @@
     <p:sldId id="542" r:id="rId5"/>
     <p:sldId id="556" r:id="rId6"/>
     <p:sldId id="543" r:id="rId7"/>
-    <p:sldId id="546" r:id="rId8"/>
-    <p:sldId id="547" r:id="rId9"/>
-    <p:sldId id="549" r:id="rId10"/>
-    <p:sldId id="553" r:id="rId11"/>
-    <p:sldId id="554" r:id="rId12"/>
-    <p:sldId id="557" r:id="rId13"/>
-    <p:sldId id="545" r:id="rId14"/>
-    <p:sldId id="544" r:id="rId15"/>
-    <p:sldId id="548" r:id="rId16"/>
-    <p:sldId id="536" r:id="rId17"/>
-    <p:sldId id="555" r:id="rId18"/>
-    <p:sldId id="551" r:id="rId19"/>
+    <p:sldId id="558" r:id="rId8"/>
+    <p:sldId id="546" r:id="rId9"/>
+    <p:sldId id="547" r:id="rId10"/>
+    <p:sldId id="549" r:id="rId11"/>
+    <p:sldId id="553" r:id="rId12"/>
+    <p:sldId id="554" r:id="rId13"/>
+    <p:sldId id="557" r:id="rId14"/>
+    <p:sldId id="545" r:id="rId15"/>
+    <p:sldId id="544" r:id="rId16"/>
+    <p:sldId id="548" r:id="rId17"/>
+    <p:sldId id="536" r:id="rId18"/>
+    <p:sldId id="555" r:id="rId19"/>
+    <p:sldId id="551" r:id="rId20"/>
   </p:sldIdLst>
   <p:sldSz cx="12192000" cy="6858000"/>
   <p:notesSz cx="6858000" cy="9144000"/>
@@ -138,6 +139,7 @@
             <p14:sldId id="542"/>
             <p14:sldId id="556"/>
             <p14:sldId id="543"/>
+            <p14:sldId id="558"/>
             <p14:sldId id="546"/>
             <p14:sldId id="547"/>
             <p14:sldId id="549"/>
@@ -243,7 +245,7 @@
           <a:p>
             <a:fld id="{7BEB8190-3B91-4E7B-8634-E458355F2E20}" type="datetimeFigureOut">
               <a:rPr lang="en-GB" smtClean="0"/>
-              <a:t>20/04/2026</a:t>
+              <a:t>21/04/2026</a:t>
             </a:fld>
             <a:endParaRPr lang="en-GB"/>
           </a:p>
@@ -623,113 +625,10 @@
           <a:bodyPr/>
           <a:lstStyle/>
           <a:p>
-            <a:pPr marL="0" marR="0" lvl="0" indent="0" algn="l" defTabSz="914400" rtl="0" eaLnBrk="1" fontAlgn="auto" latinLnBrk="0" hangingPunct="1">
-              <a:lnSpc>
-                <a:spcPct val="100000"/>
-              </a:lnSpc>
-              <a:spcBef>
-                <a:spcPts val="0"/>
-              </a:spcBef>
-              <a:spcAft>
-                <a:spcPts val="0"/>
-              </a:spcAft>
-              <a:buClrTx/>
-              <a:buSzTx/>
-              <a:buFontTx/>
-              <a:buNone/>
-              <a:tabLst/>
-              <a:defRPr/>
-            </a:pPr>
-            <a:r>
-              <a:rPr lang="en-US" sz="1200" dirty="0"/>
-              <a:t>Human screeners overlook relevant studies for various reasons. Therefore, state-of-the-art is to conduct human double-screening. However, this is costly and many research groups cannot afford double-screening.</a:t>
-            </a:r>
-          </a:p>
-          <a:p>
-            <a:pPr marL="0" marR="0" lvl="0" indent="0" algn="l" defTabSz="914400" rtl="0" eaLnBrk="1" fontAlgn="auto" latinLnBrk="0" hangingPunct="1">
-              <a:lnSpc>
-                <a:spcPct val="100000"/>
-              </a:lnSpc>
-              <a:spcBef>
-                <a:spcPts val="0"/>
-              </a:spcBef>
-              <a:spcAft>
-                <a:spcPts val="0"/>
-              </a:spcAft>
-              <a:buClrTx/>
-              <a:buSzTx/>
-              <a:buFontTx/>
-              <a:buNone/>
-              <a:tabLst/>
-              <a:defRPr/>
-            </a:pPr>
-            <a:endParaRPr lang="en-US" sz="1200" dirty="0"/>
-          </a:p>
-          <a:p>
-            <a:pPr marL="0" marR="0" lvl="0" indent="0" algn="l" defTabSz="914400" rtl="0" eaLnBrk="1" fontAlgn="auto" latinLnBrk="0" hangingPunct="1">
-              <a:lnSpc>
-                <a:spcPct val="100000"/>
-              </a:lnSpc>
-              <a:spcBef>
-                <a:spcPts val="0"/>
-              </a:spcBef>
-              <a:spcAft>
-                <a:spcPts val="0"/>
-              </a:spcAft>
-              <a:buClrTx/>
-              <a:buSzTx/>
-              <a:buFontTx/>
-              <a:buNone/>
-              <a:tabLst/>
-              <a:defRPr/>
-            </a:pPr>
-            <a:r>
-              <a:rPr lang="en-US" sz="1200" dirty="0"/>
-              <a:t>Overlooking relevant studies at this initial review stage can be consequential, leading to substantially biased results.</a:t>
-            </a:r>
-            <a:endParaRPr lang="da-DK" dirty="0"/>
-          </a:p>
-          <a:p>
-            <a:endParaRPr lang="da-DK" dirty="0"/>
-          </a:p>
-          <a:p>
-            <a:r>
-              <a:rPr lang="da-DK" dirty="0"/>
-              <a:t>AI </a:t>
-            </a:r>
-            <a:r>
-              <a:rPr lang="da-DK" dirty="0" err="1"/>
-              <a:t>tools</a:t>
-            </a:r>
-            <a:r>
-              <a:rPr lang="da-DK" dirty="0"/>
-              <a:t> </a:t>
-            </a:r>
-            <a:r>
-              <a:rPr lang="da-DK" dirty="0" err="1"/>
-              <a:t>can</a:t>
-            </a:r>
-            <a:r>
-              <a:rPr lang="da-DK" dirty="0"/>
-              <a:t> </a:t>
-            </a:r>
-            <a:r>
-              <a:rPr lang="da-DK" dirty="0" err="1"/>
-              <a:t>accommodate</a:t>
-            </a:r>
-            <a:r>
-              <a:rPr lang="da-DK" dirty="0"/>
-              <a:t> </a:t>
-            </a:r>
-            <a:r>
-              <a:rPr lang="da-DK" dirty="0" err="1"/>
-              <a:t>both</a:t>
-            </a:r>
-            <a:r>
-              <a:rPr lang="da-DK" dirty="0"/>
-              <a:t> type of issues</a:t>
-            </a:r>
-            <a:endParaRPr lang="en-US" dirty="0"/>
+            <a:r>
+              <a:rPr lang="en-US" noProof="0" dirty="0"/>
+              <a:t>I expect to give you a 30-minute presentation of the background and screening framework, and then we will spend the last hour on the AIscreenR demonstration. </a:t>
+            </a:r>
           </a:p>
         </p:txBody>
       </p:sp>
@@ -750,16 +649,16 @@
           <a:p>
             <a:fld id="{A4F50FAE-CBEA-4494-871D-803C25DC58A1}" type="slidenum">
               <a:rPr lang="en-GB" smtClean="0"/>
-              <a:t>3</a:t>
+              <a:t>2</a:t>
             </a:fld>
-            <a:endParaRPr lang="en-GB"/>
+            <a:endParaRPr lang="en-GB" dirty="0"/>
           </a:p>
         </p:txBody>
       </p:sp>
     </p:spTree>
     <p:extLst>
       <p:ext uri="{BB962C8B-B14F-4D97-AF65-F5344CB8AC3E}">
-        <p14:creationId xmlns:p14="http://schemas.microsoft.com/office/powerpoint/2010/main" val="2468751560"/>
+        <p14:creationId xmlns:p14="http://schemas.microsoft.com/office/powerpoint/2010/main" val="1432003498"/>
       </p:ext>
     </p:extLst>
   </p:cSld>
@@ -813,45 +712,112 @@
           <a:bodyPr/>
           <a:lstStyle/>
           <a:p>
-            <a:pPr>
-              <a:spcAft>
-                <a:spcPts val="800"/>
-              </a:spcAft>
-            </a:pPr>
-            <a:r>
-              <a:rPr lang="en-US" dirty="0"/>
-              <a:t>As you will see in a moment, this is NOT the same as using ChatGPT!</a:t>
-            </a:r>
-          </a:p>
-          <a:p>
-            <a:pPr marL="0" indent="0">
+            <a:pPr marL="0" marR="0" lvl="0" indent="0" algn="l" defTabSz="914400" rtl="0" eaLnBrk="1" fontAlgn="auto" latinLnBrk="0" hangingPunct="1">
+              <a:lnSpc>
+                <a:spcPct val="100000"/>
+              </a:lnSpc>
+              <a:spcBef>
+                <a:spcPts val="0"/>
+              </a:spcBef>
+              <a:spcAft>
+                <a:spcPts val="0"/>
+              </a:spcAft>
+              <a:buClrTx/>
+              <a:buSzTx/>
+              <a:buFontTx/>
               <a:buNone/>
-            </a:pPr>
+              <a:tabLst/>
+              <a:defRPr/>
+            </a:pPr>
+            <a:r>
+              <a:rPr lang="en-US" sz="1200" dirty="0"/>
+              <a:t>Human screeners overlook relevant studies for various reasons. Therefore, state-of-the-art is to conduct human double-screening. However, this is costly and many research groups cannot afford double-screening.</a:t>
+            </a:r>
+          </a:p>
+          <a:p>
+            <a:pPr marL="0" marR="0" lvl="0" indent="0" algn="l" defTabSz="914400" rtl="0" eaLnBrk="1" fontAlgn="auto" latinLnBrk="0" hangingPunct="1">
+              <a:lnSpc>
+                <a:spcPct val="100000"/>
+              </a:lnSpc>
+              <a:spcBef>
+                <a:spcPts val="0"/>
+              </a:spcBef>
+              <a:spcAft>
+                <a:spcPts val="0"/>
+              </a:spcAft>
+              <a:buClrTx/>
+              <a:buSzTx/>
+              <a:buFontTx/>
+              <a:buNone/>
+              <a:tabLst/>
+              <a:defRPr/>
+            </a:pPr>
+            <a:endParaRPr lang="en-US" sz="1200" dirty="0"/>
+          </a:p>
+          <a:p>
+            <a:pPr marL="0" marR="0" lvl="0" indent="0" algn="l" defTabSz="914400" rtl="0" eaLnBrk="1" fontAlgn="auto" latinLnBrk="0" hangingPunct="1">
+              <a:lnSpc>
+                <a:spcPct val="100000"/>
+              </a:lnSpc>
+              <a:spcBef>
+                <a:spcPts val="0"/>
+              </a:spcBef>
+              <a:spcAft>
+                <a:spcPts val="0"/>
+              </a:spcAft>
+              <a:buClrTx/>
+              <a:buSzTx/>
+              <a:buFontTx/>
+              <a:buNone/>
+              <a:tabLst/>
+              <a:defRPr/>
+            </a:pPr>
+            <a:r>
+              <a:rPr lang="en-US" sz="1200" dirty="0"/>
+              <a:t>Overlooking relevant studies at this initial review stage can be consequential, leading to substantially biased results.</a:t>
+            </a:r>
             <a:endParaRPr lang="da-DK" dirty="0"/>
           </a:p>
           <a:p>
-            <a:pPr marL="0" indent="0">
-              <a:buNone/>
-            </a:pPr>
-            <a:endParaRPr lang="en-US" b="1" dirty="0"/>
-          </a:p>
-          <a:p>
-            <a:pPr marL="0" indent="0">
-              <a:buNone/>
-            </a:pPr>
-            <a:endParaRPr lang="en-US" b="1" dirty="0"/>
-          </a:p>
-          <a:p>
-            <a:pPr marL="0" indent="0">
-              <a:buNone/>
-            </a:pPr>
-            <a:r>
-              <a:rPr lang="en-US" b="1" dirty="0"/>
-              <a:t>Based on this, we suggest that GPT API models can be used as full second screeners in state-of-the-art reviews</a:t>
-            </a:r>
-            <a:endParaRPr lang="da-DK" b="1" dirty="0"/>
-          </a:p>
-          <a:p>
+            <a:endParaRPr lang="da-DK" dirty="0"/>
+          </a:p>
+          <a:p>
+            <a:r>
+              <a:rPr lang="da-DK" dirty="0"/>
+              <a:t>AI </a:t>
+            </a:r>
+            <a:r>
+              <a:rPr lang="da-DK" dirty="0" err="1"/>
+              <a:t>tools</a:t>
+            </a:r>
+            <a:r>
+              <a:rPr lang="da-DK" dirty="0"/>
+              <a:t> </a:t>
+            </a:r>
+            <a:r>
+              <a:rPr lang="da-DK" dirty="0" err="1"/>
+              <a:t>can</a:t>
+            </a:r>
+            <a:r>
+              <a:rPr lang="da-DK" dirty="0"/>
+              <a:t> </a:t>
+            </a:r>
+            <a:r>
+              <a:rPr lang="da-DK" dirty="0" err="1"/>
+              <a:t>accommodate</a:t>
+            </a:r>
+            <a:r>
+              <a:rPr lang="da-DK" dirty="0"/>
+              <a:t> </a:t>
+            </a:r>
+            <a:r>
+              <a:rPr lang="da-DK" dirty="0" err="1"/>
+              <a:t>both</a:t>
+            </a:r>
+            <a:r>
+              <a:rPr lang="da-DK" dirty="0"/>
+              <a:t> type of issues</a:t>
+            </a:r>
             <a:endParaRPr lang="en-US" dirty="0"/>
           </a:p>
         </p:txBody>
@@ -873,7 +839,7 @@
           <a:p>
             <a:fld id="{A4F50FAE-CBEA-4494-871D-803C25DC58A1}" type="slidenum">
               <a:rPr lang="en-GB" smtClean="0"/>
-              <a:t>4</a:t>
+              <a:t>3</a:t>
             </a:fld>
             <a:endParaRPr lang="en-GB"/>
           </a:p>
@@ -882,7 +848,7 @@
     </p:spTree>
     <p:extLst>
       <p:ext uri="{BB962C8B-B14F-4D97-AF65-F5344CB8AC3E}">
-        <p14:creationId xmlns:p14="http://schemas.microsoft.com/office/powerpoint/2010/main" val="3685943026"/>
+        <p14:creationId xmlns:p14="http://schemas.microsoft.com/office/powerpoint/2010/main" val="2468751560"/>
       </p:ext>
     </p:extLst>
   </p:cSld>
@@ -936,10 +902,27 @@
           <a:bodyPr/>
           <a:lstStyle/>
           <a:p>
+            <a:pPr>
+              <a:spcAft>
+                <a:spcPts val="800"/>
+              </a:spcAft>
+            </a:pPr>
             <a:r>
               <a:rPr lang="en-US" dirty="0"/>
-              <a:t>With a sufficiently powerful computer, you can screen up to 30,000 per minute.</a:t>
-            </a:r>
+              <a:t>As you will see in a moment, this is NOT the same as using ChatGPT!</a:t>
+            </a:r>
+          </a:p>
+          <a:p>
+            <a:pPr marL="0" indent="0">
+              <a:buNone/>
+            </a:pPr>
+            <a:endParaRPr lang="da-DK" dirty="0"/>
+          </a:p>
+          <a:p>
+            <a:pPr marL="0" indent="0">
+              <a:buNone/>
+            </a:pPr>
+            <a:endParaRPr lang="en-US" b="1" dirty="0"/>
           </a:p>
         </p:txBody>
       </p:sp>
@@ -960,7 +943,7 @@
           <a:p>
             <a:fld id="{A4F50FAE-CBEA-4494-871D-803C25DC58A1}" type="slidenum">
               <a:rPr lang="en-GB" smtClean="0"/>
-              <a:t>5</a:t>
+              <a:t>4</a:t>
             </a:fld>
             <a:endParaRPr lang="en-GB"/>
           </a:p>
@@ -969,7 +952,7 @@
     </p:spTree>
     <p:extLst>
       <p:ext uri="{BB962C8B-B14F-4D97-AF65-F5344CB8AC3E}">
-        <p14:creationId xmlns:p14="http://schemas.microsoft.com/office/powerpoint/2010/main" val="1473025834"/>
+        <p14:creationId xmlns:p14="http://schemas.microsoft.com/office/powerpoint/2010/main" val="3685943026"/>
       </p:ext>
     </p:extLst>
   </p:cSld>
@@ -1024,102 +1007,9 @@
           <a:lstStyle/>
           <a:p>
             <a:r>
-              <a:rPr lang="da-DK" dirty="0" err="1"/>
-              <a:t>Before</a:t>
-            </a:r>
-            <a:r>
-              <a:rPr lang="da-DK" dirty="0"/>
-              <a:t> </a:t>
-            </a:r>
-            <a:r>
-              <a:rPr lang="da-DK" dirty="0" err="1"/>
-              <a:t>discussing</a:t>
-            </a:r>
-            <a:r>
-              <a:rPr lang="da-DK" dirty="0"/>
-              <a:t> the screening performance of AI </a:t>
-            </a:r>
-            <a:r>
-              <a:rPr lang="da-DK" dirty="0" err="1"/>
-              <a:t>tools</a:t>
-            </a:r>
-            <a:r>
-              <a:rPr lang="da-DK" dirty="0"/>
-              <a:t>, I </a:t>
-            </a:r>
-            <a:r>
-              <a:rPr lang="da-DK" dirty="0" err="1"/>
-              <a:t>will</a:t>
-            </a:r>
-            <a:r>
-              <a:rPr lang="da-DK" dirty="0"/>
-              <a:t> </a:t>
-            </a:r>
-            <a:r>
-              <a:rPr lang="da-DK" dirty="0" err="1"/>
-              <a:t>spent</a:t>
-            </a:r>
-            <a:r>
-              <a:rPr lang="da-DK" dirty="0"/>
-              <a:t> </a:t>
-            </a:r>
-            <a:r>
-              <a:rPr lang="da-DK" dirty="0" err="1"/>
-              <a:t>some</a:t>
-            </a:r>
-            <a:r>
-              <a:rPr lang="da-DK" dirty="0"/>
-              <a:t> time </a:t>
-            </a:r>
-            <a:r>
-              <a:rPr lang="da-DK" dirty="0" err="1"/>
-              <a:t>embarking</a:t>
-            </a:r>
-            <a:r>
-              <a:rPr lang="da-DK" dirty="0"/>
-              <a:t> the </a:t>
-            </a:r>
-            <a:r>
-              <a:rPr lang="da-DK" dirty="0" err="1"/>
-              <a:t>question</a:t>
-            </a:r>
-            <a:r>
-              <a:rPr lang="da-DK" dirty="0"/>
-              <a:t> </a:t>
-            </a:r>
-            <a:r>
-              <a:rPr lang="da-DK" dirty="0" err="1"/>
-              <a:t>how</a:t>
-            </a:r>
-            <a:r>
-              <a:rPr lang="da-DK" dirty="0"/>
-              <a:t> </a:t>
-            </a:r>
-            <a:r>
-              <a:rPr lang="da-DK" dirty="0" err="1"/>
-              <a:t>good</a:t>
-            </a:r>
-            <a:r>
-              <a:rPr lang="da-DK" dirty="0"/>
-              <a:t> </a:t>
-            </a:r>
-            <a:r>
-              <a:rPr lang="da-DK" dirty="0" err="1"/>
-              <a:t>are</a:t>
-            </a:r>
-            <a:r>
-              <a:rPr lang="da-DK" dirty="0"/>
-              <a:t> human at screening </a:t>
-            </a:r>
-            <a:r>
-              <a:rPr lang="da-DK" dirty="0" err="1"/>
-              <a:t>title</a:t>
-            </a:r>
-            <a:r>
-              <a:rPr lang="da-DK" dirty="0"/>
-              <a:t> and abstract. </a:t>
-            </a:r>
-            <a:endParaRPr lang="en-US" dirty="0"/>
+              <a:rPr lang="en-US" dirty="0"/>
+              <a:t>With a sufficiently powerful computer, you can screen up to 30,000 per minute.</a:t>
+            </a:r>
           </a:p>
         </p:txBody>
       </p:sp>
@@ -1140,6 +1030,188 @@
           <a:p>
             <a:fld id="{A4F50FAE-CBEA-4494-871D-803C25DC58A1}" type="slidenum">
               <a:rPr lang="en-GB" smtClean="0"/>
+              <a:t>5</a:t>
+            </a:fld>
+            <a:endParaRPr lang="en-GB"/>
+          </a:p>
+        </p:txBody>
+      </p:sp>
+    </p:spTree>
+    <p:extLst>
+      <p:ext uri="{BB962C8B-B14F-4D97-AF65-F5344CB8AC3E}">
+        <p14:creationId xmlns:p14="http://schemas.microsoft.com/office/powerpoint/2010/main" val="1473025834"/>
+      </p:ext>
+    </p:extLst>
+  </p:cSld>
+  <p:clrMapOvr>
+    <a:masterClrMapping/>
+  </p:clrMapOvr>
+</p:notes>
+</file>
+
+<file path=ppt/notesSlides/notesSlide6.xml><?xml version="1.0" encoding="utf-8"?>
+<p:notes xmlns:a="http://schemas.openxmlformats.org/drawingml/2006/main" xmlns:r="http://schemas.openxmlformats.org/officeDocument/2006/relationships" xmlns:p="http://schemas.openxmlformats.org/presentationml/2006/main">
+  <p:cSld>
+    <p:spTree>
+      <p:nvGrpSpPr>
+        <p:cNvPr id="1" name=""/>
+        <p:cNvGrpSpPr/>
+        <p:nvPr/>
+      </p:nvGrpSpPr>
+      <p:grpSpPr>
+        <a:xfrm>
+          <a:off x="0" y="0"/>
+          <a:ext cx="0" cy="0"/>
+          <a:chOff x="0" y="0"/>
+          <a:chExt cx="0" cy="0"/>
+        </a:xfrm>
+      </p:grpSpPr>
+      <p:sp>
+        <p:nvSpPr>
+          <p:cNvPr id="2" name="Slide Image Placeholder 1"/>
+          <p:cNvSpPr>
+            <a:spLocks noGrp="1" noRot="1" noChangeAspect="1"/>
+          </p:cNvSpPr>
+          <p:nvPr>
+            <p:ph type="sldImg"/>
+          </p:nvPr>
+        </p:nvSpPr>
+        <p:spPr/>
+      </p:sp>
+      <p:sp>
+        <p:nvSpPr>
+          <p:cNvPr id="3" name="Notes Placeholder 2"/>
+          <p:cNvSpPr>
+            <a:spLocks noGrp="1"/>
+          </p:cNvSpPr>
+          <p:nvPr>
+            <p:ph type="body" idx="1"/>
+          </p:nvPr>
+        </p:nvSpPr>
+        <p:spPr/>
+        <p:txBody>
+          <a:bodyPr/>
+          <a:lstStyle/>
+          <a:p>
+            <a:r>
+              <a:rPr lang="da-DK" dirty="0" err="1"/>
+              <a:t>Before</a:t>
+            </a:r>
+            <a:r>
+              <a:rPr lang="da-DK" dirty="0"/>
+              <a:t> </a:t>
+            </a:r>
+            <a:r>
+              <a:rPr lang="da-DK" dirty="0" err="1"/>
+              <a:t>discussing</a:t>
+            </a:r>
+            <a:r>
+              <a:rPr lang="da-DK" dirty="0"/>
+              <a:t> the screening performance of AI </a:t>
+            </a:r>
+            <a:r>
+              <a:rPr lang="da-DK" dirty="0" err="1"/>
+              <a:t>tools</a:t>
+            </a:r>
+            <a:r>
+              <a:rPr lang="da-DK" dirty="0"/>
+              <a:t>, I </a:t>
+            </a:r>
+            <a:r>
+              <a:rPr lang="da-DK" dirty="0" err="1"/>
+              <a:t>will</a:t>
+            </a:r>
+            <a:r>
+              <a:rPr lang="da-DK" dirty="0"/>
+              <a:t> </a:t>
+            </a:r>
+            <a:r>
+              <a:rPr lang="da-DK" dirty="0" err="1"/>
+              <a:t>spent</a:t>
+            </a:r>
+            <a:r>
+              <a:rPr lang="da-DK" dirty="0"/>
+              <a:t> </a:t>
+            </a:r>
+            <a:r>
+              <a:rPr lang="da-DK" dirty="0" err="1"/>
+              <a:t>some</a:t>
+            </a:r>
+            <a:r>
+              <a:rPr lang="da-DK" dirty="0"/>
+              <a:t> time </a:t>
+            </a:r>
+            <a:r>
+              <a:rPr lang="da-DK" dirty="0" err="1"/>
+              <a:t>embarking</a:t>
+            </a:r>
+            <a:r>
+              <a:rPr lang="da-DK" dirty="0"/>
+              <a:t> the </a:t>
+            </a:r>
+            <a:r>
+              <a:rPr lang="da-DK" dirty="0" err="1"/>
+              <a:t>question</a:t>
+            </a:r>
+            <a:r>
+              <a:rPr lang="da-DK" dirty="0"/>
+              <a:t> </a:t>
+            </a:r>
+            <a:r>
+              <a:rPr lang="da-DK" dirty="0" err="1"/>
+              <a:t>how</a:t>
+            </a:r>
+            <a:r>
+              <a:rPr lang="da-DK" dirty="0"/>
+              <a:t> </a:t>
+            </a:r>
+            <a:r>
+              <a:rPr lang="da-DK" dirty="0" err="1"/>
+              <a:t>good</a:t>
+            </a:r>
+            <a:r>
+              <a:rPr lang="da-DK" dirty="0"/>
+              <a:t> </a:t>
+            </a:r>
+            <a:r>
+              <a:rPr lang="da-DK" dirty="0" err="1"/>
+              <a:t>are</a:t>
+            </a:r>
+            <a:r>
+              <a:rPr lang="da-DK" dirty="0"/>
+              <a:t> human at screening </a:t>
+            </a:r>
+            <a:r>
+              <a:rPr lang="da-DK" dirty="0" err="1"/>
+              <a:t>title</a:t>
+            </a:r>
+            <a:r>
+              <a:rPr lang="da-DK" dirty="0"/>
+              <a:t> and abstract. </a:t>
+            </a:r>
+          </a:p>
+          <a:p>
+            <a:endParaRPr lang="en-US" dirty="0"/>
+          </a:p>
+        </p:txBody>
+      </p:sp>
+      <p:sp>
+        <p:nvSpPr>
+          <p:cNvPr id="4" name="Slide Number Placeholder 3"/>
+          <p:cNvSpPr>
+            <a:spLocks noGrp="1"/>
+          </p:cNvSpPr>
+          <p:nvPr>
+            <p:ph type="sldNum" sz="quarter" idx="5"/>
+          </p:nvPr>
+        </p:nvSpPr>
+        <p:spPr/>
+        <p:txBody>
+          <a:bodyPr/>
+          <a:lstStyle/>
+          <a:p>
+            <a:fld id="{A4F50FAE-CBEA-4494-871D-803C25DC58A1}" type="slidenum">
+              <a:rPr lang="en-GB" smtClean="0"/>
               <a:t>6</a:t>
             </a:fld>
             <a:endParaRPr lang="en-GB"/>
@@ -1150,6 +1222,280 @@
     <p:extLst>
       <p:ext uri="{BB962C8B-B14F-4D97-AF65-F5344CB8AC3E}">
         <p14:creationId xmlns:p14="http://schemas.microsoft.com/office/powerpoint/2010/main" val="2543677367"/>
+      </p:ext>
+    </p:extLst>
+  </p:cSld>
+  <p:clrMapOvr>
+    <a:masterClrMapping/>
+  </p:clrMapOvr>
+</p:notes>
+</file>
+
+<file path=ppt/notesSlides/notesSlide7.xml><?xml version="1.0" encoding="utf-8"?>
+<p:notes xmlns:a="http://schemas.openxmlformats.org/drawingml/2006/main" xmlns:r="http://schemas.openxmlformats.org/officeDocument/2006/relationships" xmlns:p="http://schemas.openxmlformats.org/presentationml/2006/main">
+  <p:cSld>
+    <p:spTree>
+      <p:nvGrpSpPr>
+        <p:cNvPr id="1" name=""/>
+        <p:cNvGrpSpPr/>
+        <p:nvPr/>
+      </p:nvGrpSpPr>
+      <p:grpSpPr>
+        <a:xfrm>
+          <a:off x="0" y="0"/>
+          <a:ext cx="0" cy="0"/>
+          <a:chOff x="0" y="0"/>
+          <a:chExt cx="0" cy="0"/>
+        </a:xfrm>
+      </p:grpSpPr>
+      <p:sp>
+        <p:nvSpPr>
+          <p:cNvPr id="2" name="Slide Image Placeholder 1"/>
+          <p:cNvSpPr>
+            <a:spLocks noGrp="1" noRot="1" noChangeAspect="1"/>
+          </p:cNvSpPr>
+          <p:nvPr>
+            <p:ph type="sldImg"/>
+          </p:nvPr>
+        </p:nvSpPr>
+        <p:spPr/>
+      </p:sp>
+      <p:sp>
+        <p:nvSpPr>
+          <p:cNvPr id="3" name="Notes Placeholder 2"/>
+          <p:cNvSpPr>
+            <a:spLocks noGrp="1"/>
+          </p:cNvSpPr>
+          <p:nvPr>
+            <p:ph type="body" idx="1"/>
+          </p:nvPr>
+        </p:nvSpPr>
+        <p:spPr/>
+        <p:txBody>
+          <a:bodyPr/>
+          <a:lstStyle/>
+          <a:p>
+            <a:r>
+              <a:rPr lang="da-DK" dirty="0" err="1"/>
+              <a:t>Before</a:t>
+            </a:r>
+            <a:r>
+              <a:rPr lang="da-DK" dirty="0"/>
+              <a:t> </a:t>
+            </a:r>
+            <a:r>
+              <a:rPr lang="da-DK" dirty="0" err="1"/>
+              <a:t>discussing</a:t>
+            </a:r>
+            <a:r>
+              <a:rPr lang="da-DK" dirty="0"/>
+              <a:t> the screening performance of AI </a:t>
+            </a:r>
+            <a:r>
+              <a:rPr lang="da-DK" dirty="0" err="1"/>
+              <a:t>tools</a:t>
+            </a:r>
+            <a:r>
+              <a:rPr lang="da-DK" dirty="0"/>
+              <a:t>, I </a:t>
+            </a:r>
+            <a:r>
+              <a:rPr lang="da-DK" dirty="0" err="1"/>
+              <a:t>will</a:t>
+            </a:r>
+            <a:r>
+              <a:rPr lang="da-DK" dirty="0"/>
+              <a:t> </a:t>
+            </a:r>
+            <a:r>
+              <a:rPr lang="da-DK" dirty="0" err="1"/>
+              <a:t>spent</a:t>
+            </a:r>
+            <a:r>
+              <a:rPr lang="da-DK" dirty="0"/>
+              <a:t> </a:t>
+            </a:r>
+            <a:r>
+              <a:rPr lang="da-DK" dirty="0" err="1"/>
+              <a:t>some</a:t>
+            </a:r>
+            <a:r>
+              <a:rPr lang="da-DK" dirty="0"/>
+              <a:t> time </a:t>
+            </a:r>
+            <a:r>
+              <a:rPr lang="da-DK" dirty="0" err="1"/>
+              <a:t>embarking</a:t>
+            </a:r>
+            <a:r>
+              <a:rPr lang="da-DK" dirty="0"/>
+              <a:t> the </a:t>
+            </a:r>
+            <a:r>
+              <a:rPr lang="da-DK" dirty="0" err="1"/>
+              <a:t>question</a:t>
+            </a:r>
+            <a:r>
+              <a:rPr lang="da-DK" dirty="0"/>
+              <a:t> </a:t>
+            </a:r>
+            <a:r>
+              <a:rPr lang="da-DK" dirty="0" err="1"/>
+              <a:t>how</a:t>
+            </a:r>
+            <a:r>
+              <a:rPr lang="da-DK" dirty="0"/>
+              <a:t> </a:t>
+            </a:r>
+            <a:r>
+              <a:rPr lang="da-DK" dirty="0" err="1"/>
+              <a:t>good</a:t>
+            </a:r>
+            <a:r>
+              <a:rPr lang="da-DK" dirty="0"/>
+              <a:t> </a:t>
+            </a:r>
+            <a:r>
+              <a:rPr lang="da-DK" dirty="0" err="1"/>
+              <a:t>are</a:t>
+            </a:r>
+            <a:r>
+              <a:rPr lang="da-DK" dirty="0"/>
+              <a:t> human at screening </a:t>
+            </a:r>
+            <a:r>
+              <a:rPr lang="da-DK" dirty="0" err="1"/>
+              <a:t>title</a:t>
+            </a:r>
+            <a:r>
+              <a:rPr lang="da-DK" dirty="0"/>
+              <a:t> and abstract. </a:t>
+            </a:r>
+          </a:p>
+          <a:p>
+            <a:endParaRPr lang="en-US" dirty="0"/>
+          </a:p>
+        </p:txBody>
+      </p:sp>
+      <p:sp>
+        <p:nvSpPr>
+          <p:cNvPr id="4" name="Slide Number Placeholder 3"/>
+          <p:cNvSpPr>
+            <a:spLocks noGrp="1"/>
+          </p:cNvSpPr>
+          <p:nvPr>
+            <p:ph type="sldNum" sz="quarter" idx="5"/>
+          </p:nvPr>
+        </p:nvSpPr>
+        <p:spPr/>
+        <p:txBody>
+          <a:bodyPr/>
+          <a:lstStyle/>
+          <a:p>
+            <a:fld id="{A4F50FAE-CBEA-4494-871D-803C25DC58A1}" type="slidenum">
+              <a:rPr lang="en-GB" smtClean="0"/>
+              <a:t>7</a:t>
+            </a:fld>
+            <a:endParaRPr lang="en-GB"/>
+          </a:p>
+        </p:txBody>
+      </p:sp>
+    </p:spTree>
+    <p:extLst>
+      <p:ext uri="{BB962C8B-B14F-4D97-AF65-F5344CB8AC3E}">
+        <p14:creationId xmlns:p14="http://schemas.microsoft.com/office/powerpoint/2010/main" val="3619731482"/>
+      </p:ext>
+    </p:extLst>
+  </p:cSld>
+  <p:clrMapOvr>
+    <a:masterClrMapping/>
+  </p:clrMapOvr>
+</p:notes>
+</file>
+
+<file path=ppt/notesSlides/notesSlide8.xml><?xml version="1.0" encoding="utf-8"?>
+<p:notes xmlns:a="http://schemas.openxmlformats.org/drawingml/2006/main" xmlns:r="http://schemas.openxmlformats.org/officeDocument/2006/relationships" xmlns:p="http://schemas.openxmlformats.org/presentationml/2006/main">
+  <p:cSld>
+    <p:spTree>
+      <p:nvGrpSpPr>
+        <p:cNvPr id="1" name=""/>
+        <p:cNvGrpSpPr/>
+        <p:nvPr/>
+      </p:nvGrpSpPr>
+      <p:grpSpPr>
+        <a:xfrm>
+          <a:off x="0" y="0"/>
+          <a:ext cx="0" cy="0"/>
+          <a:chOff x="0" y="0"/>
+          <a:chExt cx="0" cy="0"/>
+        </a:xfrm>
+      </p:grpSpPr>
+      <p:sp>
+        <p:nvSpPr>
+          <p:cNvPr id="2" name="Slide Image Placeholder 1"/>
+          <p:cNvSpPr>
+            <a:spLocks noGrp="1" noRot="1" noChangeAspect="1"/>
+          </p:cNvSpPr>
+          <p:nvPr>
+            <p:ph type="sldImg"/>
+          </p:nvPr>
+        </p:nvSpPr>
+        <p:spPr/>
+      </p:sp>
+      <p:sp>
+        <p:nvSpPr>
+          <p:cNvPr id="3" name="Notes Placeholder 2"/>
+          <p:cNvSpPr>
+            <a:spLocks noGrp="1"/>
+          </p:cNvSpPr>
+          <p:nvPr>
+            <p:ph type="body" idx="1"/>
+          </p:nvPr>
+        </p:nvSpPr>
+        <p:spPr/>
+        <p:txBody>
+          <a:bodyPr/>
+          <a:lstStyle/>
+          <a:p>
+            <a:r>
+              <a:rPr lang="da-DK" dirty="0"/>
+              <a:t>AI </a:t>
+            </a:r>
+            <a:r>
+              <a:rPr lang="da-DK" dirty="0" err="1"/>
+              <a:t>act</a:t>
+            </a:r>
+            <a:endParaRPr lang="en-US" dirty="0"/>
+          </a:p>
+        </p:txBody>
+      </p:sp>
+      <p:sp>
+        <p:nvSpPr>
+          <p:cNvPr id="4" name="Slide Number Placeholder 3"/>
+          <p:cNvSpPr>
+            <a:spLocks noGrp="1"/>
+          </p:cNvSpPr>
+          <p:nvPr>
+            <p:ph type="sldNum" sz="quarter" idx="5"/>
+          </p:nvPr>
+        </p:nvSpPr>
+        <p:spPr/>
+        <p:txBody>
+          <a:bodyPr/>
+          <a:lstStyle/>
+          <a:p>
+            <a:fld id="{A4F50FAE-CBEA-4494-871D-803C25DC58A1}" type="slidenum">
+              <a:rPr lang="en-GB" smtClean="0"/>
+              <a:t>13</a:t>
+            </a:fld>
+            <a:endParaRPr lang="en-GB"/>
+          </a:p>
+        </p:txBody>
+      </p:sp>
+    </p:spTree>
+    <p:extLst>
+      <p:ext uri="{BB962C8B-B14F-4D97-AF65-F5344CB8AC3E}">
+        <p14:creationId xmlns:p14="http://schemas.microsoft.com/office/powerpoint/2010/main" val="3716624568"/>
       </p:ext>
     </p:extLst>
   </p:cSld>
@@ -44527,8 +44873,8 @@
         </p:nvSpPr>
         <p:spPr>
           <a:xfrm>
-            <a:off x="579141" y="3886534"/>
-            <a:ext cx="5002951" cy="2142126"/>
+            <a:off x="579142" y="4198800"/>
+            <a:ext cx="5002951" cy="1940108"/>
           </a:xfrm>
         </p:spPr>
         <p:txBody>
@@ -44562,9 +44908,6 @@
               <a:rPr lang="en-US" dirty="0"/>
               <a:t>The Danish Center for Social Science Research</a:t>
             </a:r>
-          </a:p>
-          <a:p>
-            <a:endParaRPr lang="en-US" dirty="0"/>
           </a:p>
           <a:p>
             <a:endParaRPr lang="en-US" dirty="0"/>
@@ -44590,7 +44933,7 @@
         <p:spPr>
           <a:xfrm>
             <a:off x="579142" y="719092"/>
-            <a:ext cx="5262365" cy="2637949"/>
+            <a:ext cx="5386652" cy="3002303"/>
           </a:xfrm>
         </p:spPr>
         <p:txBody>
@@ -44599,7 +44942,7 @@
           <a:p>
             <a:r>
               <a:rPr lang="en-US" sz="2800" dirty="0"/>
-              <a:t>How to Use Generative Pretrained Transformer (GPT)  Models as Reliable Second Screeners of Titles and Abstracts in Systematic Reviews</a:t>
+              <a:t>How to Use Generative Pretrained Transformer (GPT)  Models as Reliable Second Screeners of Titles and Abstracts in High-Quality Systematic Reviews [workshop]</a:t>
             </a:r>
             <a:endParaRPr lang="da-DK" sz="2800" dirty="0"/>
           </a:p>
@@ -44607,10 +44950,10 @@
       </p:sp>
       <p:pic>
         <p:nvPicPr>
-          <p:cNvPr id="11" name="Picture Placeholder 10" descr="A robot touching a finger&#10;&#10;AI-generated content may be incorrect.">
+          <p:cNvPr id="7" name="Picture Placeholder 6" descr="A robot and a hand touching a finger&#10;&#10;AI-generated content may be incorrect.">
             <a:extLst>
               <a:ext uri="{FF2B5EF4-FFF2-40B4-BE49-F238E27FC236}">
-                <a16:creationId xmlns:a16="http://schemas.microsoft.com/office/drawing/2014/main" id="{44A107C3-17FB-9856-DE25-75BB4EE86FC9}"/>
+                <a16:creationId xmlns:a16="http://schemas.microsoft.com/office/drawing/2014/main" id="{B33B4BC4-34A7-4EB8-34B7-931AA2839A9B}"/>
               </a:ext>
             </a:extLst>
           </p:cNvPr>
@@ -44629,15 +44972,15 @@
               </a:ext>
             </a:extLst>
           </a:blip>
-          <a:srcRect l="4811" r="4811"/>
+          <a:srcRect t="2862" b="2862"/>
           <a:stretch>
             <a:fillRect/>
           </a:stretch>
         </p:blipFill>
         <p:spPr>
           <a:xfrm>
-            <a:off x="5965794" y="0"/>
-            <a:ext cx="6226206" cy="6858000"/>
+            <a:off x="5725886" y="0"/>
+            <a:ext cx="6466114" cy="6858000"/>
           </a:xfrm>
         </p:spPr>
       </p:pic>
@@ -44674,6 +45017,183 @@
       </p:grpSpPr>
       <p:sp>
         <p:nvSpPr>
+          <p:cNvPr id="2" name="Title 1">
+            <a:extLst>
+              <a:ext uri="{FF2B5EF4-FFF2-40B4-BE49-F238E27FC236}">
+                <a16:creationId xmlns:a16="http://schemas.microsoft.com/office/drawing/2014/main" id="{7BEA4FB1-1DD4-4639-855A-362928431391}"/>
+              </a:ext>
+            </a:extLst>
+          </p:cNvPr>
+          <p:cNvSpPr>
+            <a:spLocks noGrp="1"/>
+          </p:cNvSpPr>
+          <p:nvPr>
+            <p:ph type="title"/>
+          </p:nvPr>
+        </p:nvSpPr>
+        <p:spPr>
+          <a:xfrm>
+            <a:off x="1013519" y="567233"/>
+            <a:ext cx="10158611" cy="891382"/>
+          </a:xfrm>
+        </p:spPr>
+        <p:txBody>
+          <a:bodyPr/>
+          <a:lstStyle/>
+          <a:p>
+            <a:r>
+              <a:rPr lang="da-DK" dirty="0"/>
+              <a:t>H</a:t>
+            </a:r>
+            <a:r>
+              <a:rPr lang="en-US" dirty="0"/>
+              <a:t>ow generalizable is this approach?</a:t>
+            </a:r>
+          </a:p>
+        </p:txBody>
+      </p:sp>
+      <p:sp>
+        <p:nvSpPr>
+          <p:cNvPr id="3" name="Text Placeholder 2">
+            <a:extLst>
+              <a:ext uri="{FF2B5EF4-FFF2-40B4-BE49-F238E27FC236}">
+                <a16:creationId xmlns:a16="http://schemas.microsoft.com/office/drawing/2014/main" id="{95D961D5-5AD9-4CA6-BC3E-E902F6121AB7}"/>
+              </a:ext>
+            </a:extLst>
+          </p:cNvPr>
+          <p:cNvSpPr>
+            <a:spLocks noGrp="1"/>
+          </p:cNvSpPr>
+          <p:nvPr>
+            <p:ph type="body" sz="quarter" idx="10"/>
+          </p:nvPr>
+        </p:nvSpPr>
+        <p:spPr>
+          <a:xfrm>
+            <a:off x="1013518" y="1458614"/>
+            <a:ext cx="10158611" cy="4911363"/>
+          </a:xfrm>
+        </p:spPr>
+        <p:txBody>
+          <a:bodyPr/>
+          <a:lstStyle/>
+          <a:p>
+            <a:pPr marL="0" indent="0">
+              <a:buNone/>
+            </a:pPr>
+            <a:r>
+              <a:rPr lang="en-US" dirty="0"/>
+              <a:t>We have conducted three large-scale classification experiments with different levels of complexity in terms of the number of inclusion criteria. Herein we found that: </a:t>
+            </a:r>
+            <a:br>
+              <a:rPr lang="en-US" dirty="0"/>
+            </a:br>
+            <a:endParaRPr lang="en-US" dirty="0"/>
+          </a:p>
+          <a:p>
+            <a:pPr>
+              <a:spcAft>
+                <a:spcPts val="800"/>
+              </a:spcAft>
+            </a:pPr>
+            <a:r>
+              <a:rPr lang="en-US" dirty="0"/>
+              <a:t>GPT API models can perform on par with or in some cases even better typical human second screeners in high-quality systematic reviews (Vembye et al., 2025). All models yield recalls above 80% in all of our experiments while showing high exclusion rate as well. </a:t>
+            </a:r>
+          </a:p>
+          <a:p>
+            <a:pPr>
+              <a:spcAft>
+                <a:spcPts val="800"/>
+              </a:spcAft>
+            </a:pPr>
+            <a:r>
+              <a:rPr lang="en-US" dirty="0"/>
+              <a:t>GPT-4 model can be rather over-inclusive in complex review settings.</a:t>
+            </a:r>
+          </a:p>
+          <a:p>
+            <a:pPr>
+              <a:spcAft>
+                <a:spcPts val="800"/>
+              </a:spcAft>
+            </a:pPr>
+            <a:r>
+              <a:rPr lang="en-US" dirty="0"/>
+              <a:t>The GPT-4 model outperforms </a:t>
+            </a:r>
+            <a:r>
+              <a:rPr lang="da-DK" dirty="0"/>
+              <a:t>the GPT-3.5-turbo model. </a:t>
+            </a:r>
+            <a:r>
+              <a:rPr lang="en-US" dirty="0"/>
+              <a:t>We therefore recommend primarily using GPT-4 models for title and abstract screening</a:t>
+            </a:r>
+            <a:r>
+              <a:rPr lang="da-DK" dirty="0"/>
+              <a:t>.</a:t>
+            </a:r>
+          </a:p>
+          <a:p>
+            <a:pPr>
+              <a:spcAft>
+                <a:spcPts val="800"/>
+              </a:spcAft>
+            </a:pPr>
+            <a:r>
+              <a:rPr lang="en-US" dirty="0"/>
+              <a:t>Moreover, our newest results suggest that GPT-4o-mini, which is 200 times cheaper than GPT-4, can perform on par the GPT-4, when using 10 screenings</a:t>
+            </a:r>
+            <a:r>
+              <a:rPr lang="da-DK" dirty="0"/>
+              <a:t>. </a:t>
+            </a:r>
+            <a:r>
+              <a:rPr lang="en-US" dirty="0"/>
+              <a:t>This is a game-changer in order to reduce the cost of this screening approach. </a:t>
+            </a:r>
+          </a:p>
+          <a:p>
+            <a:pPr marL="0" indent="0">
+              <a:buNone/>
+            </a:pPr>
+            <a:endParaRPr lang="en-US" dirty="0"/>
+          </a:p>
+        </p:txBody>
+      </p:sp>
+    </p:spTree>
+    <p:extLst>
+      <p:ext uri="{BB962C8B-B14F-4D97-AF65-F5344CB8AC3E}">
+        <p14:creationId xmlns:p14="http://schemas.microsoft.com/office/powerpoint/2010/main" val="3991849016"/>
+      </p:ext>
+    </p:extLst>
+  </p:cSld>
+  <p:clrMapOvr>
+    <a:masterClrMapping/>
+  </p:clrMapOvr>
+</p:sld>
+</file>
+
+<file path=ppt/slides/slide11.xml><?xml version="1.0" encoding="utf-8"?>
+<p:sld xmlns:a="http://schemas.openxmlformats.org/drawingml/2006/main" xmlns:r="http://schemas.openxmlformats.org/officeDocument/2006/relationships" xmlns:p="http://schemas.openxmlformats.org/presentationml/2006/main">
+  <p:cSld>
+    <p:spTree>
+      <p:nvGrpSpPr>
+        <p:cNvPr id="1" name=""/>
+        <p:cNvGrpSpPr/>
+        <p:nvPr/>
+      </p:nvGrpSpPr>
+      <p:grpSpPr>
+        <a:xfrm>
+          <a:off x="0" y="0"/>
+          <a:ext cx="0" cy="0"/>
+          <a:chOff x="0" y="0"/>
+          <a:chExt cx="0" cy="0"/>
+        </a:xfrm>
+      </p:grpSpPr>
+      <p:sp>
+        <p:nvSpPr>
           <p:cNvPr id="4" name="Text Placeholder 2">
             <a:extLst>
               <a:ext uri="{FF2B5EF4-FFF2-40B4-BE49-F238E27FC236}">
@@ -44688,8 +45208,8 @@
         </p:nvSpPr>
         <p:spPr>
           <a:xfrm>
-            <a:off x="1013520" y="1119245"/>
-            <a:ext cx="4791378" cy="4395220"/>
+            <a:off x="1013520" y="1119244"/>
+            <a:ext cx="4791378" cy="4911441"/>
           </a:xfrm>
           <a:prstGeom prst="rect">
             <a:avLst/>
@@ -44951,6 +45471,17 @@
             </a:pPr>
             <a:r>
               <a:rPr lang="en-US" dirty="0"/>
+              <a:t>It is most often accurate</a:t>
+            </a:r>
+          </a:p>
+          <a:p>
+            <a:pPr>
+              <a:spcAft>
+                <a:spcPts val="800"/>
+              </a:spcAft>
+            </a:pPr>
+            <a:r>
+              <a:rPr lang="en-US" dirty="0"/>
               <a:t>It is fast</a:t>
             </a:r>
           </a:p>
@@ -44984,7 +45515,7 @@
             </a:pPr>
             <a:r>
               <a:rPr lang="en-US" dirty="0"/>
-              <a:t>Extra insurance that you have found all relevant records. Can also be used as a third screener.</a:t>
+              <a:t>Extra insurance that you have found all relevant records. It can also be used as a third screener.</a:t>
             </a:r>
           </a:p>
           <a:p>
@@ -45010,7 +45541,7 @@
             </a:r>
             <a:r>
               <a:rPr lang="en-US" dirty="0"/>
-              <a:t>t’s flexible</a:t>
+              <a:t>t’s flexible. That is, it can rapidly be fitted to many different situations. </a:t>
             </a:r>
           </a:p>
         </p:txBody>
@@ -45353,7 +45884,7 @@
             </a:pPr>
             <a:r>
               <a:rPr lang="en-US" dirty="0"/>
-              <a:t>Potentially large environmental impact. </a:t>
+              <a:t>Potentially large environmental impact </a:t>
             </a:r>
           </a:p>
           <a:p>
@@ -45373,181 +45904,6 @@
     <p:extLst>
       <p:ext uri="{BB962C8B-B14F-4D97-AF65-F5344CB8AC3E}">
         <p14:creationId xmlns:p14="http://schemas.microsoft.com/office/powerpoint/2010/main" val="1089913311"/>
-      </p:ext>
-    </p:extLst>
-  </p:cSld>
-  <p:clrMapOvr>
-    <a:masterClrMapping/>
-  </p:clrMapOvr>
-</p:sld>
-</file>
-
-<file path=ppt/slides/slide11.xml><?xml version="1.0" encoding="utf-8"?>
-<p:sld xmlns:a="http://schemas.openxmlformats.org/drawingml/2006/main" xmlns:r="http://schemas.openxmlformats.org/officeDocument/2006/relationships" xmlns:p="http://schemas.openxmlformats.org/presentationml/2006/main">
-  <p:cSld>
-    <p:spTree>
-      <p:nvGrpSpPr>
-        <p:cNvPr id="1" name=""/>
-        <p:cNvGrpSpPr/>
-        <p:nvPr/>
-      </p:nvGrpSpPr>
-      <p:grpSpPr>
-        <a:xfrm>
-          <a:off x="0" y="0"/>
-          <a:ext cx="0" cy="0"/>
-          <a:chOff x="0" y="0"/>
-          <a:chExt cx="0" cy="0"/>
-        </a:xfrm>
-      </p:grpSpPr>
-      <p:sp>
-        <p:nvSpPr>
-          <p:cNvPr id="2" name="Title 1">
-            <a:extLst>
-              <a:ext uri="{FF2B5EF4-FFF2-40B4-BE49-F238E27FC236}">
-                <a16:creationId xmlns:a16="http://schemas.microsoft.com/office/drawing/2014/main" id="{A05D2F4B-2F1B-4E25-91F5-84B9657D5A0D}"/>
-              </a:ext>
-            </a:extLst>
-          </p:cNvPr>
-          <p:cNvSpPr>
-            <a:spLocks noGrp="1"/>
-          </p:cNvSpPr>
-          <p:nvPr>
-            <p:ph type="title"/>
-          </p:nvPr>
-        </p:nvSpPr>
-        <p:spPr/>
-        <p:txBody>
-          <a:bodyPr/>
-          <a:lstStyle/>
-          <a:p>
-            <a:r>
-              <a:rPr lang="en-US" dirty="0"/>
-              <a:t>Future research</a:t>
-            </a:r>
-          </a:p>
-        </p:txBody>
-      </p:sp>
-      <p:sp>
-        <p:nvSpPr>
-          <p:cNvPr id="3" name="Text Placeholder 2">
-            <a:extLst>
-              <a:ext uri="{FF2B5EF4-FFF2-40B4-BE49-F238E27FC236}">
-                <a16:creationId xmlns:a16="http://schemas.microsoft.com/office/drawing/2014/main" id="{603B0754-7E32-4245-8E5E-2D4F888965C1}"/>
-              </a:ext>
-            </a:extLst>
-          </p:cNvPr>
-          <p:cNvSpPr>
-            <a:spLocks noGrp="1"/>
-          </p:cNvSpPr>
-          <p:nvPr>
-            <p:ph type="body" sz="quarter" idx="10"/>
-          </p:nvPr>
-        </p:nvSpPr>
-        <p:spPr/>
-        <p:txBody>
-          <a:bodyPr/>
-          <a:lstStyle/>
-          <a:p>
-            <a:pPr>
-              <a:spcAft>
-                <a:spcPts val="800"/>
-              </a:spcAft>
-            </a:pPr>
-            <a:r>
-              <a:rPr lang="en-US" dirty="0"/>
-              <a:t>Test with local models such as the models from </a:t>
-            </a:r>
-            <a:r>
-              <a:rPr lang="en-US" dirty="0" err="1"/>
-              <a:t>MistralAI</a:t>
-            </a:r>
-            <a:r>
-              <a:rPr lang="en-US" dirty="0"/>
-              <a:t>. This would freeze the efficacy of this approach and increase its transparency. </a:t>
-            </a:r>
-          </a:p>
-          <a:p>
-            <a:pPr>
-              <a:spcAft>
-                <a:spcPts val="800"/>
-              </a:spcAft>
-            </a:pPr>
-            <a:r>
-              <a:rPr lang="en-US" dirty="0"/>
-              <a:t>Consider how to combine GPT screenings with traditional (semi)-automated screening tools such priority and classifier screening most efficiently. </a:t>
-            </a:r>
-          </a:p>
-          <a:p>
-            <a:pPr>
-              <a:spcAft>
-                <a:spcPts val="800"/>
-              </a:spcAft>
-            </a:pPr>
-            <a:r>
-              <a:rPr lang="en-US" dirty="0"/>
-              <a:t>Considered how can fine-tuning can support the reliability of the screening approach even further</a:t>
-            </a:r>
-            <a:r>
-              <a:rPr lang="da-DK" dirty="0"/>
-              <a:t>?</a:t>
-            </a:r>
-            <a:endParaRPr lang="en-US" dirty="0"/>
-          </a:p>
-          <a:p>
-            <a:pPr>
-              <a:spcAft>
-                <a:spcPts val="800"/>
-              </a:spcAft>
-            </a:pPr>
-            <a:r>
-              <a:rPr lang="en-US" dirty="0"/>
-              <a:t>Implementation in standard review tools such as Meta-Reviewer, EPPI Reviewer, Covidence, etc. </a:t>
-            </a:r>
-          </a:p>
-          <a:p>
-            <a:pPr lvl="1">
-              <a:spcAft>
-                <a:spcPts val="800"/>
-              </a:spcAft>
-            </a:pPr>
-            <a:r>
-              <a:rPr lang="en-US" dirty="0"/>
-              <a:t>Alternately</a:t>
-            </a:r>
-            <a:r>
-              <a:rPr lang="da-DK" dirty="0"/>
-              <a:t>, </a:t>
-            </a:r>
-            <a:r>
-              <a:rPr lang="en-US" dirty="0"/>
-              <a:t>a shiny-app could be made to ease user-friendliness</a:t>
-            </a:r>
-            <a:r>
-              <a:rPr lang="da-DK" dirty="0"/>
-              <a:t>. </a:t>
-            </a:r>
-          </a:p>
-          <a:p>
-            <a:pPr marL="317500" lvl="1" indent="0">
-              <a:spcAft>
-                <a:spcPts val="800"/>
-              </a:spcAft>
-              <a:buNone/>
-            </a:pPr>
-            <a:endParaRPr lang="en-US" dirty="0"/>
-          </a:p>
-          <a:p>
-            <a:pPr marL="0" indent="0">
-              <a:buNone/>
-            </a:pPr>
-            <a:endParaRPr lang="en-US" dirty="0"/>
-          </a:p>
-        </p:txBody>
-      </p:sp>
-    </p:spTree>
-    <p:extLst>
-      <p:ext uri="{BB962C8B-B14F-4D97-AF65-F5344CB8AC3E}">
-        <p14:creationId xmlns:p14="http://schemas.microsoft.com/office/powerpoint/2010/main" val="1000430660"/>
       </p:ext>
     </p:extLst>
   </p:cSld>
@@ -45596,18 +45952,9 @@
           <a:lstStyle/>
           <a:p>
             <a:r>
-              <a:rPr lang="da-DK" dirty="0"/>
-              <a:t>Future </a:t>
-            </a:r>
-            <a:r>
-              <a:rPr lang="da-DK" dirty="0" err="1"/>
-              <a:t>perspectives</a:t>
-            </a:r>
-            <a:r>
-              <a:rPr lang="da-DK" dirty="0"/>
-              <a:t> – the future is AI.</a:t>
-            </a:r>
-            <a:endParaRPr lang="en-US" dirty="0"/>
+              <a:rPr lang="en-US" dirty="0"/>
+              <a:t>Future research</a:t>
+            </a:r>
           </a:p>
         </p:txBody>
       </p:sp>
@@ -45638,11 +45985,203 @@
               </a:spcAft>
             </a:pPr>
             <a:r>
+              <a:rPr lang="en-US" dirty="0"/>
+              <a:t>Test with local models such as the models on </a:t>
+            </a:r>
+            <a:r>
+              <a:rPr lang="en-US" dirty="0" err="1"/>
+              <a:t>Ollama</a:t>
+            </a:r>
+            <a:r>
+              <a:rPr lang="en-US" dirty="0"/>
+              <a:t> or from </a:t>
+            </a:r>
+            <a:r>
+              <a:rPr lang="en-US" dirty="0" err="1"/>
+              <a:t>MistralAI</a:t>
+            </a:r>
+            <a:r>
+              <a:rPr lang="en-US" dirty="0"/>
+              <a:t>. This would freeze the efficacy of this approach and increase its transparency. </a:t>
+            </a:r>
+          </a:p>
+          <a:p>
+            <a:pPr>
+              <a:spcAft>
+                <a:spcPts val="800"/>
+              </a:spcAft>
+            </a:pPr>
+            <a:r>
+              <a:rPr lang="en-US" dirty="0"/>
+              <a:t>Consider how to combine GPT screenings with traditional (semi)-automated screening tools, such as priority and classifier screening, most efficiently. </a:t>
+            </a:r>
+          </a:p>
+          <a:p>
+            <a:pPr>
+              <a:spcAft>
+                <a:spcPts val="800"/>
+              </a:spcAft>
+            </a:pPr>
+            <a:r>
+              <a:rPr lang="en-US" dirty="0"/>
+              <a:t>Consider how fine-tuning can support the reliability of the screening approach even further</a:t>
+            </a:r>
+            <a:r>
+              <a:rPr lang="da-DK" dirty="0"/>
+              <a:t>?</a:t>
+            </a:r>
+            <a:endParaRPr lang="en-US" dirty="0"/>
+          </a:p>
+          <a:p>
+            <a:pPr>
+              <a:spcAft>
+                <a:spcPts val="800"/>
+              </a:spcAft>
+            </a:pPr>
+            <a:r>
+              <a:rPr lang="en-US" dirty="0"/>
+              <a:t>Implementation in standard review tools such as EPPI Reviewer, Covidence, Meta-Reviewer etc. </a:t>
+            </a:r>
+          </a:p>
+          <a:p>
+            <a:pPr lvl="1">
+              <a:spcAft>
+                <a:spcPts val="800"/>
+              </a:spcAft>
+            </a:pPr>
+            <a:r>
+              <a:rPr lang="en-US" dirty="0"/>
+              <a:t> Alternatively</a:t>
+            </a:r>
+            <a:r>
+              <a:rPr lang="da-DK" dirty="0"/>
+              <a:t>, </a:t>
+            </a:r>
+            <a:r>
+              <a:rPr lang="en-US" dirty="0"/>
+              <a:t>a shiny app could be made to ease user-friendliness</a:t>
+            </a:r>
+            <a:r>
+              <a:rPr lang="da-DK" dirty="0"/>
+              <a:t>. </a:t>
+            </a:r>
+          </a:p>
+          <a:p>
+            <a:pPr marL="317500" lvl="1" indent="0">
+              <a:spcAft>
+                <a:spcPts val="800"/>
+              </a:spcAft>
+              <a:buNone/>
+            </a:pPr>
+            <a:endParaRPr lang="en-US" dirty="0"/>
+          </a:p>
+          <a:p>
+            <a:pPr marL="0" indent="0">
+              <a:buNone/>
+            </a:pPr>
+            <a:endParaRPr lang="en-US" dirty="0"/>
+          </a:p>
+        </p:txBody>
+      </p:sp>
+    </p:spTree>
+    <p:extLst>
+      <p:ext uri="{BB962C8B-B14F-4D97-AF65-F5344CB8AC3E}">
+        <p14:creationId xmlns:p14="http://schemas.microsoft.com/office/powerpoint/2010/main" val="1000430660"/>
+      </p:ext>
+    </p:extLst>
+  </p:cSld>
+  <p:clrMapOvr>
+    <a:masterClrMapping/>
+  </p:clrMapOvr>
+</p:sld>
+</file>
+
+<file path=ppt/slides/slide13.xml><?xml version="1.0" encoding="utf-8"?>
+<p:sld xmlns:a="http://schemas.openxmlformats.org/drawingml/2006/main" xmlns:r="http://schemas.openxmlformats.org/officeDocument/2006/relationships" xmlns:p="http://schemas.openxmlformats.org/presentationml/2006/main">
+  <p:cSld>
+    <p:spTree>
+      <p:nvGrpSpPr>
+        <p:cNvPr id="1" name=""/>
+        <p:cNvGrpSpPr/>
+        <p:nvPr/>
+      </p:nvGrpSpPr>
+      <p:grpSpPr>
+        <a:xfrm>
+          <a:off x="0" y="0"/>
+          <a:ext cx="0" cy="0"/>
+          <a:chOff x="0" y="0"/>
+          <a:chExt cx="0" cy="0"/>
+        </a:xfrm>
+      </p:grpSpPr>
+      <p:sp>
+        <p:nvSpPr>
+          <p:cNvPr id="2" name="Title 1">
+            <a:extLst>
+              <a:ext uri="{FF2B5EF4-FFF2-40B4-BE49-F238E27FC236}">
+                <a16:creationId xmlns:a16="http://schemas.microsoft.com/office/drawing/2014/main" id="{A05D2F4B-2F1B-4E25-91F5-84B9657D5A0D}"/>
+              </a:ext>
+            </a:extLst>
+          </p:cNvPr>
+          <p:cNvSpPr>
+            <a:spLocks noGrp="1"/>
+          </p:cNvSpPr>
+          <p:nvPr>
+            <p:ph type="title"/>
+          </p:nvPr>
+        </p:nvSpPr>
+        <p:spPr/>
+        <p:txBody>
+          <a:bodyPr/>
+          <a:lstStyle/>
+          <a:p>
+            <a:r>
+              <a:rPr lang="da-DK" dirty="0"/>
+              <a:t>Future </a:t>
+            </a:r>
+            <a:r>
+              <a:rPr lang="da-DK" dirty="0" err="1"/>
+              <a:t>perspectives</a:t>
+            </a:r>
+            <a:r>
+              <a:rPr lang="da-DK" dirty="0"/>
+              <a:t> – the future is AI.</a:t>
+            </a:r>
+            <a:endParaRPr lang="en-US" dirty="0"/>
+          </a:p>
+        </p:txBody>
+      </p:sp>
+      <p:sp>
+        <p:nvSpPr>
+          <p:cNvPr id="3" name="Text Placeholder 2">
+            <a:extLst>
+              <a:ext uri="{FF2B5EF4-FFF2-40B4-BE49-F238E27FC236}">
+                <a16:creationId xmlns:a16="http://schemas.microsoft.com/office/drawing/2014/main" id="{603B0754-7E32-4245-8E5E-2D4F888965C1}"/>
+              </a:ext>
+            </a:extLst>
+          </p:cNvPr>
+          <p:cNvSpPr>
+            <a:spLocks noGrp="1"/>
+          </p:cNvSpPr>
+          <p:nvPr>
+            <p:ph type="body" sz="quarter" idx="10"/>
+          </p:nvPr>
+        </p:nvSpPr>
+        <p:spPr/>
+        <p:txBody>
+          <a:bodyPr/>
+          <a:lstStyle/>
+          <a:p>
+            <a:pPr>
+              <a:spcAft>
+                <a:spcPts val="800"/>
+              </a:spcAft>
+            </a:pPr>
+            <a:r>
               <a:rPr lang="da-DK" dirty="0"/>
               <a:t>My </a:t>
             </a:r>
             <a:r>
-              <a:rPr lang="da-DK" dirty="0" err="1"/>
+              <a:rPr lang="en-US" dirty="0"/>
               <a:t>projection</a:t>
             </a:r>
             <a:r>
@@ -45713,6 +46252,233 @@
               <a:rPr lang="da-DK" dirty="0"/>
               <a:t>.</a:t>
             </a:r>
+          </a:p>
+          <a:p>
+            <a:pPr>
+              <a:spcAft>
+                <a:spcPts val="800"/>
+              </a:spcAft>
+            </a:pPr>
+            <a:r>
+              <a:rPr lang="da-DK" dirty="0" err="1"/>
+              <a:t>We</a:t>
+            </a:r>
+            <a:r>
+              <a:rPr lang="da-DK" dirty="0"/>
+              <a:t> </a:t>
+            </a:r>
+            <a:r>
+              <a:rPr lang="da-DK" dirty="0" err="1"/>
+              <a:t>need</a:t>
+            </a:r>
+            <a:r>
+              <a:rPr lang="da-DK" dirty="0"/>
+              <a:t> </a:t>
+            </a:r>
+            <a:r>
+              <a:rPr lang="da-DK" dirty="0" err="1"/>
+              <a:t>local</a:t>
+            </a:r>
+            <a:r>
+              <a:rPr lang="da-DK" dirty="0"/>
+              <a:t> models to over legal issues. </a:t>
+            </a:r>
+            <a:r>
+              <a:rPr lang="da-DK" dirty="0" err="1"/>
+              <a:t>Extremely</a:t>
+            </a:r>
+            <a:r>
+              <a:rPr lang="da-DK" dirty="0"/>
+              <a:t> </a:t>
+            </a:r>
+            <a:r>
+              <a:rPr lang="da-DK" dirty="0" err="1"/>
+              <a:t>important</a:t>
+            </a:r>
+            <a:r>
+              <a:rPr lang="da-DK" dirty="0"/>
+              <a:t> </a:t>
+            </a:r>
+            <a:r>
+              <a:rPr lang="da-DK" dirty="0" err="1"/>
+              <a:t>when</a:t>
+            </a:r>
+            <a:r>
+              <a:rPr lang="da-DK" dirty="0"/>
+              <a:t> </a:t>
+            </a:r>
+            <a:r>
+              <a:rPr lang="da-DK" dirty="0" err="1"/>
+              <a:t>conducting</a:t>
+            </a:r>
+            <a:r>
+              <a:rPr lang="da-DK" dirty="0"/>
+              <a:t> </a:t>
+            </a:r>
+            <a:r>
+              <a:rPr lang="da-DK" dirty="0" err="1"/>
+              <a:t>full-text</a:t>
+            </a:r>
+            <a:r>
+              <a:rPr lang="da-DK" dirty="0"/>
+              <a:t> screening, data </a:t>
+            </a:r>
+            <a:r>
+              <a:rPr lang="da-DK" dirty="0" err="1"/>
+              <a:t>extraction</a:t>
+            </a:r>
+            <a:r>
+              <a:rPr lang="da-DK" dirty="0"/>
+              <a:t>, and </a:t>
+            </a:r>
+            <a:r>
+              <a:rPr lang="da-DK" dirty="0" err="1"/>
+              <a:t>risk</a:t>
+            </a:r>
+            <a:r>
+              <a:rPr lang="da-DK" dirty="0"/>
+              <a:t> of bias. </a:t>
+            </a:r>
+          </a:p>
+          <a:p>
+            <a:pPr>
+              <a:spcAft>
+                <a:spcPts val="800"/>
+              </a:spcAft>
+            </a:pPr>
+            <a:r>
+              <a:rPr lang="da-DK" dirty="0" err="1"/>
+              <a:t>Many</a:t>
+            </a:r>
+            <a:r>
+              <a:rPr lang="da-DK" dirty="0"/>
+              <a:t> </a:t>
+            </a:r>
+            <a:r>
+              <a:rPr lang="da-DK" dirty="0" err="1"/>
+              <a:t>countires</a:t>
+            </a:r>
+            <a:r>
+              <a:rPr lang="da-DK" dirty="0"/>
+              <a:t> </a:t>
+            </a:r>
+            <a:r>
+              <a:rPr lang="da-DK" dirty="0" err="1"/>
+              <a:t>lincence</a:t>
+            </a:r>
+            <a:r>
+              <a:rPr lang="da-DK" dirty="0"/>
+              <a:t> agreements with </a:t>
+            </a:r>
+            <a:r>
+              <a:rPr lang="da-DK" dirty="0" err="1"/>
+              <a:t>publishers</a:t>
+            </a:r>
+            <a:r>
+              <a:rPr lang="da-DK" dirty="0"/>
+              <a:t> </a:t>
+            </a:r>
+            <a:r>
+              <a:rPr lang="da-DK" dirty="0" err="1"/>
+              <a:t>does</a:t>
+            </a:r>
+            <a:r>
+              <a:rPr lang="da-DK" dirty="0"/>
+              <a:t> not </a:t>
+            </a:r>
+            <a:r>
+              <a:rPr lang="da-DK" dirty="0" err="1"/>
+              <a:t>allow</a:t>
+            </a:r>
+            <a:r>
+              <a:rPr lang="da-DK" dirty="0"/>
+              <a:t> uploading PDF/</a:t>
+            </a:r>
+            <a:r>
+              <a:rPr lang="da-DK" dirty="0" err="1"/>
+              <a:t>full</a:t>
+            </a:r>
+            <a:r>
+              <a:rPr lang="da-DK" dirty="0"/>
+              <a:t> </a:t>
+            </a:r>
+            <a:r>
+              <a:rPr lang="da-DK" dirty="0" err="1"/>
+              <a:t>text</a:t>
+            </a:r>
+            <a:r>
+              <a:rPr lang="da-DK" dirty="0"/>
+              <a:t> to </a:t>
+            </a:r>
+            <a:r>
+              <a:rPr lang="da-DK" dirty="0" err="1"/>
+              <a:t>remote</a:t>
+            </a:r>
+            <a:r>
+              <a:rPr lang="da-DK" dirty="0"/>
+              <a:t> </a:t>
+            </a:r>
+            <a:r>
+              <a:rPr lang="da-DK" dirty="0" err="1"/>
+              <a:t>commercial</a:t>
+            </a:r>
+            <a:r>
+              <a:rPr lang="da-DK" dirty="0"/>
+              <a:t> </a:t>
+            </a:r>
+            <a:r>
+              <a:rPr lang="da-DK" dirty="0" err="1"/>
+              <a:t>AIs</a:t>
+            </a:r>
+            <a:r>
+              <a:rPr lang="da-DK" dirty="0"/>
+              <a:t>. Even </a:t>
+            </a:r>
+            <a:r>
+              <a:rPr lang="da-DK" dirty="0" err="1"/>
+              <a:t>if</a:t>
+            </a:r>
+            <a:r>
+              <a:rPr lang="da-DK" dirty="0"/>
+              <a:t> </a:t>
+            </a:r>
+            <a:r>
+              <a:rPr lang="da-DK" dirty="0" err="1"/>
+              <a:t>they</a:t>
+            </a:r>
+            <a:r>
+              <a:rPr lang="da-DK" dirty="0"/>
+              <a:t> do it </a:t>
+            </a:r>
+            <a:r>
+              <a:rPr lang="da-DK" dirty="0" err="1"/>
+              <a:t>might</a:t>
+            </a:r>
+            <a:r>
+              <a:rPr lang="da-DK" dirty="0"/>
+              <a:t> </a:t>
+            </a:r>
+            <a:r>
+              <a:rPr lang="da-DK" dirty="0" err="1"/>
+              <a:t>be</a:t>
+            </a:r>
+            <a:r>
+              <a:rPr lang="da-DK" dirty="0"/>
+              <a:t> </a:t>
+            </a:r>
+            <a:r>
+              <a:rPr lang="da-DK" dirty="0" err="1"/>
+              <a:t>probelmatic</a:t>
+            </a:r>
+            <a:r>
+              <a:rPr lang="da-DK" dirty="0"/>
+              <a:t> due to the European AI </a:t>
+            </a:r>
+            <a:r>
+              <a:rPr lang="da-DK" dirty="0" err="1"/>
+              <a:t>act</a:t>
+            </a:r>
+            <a:endParaRPr lang="da-DK" dirty="0"/>
           </a:p>
           <a:p>
             <a:pPr marL="317500" lvl="1" indent="0">
@@ -45744,7 +46510,7 @@
 </p:sld>
 </file>
 
-<file path=ppt/slides/slide13.xml><?xml version="1.0" encoding="utf-8"?>
+<file path=ppt/slides/slide14.xml><?xml version="1.0" encoding="utf-8"?>
 <p:sld xmlns:a="http://schemas.openxmlformats.org/drawingml/2006/main" xmlns:r="http://schemas.openxmlformats.org/officeDocument/2006/relationships" xmlns:p="http://schemas.openxmlformats.org/presentationml/2006/main">
   <p:cSld>
     <p:spTree>
@@ -45849,26 +46615,20 @@
             <a:pPr marL="0" indent="0">
               <a:buNone/>
             </a:pPr>
-            <a:endParaRPr lang="en-US" dirty="0"/>
+            <a:r>
+              <a:rPr lang="en-US" i="1" dirty="0"/>
+              <a:t>Link to R codes behind the presentation: </a:t>
+            </a:r>
           </a:p>
           <a:p>
             <a:pPr marL="0" indent="0">
               <a:buNone/>
             </a:pPr>
             <a:r>
-              <a:rPr lang="en-US" i="1" dirty="0"/>
-              <a:t>Link to R codes behind the presentation: </a:t>
-            </a:r>
-          </a:p>
-          <a:p>
-            <a:pPr marL="0" indent="0">
-              <a:buNone/>
-            </a:pPr>
-            <a:r>
               <a:rPr lang="en-US" dirty="0">
                 <a:hlinkClick r:id="rId3"/>
               </a:rPr>
-              <a:t>https://github.com/MikkelVembye/SRMA-SIG-presentation/blob/main/Example%20code.R</a:t>
+              <a:t>https://github.com/MikkelVembye/IRM2026/blob/main/Test%20screening.R</a:t>
             </a:r>
             <a:r>
               <a:rPr lang="en-US" dirty="0"/>
@@ -45926,7 +46686,7 @@
 </p:sld>
 </file>
 
-<file path=ppt/slides/slide14.xml><?xml version="1.0" encoding="utf-8"?>
+<file path=ppt/slides/slide15.xml><?xml version="1.0" encoding="utf-8"?>
 <p:sld xmlns:a="http://schemas.openxmlformats.org/drawingml/2006/main" xmlns:r="http://schemas.openxmlformats.org/officeDocument/2006/relationships" xmlns:p="http://schemas.openxmlformats.org/presentationml/2006/main">
   <p:cSld>
     <p:spTree>
@@ -45961,7 +46721,7 @@
         </p:nvSpPr>
         <p:spPr>
           <a:xfrm>
-            <a:off x="1013520" y="451609"/>
+            <a:off x="752261" y="354768"/>
             <a:ext cx="10158611" cy="891382"/>
           </a:xfrm>
         </p:spPr>
@@ -45994,7 +46754,7 @@
         </p:nvSpPr>
         <p:spPr>
           <a:xfrm>
-            <a:off x="1013519" y="1235265"/>
+            <a:off x="752262" y="1246150"/>
             <a:ext cx="10158611" cy="5381291"/>
           </a:xfrm>
         </p:spPr>
@@ -46804,7 +47564,7 @@
           <a:p>
             <a:r>
               <a:rPr lang="da-DK" sz="1200" dirty="0"/>
-              <a:t>Vembye, M. H. &amp; Olsen, T. (2025). </a:t>
+              <a:t>Vembye, M. H. &amp; Olsen, T. (2026). </a:t>
             </a:r>
             <a:r>
               <a:rPr lang="da-DK" sz="1200" i="1" dirty="0"/>
@@ -46836,77 +47596,44 @@
             </a:r>
             <a:r>
               <a:rPr lang="da-DK" sz="1200" dirty="0"/>
-              <a:t> (0.3.1). CRAN. https://doi.org/10.32614/CRAN.package.AIscreenR</a:t>
+              <a:t> (0.3.2). CRAN. https://doi.org/10.32614/CRAN.package.AIscreenR</a:t>
             </a:r>
             <a:endParaRPr lang="en-US" sz="1200" dirty="0"/>
           </a:p>
           <a:p>
+            <a:pPr algn="l"/>
             <a:r>
               <a:rPr lang="da-DK" sz="1200" dirty="0"/>
-              <a:t>Vembye, M. H., Christensen, J., Mølgaard, A. B., &amp; Schytt, F. L. W. (2024). GPT API Models Can </a:t>
-            </a:r>
-            <a:r>
-              <a:rPr lang="da-DK" sz="1200" dirty="0" err="1"/>
-              <a:t>Function</a:t>
+              <a:t>Vembye, M. H., Christensen, J., Mølgaard, A. B., &amp; Schytt, F. L. W. (2025). </a:t>
+            </a:r>
+            <a:r>
+              <a:rPr lang="en-US" sz="1200" i="0" u="none" strike="noStrike" dirty="0">
+                <a:effectLst/>
+              </a:rPr>
+              <a:t>Generative Pretrained Transformer Models Can Function as Highly Reliable Second Screeners of Titles and Abstracts in Systematic Reviews: A Proof of Concept and Common Guidelines</a:t>
             </a:r>
             <a:r>
               <a:rPr lang="da-DK" sz="1200" dirty="0"/>
-              <a:t> as Highly </a:t>
-            </a:r>
-            <a:r>
-              <a:rPr lang="da-DK" sz="1200" dirty="0" err="1"/>
-              <a:t>Reliable</a:t>
+              <a:t>. </a:t>
+            </a:r>
+            <a:r>
+              <a:rPr lang="da-DK" sz="1200" i="1" dirty="0"/>
+              <a:t>Psychological Methods</a:t>
             </a:r>
             <a:r>
               <a:rPr lang="da-DK" sz="1200" dirty="0"/>
-              <a:t> Second </a:t>
-            </a:r>
-            <a:r>
-              <a:rPr lang="da-DK" sz="1200" dirty="0" err="1"/>
-              <a:t>Screeners</a:t>
-            </a:r>
-            <a:r>
-              <a:rPr lang="da-DK" sz="1200" dirty="0"/>
-              <a:t> of Titles and Abstracts in </a:t>
-            </a:r>
-            <a:r>
-              <a:rPr lang="da-DK" sz="1200" dirty="0" err="1"/>
-              <a:t>Systematic</a:t>
-            </a:r>
-            <a:r>
-              <a:rPr lang="da-DK" sz="1200" dirty="0"/>
-              <a:t> Reviews: A </a:t>
-            </a:r>
-            <a:r>
-              <a:rPr lang="da-DK" sz="1200" dirty="0" err="1"/>
-              <a:t>Proof</a:t>
-            </a:r>
-            <a:r>
-              <a:rPr lang="da-DK" sz="1200" dirty="0"/>
-              <a:t> of </a:t>
-            </a:r>
-            <a:r>
-              <a:rPr lang="da-DK" sz="1200" dirty="0" err="1"/>
-              <a:t>Concept</a:t>
-            </a:r>
-            <a:r>
-              <a:rPr lang="da-DK" sz="1200" dirty="0"/>
-              <a:t> and Common Guidelines. </a:t>
-            </a:r>
-            <a:r>
-              <a:rPr lang="da-DK" sz="1200" i="1" dirty="0"/>
-              <a:t>Open Science Framework</a:t>
-            </a:r>
-            <a:r>
-              <a:rPr lang="da-DK" sz="1200" dirty="0"/>
-              <a:t>. https://doi.org/10.31219/osf.io/yrhzm</a:t>
-            </a:r>
-            <a:endParaRPr lang="en-US" sz="1200" dirty="0"/>
-          </a:p>
-          <a:p>
-            <a:pPr marL="0" indent="0">
-              <a:buNone/>
-            </a:pPr>
+              <a:t>. </a:t>
+            </a:r>
+            <a:r>
+              <a:rPr lang="en-US" sz="1200" b="0" i="0" dirty="0">
+                <a:solidFill>
+                  <a:srgbClr val="212529"/>
+                </a:solidFill>
+                <a:effectLst/>
+                <a:latin typeface="Arial" panose="020B0604020202020204" pitchFamily="34" charset="0"/>
+              </a:rPr>
+              <a:t>https://doi.org/10.1037/met0000769</a:t>
+            </a:r>
             <a:endParaRPr lang="en-US" dirty="0"/>
           </a:p>
         </p:txBody>
@@ -46924,7 +47651,7 @@
 </p:sld>
 </file>
 
-<file path=ppt/slides/slide15.xml><?xml version="1.0" encoding="utf-8"?>
+<file path=ppt/slides/slide16.xml><?xml version="1.0" encoding="utf-8"?>
 <p:sld xmlns:a="http://schemas.openxmlformats.org/drawingml/2006/main" xmlns:r="http://schemas.openxmlformats.org/officeDocument/2006/relationships" xmlns:p="http://schemas.openxmlformats.org/presentationml/2006/main">
   <p:cSld>
     <p:spTree>
@@ -47654,7 +48381,7 @@
 </p:sld>
 </file>
 
-<file path=ppt/slides/slide16.xml><?xml version="1.0" encoding="utf-8"?>
+<file path=ppt/slides/slide17.xml><?xml version="1.0" encoding="utf-8"?>
 <p:sld xmlns:a="http://schemas.openxmlformats.org/drawingml/2006/main" xmlns:r="http://schemas.openxmlformats.org/officeDocument/2006/relationships" xmlns:p="http://schemas.openxmlformats.org/presentationml/2006/main">
   <p:cSld>
     <p:spTree>
@@ -47748,7 +48475,7 @@
 </p:sld>
 </file>
 
-<file path=ppt/slides/slide17.xml><?xml version="1.0" encoding="utf-8"?>
+<file path=ppt/slides/slide18.xml><?xml version="1.0" encoding="utf-8"?>
 <p:sld xmlns:a="http://schemas.openxmlformats.org/drawingml/2006/main" xmlns:r="http://schemas.openxmlformats.org/officeDocument/2006/relationships" xmlns:p="http://schemas.openxmlformats.org/presentationml/2006/main">
   <p:cSld>
     <p:spTree>
@@ -48017,7 +48744,7 @@
 </p:sld>
 </file>
 
-<file path=ppt/slides/slide18.xml><?xml version="1.0" encoding="utf-8"?>
+<file path=ppt/slides/slide19.xml><?xml version="1.0" encoding="utf-8"?>
 <p:sld xmlns:a="http://schemas.openxmlformats.org/drawingml/2006/main" xmlns:r="http://schemas.openxmlformats.org/officeDocument/2006/relationships" xmlns:p="http://schemas.openxmlformats.org/presentationml/2006/main">
   <p:cSld>
     <p:spTree>
@@ -48227,7 +48954,7 @@
           <a:p>
             <a:r>
               <a:rPr lang="en-US" sz="2000" dirty="0"/>
-              <a:t>Discuss quality assessment and reliable implementation of AI screening</a:t>
+              <a:t>Discuss quality assessment and reliable implementation of AI screening.</a:t>
             </a:r>
           </a:p>
           <a:p>
@@ -48239,7 +48966,7 @@
           <a:p>
             <a:r>
               <a:rPr lang="en-US" sz="2000" dirty="0"/>
-              <a:t>Discuss future direction for using AI for literature screening</a:t>
+              <a:t>Discuss future direction for using AI for literature screening.</a:t>
             </a:r>
           </a:p>
           <a:p>
@@ -48251,7 +48978,7 @@
           <a:p>
             <a:r>
               <a:rPr lang="en-US" sz="2000" dirty="0"/>
-              <a:t>Showcase the R package AIscreenR</a:t>
+              <a:t>Showcase the R package AIscreenR.</a:t>
             </a:r>
           </a:p>
           <a:p>
@@ -48273,7 +49000,7 @@
             </a:r>
             <a:r>
               <a:rPr lang="en-US" sz="1400" dirty="0">
-                <a:hlinkClick r:id="rId2"/>
+                <a:hlinkClick r:id="rId3"/>
               </a:rPr>
               <a:t>https://github.com/MikkelVembye/IRM2026</a:t>
             </a:r>
@@ -48307,7 +49034,7 @@
                 <a:latin typeface="Arial" panose="020B0604020202020204" pitchFamily="34" charset="0"/>
                 <a:ea typeface="Inter" panose="020B0502030000000004" pitchFamily="34" charset="0"/>
                 <a:cs typeface="Inter" panose="020B0502030000000004" pitchFamily="34" charset="0"/>
-                <a:hlinkClick r:id="rId3"/>
+                <a:hlinkClick r:id="rId4"/>
               </a:rPr>
               <a:t>https://mikkelvembye.github.io/AIscreenR/</a:t>
             </a:r>
@@ -48376,7 +49103,7 @@
             </a:r>
             <a:r>
               <a:rPr lang="en-US" dirty="0">
-                <a:hlinkClick r:id="rId4">
+                <a:hlinkClick r:id="rId5">
                   <a:extLst>
                     <a:ext uri="{A12FA001-AC4F-418D-AE19-62706E023703}">
                       <ahyp:hlinkClr xmlns:ahyp="http://schemas.microsoft.com/office/drawing/2018/hyperlinkcolor" val="tx"/>
@@ -48661,39 +49388,10 @@
       <p:pic>
         <p:nvPicPr>
           <p:cNvPr id="9" name="Picture 8">
+            <a:hlinkClick r:id="rId3"/>
             <a:extLst>
               <a:ext uri="{FF2B5EF4-FFF2-40B4-BE49-F238E27FC236}">
                 <a16:creationId xmlns:a16="http://schemas.microsoft.com/office/drawing/2014/main" id="{88B21517-65C6-2C64-FC4A-3E3AD2401187}"/>
-              </a:ext>
-            </a:extLst>
-          </p:cNvPr>
-          <p:cNvPicPr>
-            <a:picLocks noChangeAspect="1"/>
-          </p:cNvPicPr>
-          <p:nvPr/>
-        </p:nvPicPr>
-        <p:blipFill>
-          <a:blip r:embed="rId3"/>
-          <a:stretch>
-            <a:fillRect/>
-          </a:stretch>
-        </p:blipFill>
-        <p:spPr>
-          <a:xfrm>
-            <a:off x="7083950" y="1360178"/>
-            <a:ext cx="5108050" cy="2473747"/>
-          </a:xfrm>
-          <a:prstGeom prst="rect">
-            <a:avLst/>
-          </a:prstGeom>
-        </p:spPr>
-      </p:pic>
-      <p:pic>
-        <p:nvPicPr>
-          <p:cNvPr id="11" name="Picture 10">
-            <a:extLst>
-              <a:ext uri="{FF2B5EF4-FFF2-40B4-BE49-F238E27FC236}">
-                <a16:creationId xmlns:a16="http://schemas.microsoft.com/office/drawing/2014/main" id="{C61167A5-B335-D69F-88F9-E0C95B904B88}"/>
               </a:ext>
             </a:extLst>
           </p:cNvPr>
@@ -48710,8 +49408,8 @@
         </p:blipFill>
         <p:spPr>
           <a:xfrm>
-            <a:off x="7083950" y="3907563"/>
-            <a:ext cx="4893895" cy="1933266"/>
+            <a:off x="7083950" y="1360178"/>
+            <a:ext cx="5108050" cy="2473747"/>
           </a:xfrm>
           <a:prstGeom prst="rect">
             <a:avLst/>
@@ -48735,7 +49433,7 @@
         <p:spPr>
           <a:xfrm>
             <a:off x="861238" y="1574893"/>
-            <a:ext cx="6070430" cy="4715873"/>
+            <a:ext cx="6070430" cy="4953498"/>
           </a:xfrm>
           <a:prstGeom prst="rect">
             <a:avLst/>
@@ -49001,7 +49699,7 @@
             </a:r>
             <a:r>
               <a:rPr lang="en-US" dirty="0"/>
-              <a:t> to screen titles and abstracts</a:t>
+              <a:t> to screen titles and abstracts and developed guidelines for how to use them reliably. </a:t>
             </a:r>
           </a:p>
           <a:p>
@@ -49050,7 +49748,7 @@
             </a:pPr>
             <a:r>
               <a:rPr lang="en-US" b="1" dirty="0"/>
-              <a:t>Based on this, we suggest that GPT API models can be used as full second screeners in state-of-the-art reviews</a:t>
+              <a:t>Based on this, we suggest that GPT API models can be used as full second screeners in state-of-the-art reviews – let me show you the setup!</a:t>
             </a:r>
             <a:endParaRPr lang="da-DK" b="1" dirty="0"/>
           </a:p>
@@ -49062,6 +49760,37 @@
           </a:p>
         </p:txBody>
       </p:sp>
+      <p:pic>
+        <p:nvPicPr>
+          <p:cNvPr id="5" name="Picture 4">
+            <a:hlinkClick r:id="rId7"/>
+            <a:extLst>
+              <a:ext uri="{FF2B5EF4-FFF2-40B4-BE49-F238E27FC236}">
+                <a16:creationId xmlns:a16="http://schemas.microsoft.com/office/drawing/2014/main" id="{81ADB48C-5D14-F15A-668D-59C166D432D0}"/>
+              </a:ext>
+            </a:extLst>
+          </p:cNvPr>
+          <p:cNvPicPr>
+            <a:picLocks noChangeAspect="1"/>
+          </p:cNvPicPr>
+          <p:nvPr/>
+        </p:nvPicPr>
+        <p:blipFill>
+          <a:blip r:embed="rId8"/>
+          <a:stretch>
+            <a:fillRect/>
+          </a:stretch>
+        </p:blipFill>
+        <p:spPr>
+          <a:xfrm>
+            <a:off x="7083950" y="4114078"/>
+            <a:ext cx="4889696" cy="1980216"/>
+          </a:xfrm>
+          <a:prstGeom prst="rect">
+            <a:avLst/>
+          </a:prstGeom>
+        </p:spPr>
+      </p:pic>
     </p:spTree>
     <p:extLst>
       <p:ext uri="{BB962C8B-B14F-4D97-AF65-F5344CB8AC3E}">
@@ -49189,7 +49918,7 @@
             </a:pPr>
             <a:r>
               <a:rPr lang="en-US" dirty="0"/>
-              <a:t>You can screen an incredibly large number of references in a very short time. </a:t>
+              <a:t>You can screen an incredibly large number of references in a very short time – in theory, 30.000 records per minute. </a:t>
             </a:r>
           </a:p>
           <a:p>
@@ -49328,8 +50057,8 @@
         </p:nvSpPr>
         <p:spPr>
           <a:xfrm>
-            <a:off x="1013520" y="885332"/>
-            <a:ext cx="10158611" cy="1071057"/>
+            <a:off x="1013520" y="389503"/>
+            <a:ext cx="10158611" cy="664596"/>
           </a:xfrm>
         </p:spPr>
         <p:txBody>
@@ -49337,26 +50066,9 @@
           <a:lstStyle/>
           <a:p>
             <a:r>
-              <a:rPr lang="da-DK" dirty="0"/>
-              <a:t>A </a:t>
-            </a:r>
-            <a:r>
-              <a:rPr lang="da-DK" dirty="0" err="1"/>
-              <a:t>precondition</a:t>
-            </a:r>
-            <a:r>
-              <a:rPr lang="da-DK" dirty="0"/>
-              <a:t> for </a:t>
-            </a:r>
-            <a:r>
-              <a:rPr lang="da-DK" dirty="0" err="1"/>
-              <a:t>assessing</a:t>
-            </a:r>
-            <a:r>
-              <a:rPr lang="da-DK" dirty="0"/>
-              <a:t> AI screening</a:t>
-            </a:r>
-            <a:endParaRPr lang="en-US" dirty="0"/>
+              <a:rPr lang="en-US" dirty="0"/>
+              <a:t>Precondition for assessing AI screening</a:t>
+            </a:r>
           </a:p>
         </p:txBody>
       </p:sp>
@@ -49378,8 +50090,8 @@
         </p:nvSpPr>
         <p:spPr>
           <a:xfrm>
-            <a:off x="1013520" y="1956389"/>
-            <a:ext cx="10158611" cy="3888687"/>
+            <a:off x="1013519" y="1306326"/>
+            <a:ext cx="10612423" cy="997511"/>
           </a:xfrm>
         </p:spPr>
         <p:txBody>
@@ -49387,29 +50099,75 @@
           <a:lstStyle/>
           <a:p>
             <a:r>
-              <a:rPr lang="da-DK" dirty="0"/>
-              <a:t>To </a:t>
-            </a:r>
-            <a:r>
-              <a:rPr lang="da-DK" dirty="0" err="1"/>
-              <a:t>know</a:t>
-            </a:r>
-            <a:r>
-              <a:rPr lang="da-DK" dirty="0"/>
-              <a:t> common human screening </a:t>
-            </a:r>
-            <a:r>
-              <a:rPr lang="da-DK" dirty="0" err="1"/>
-              <a:t>behavior</a:t>
+              <a:rPr lang="en-US" dirty="0"/>
+              <a:t>To know common human screening behavior</a:t>
             </a:r>
             <a:r>
               <a:rPr lang="da-DK" dirty="0"/>
               <a:t> </a:t>
             </a:r>
+          </a:p>
+          <a:p>
+            <a:r>
+              <a:rPr lang="en-US" dirty="0"/>
+              <a:t>We find that our assistant/student screeners, on average, have a recall</a:t>
+            </a:r>
+            <a:r>
+              <a:rPr lang="da-DK" dirty="0"/>
+              <a:t> = </a:t>
+            </a:r>
+            <a:r>
+              <a:rPr lang="it-IT" sz="1800" b="0" i="0" u="none" strike="noStrike" baseline="0" dirty="0"/>
+              <a:t>0.782, 95% </a:t>
+            </a:r>
+            <a:r>
+              <a:rPr lang="it-IT" sz="1800" b="0" u="none" strike="noStrike" baseline="0" dirty="0"/>
+              <a:t>CI</a:t>
+            </a:r>
+            <a:r>
+              <a:rPr lang="it-IT" sz="1800" b="0" i="0" u="none" strike="noStrike" baseline="0" dirty="0"/>
+              <a:t>[0.747, 0.817]</a:t>
+            </a:r>
             <a:endParaRPr lang="en-US" dirty="0"/>
           </a:p>
         </p:txBody>
       </p:sp>
+      <p:pic>
+        <p:nvPicPr>
+          <p:cNvPr id="12" name="Picture 11" descr="A screenshot of a graph&#10;&#10;AI-generated content may be incorrect.">
+            <a:extLst>
+              <a:ext uri="{FF2B5EF4-FFF2-40B4-BE49-F238E27FC236}">
+                <a16:creationId xmlns:a16="http://schemas.microsoft.com/office/drawing/2014/main" id="{4DD1677E-8FFD-9C30-6410-4C78E8AB9920}"/>
+              </a:ext>
+            </a:extLst>
+          </p:cNvPr>
+          <p:cNvPicPr>
+            <a:picLocks noChangeAspect="1"/>
+          </p:cNvPicPr>
+          <p:nvPr/>
+        </p:nvPicPr>
+        <p:blipFill>
+          <a:blip r:embed="rId3">
+            <a:extLst>
+              <a:ext uri="{28A0092B-C50C-407E-A947-70E740481C1C}">
+                <a14:useLocalDpi xmlns:a14="http://schemas.microsoft.com/office/drawing/2010/main" val="0"/>
+              </a:ext>
+            </a:extLst>
+          </a:blip>
+          <a:stretch>
+            <a:fillRect/>
+          </a:stretch>
+        </p:blipFill>
+        <p:spPr>
+          <a:xfrm>
+            <a:off x="1977656" y="2303837"/>
+            <a:ext cx="7740513" cy="4515300"/>
+          </a:xfrm>
+          <a:prstGeom prst="rect">
+            <a:avLst/>
+          </a:prstGeom>
+        </p:spPr>
+      </p:pic>
     </p:spTree>
     <p:extLst>
       <p:ext uri="{BB962C8B-B14F-4D97-AF65-F5344CB8AC3E}">
@@ -49424,6 +50182,194 @@
 </file>
 
 <file path=ppt/slides/slide7.xml><?xml version="1.0" encoding="utf-8"?>
+<p:sld xmlns:a="http://schemas.openxmlformats.org/drawingml/2006/main" xmlns:r="http://schemas.openxmlformats.org/officeDocument/2006/relationships" xmlns:p="http://schemas.openxmlformats.org/presentationml/2006/main">
+  <p:cSld>
+    <p:spTree>
+      <p:nvGrpSpPr>
+        <p:cNvPr id="1" name=""/>
+        <p:cNvGrpSpPr/>
+        <p:nvPr/>
+      </p:nvGrpSpPr>
+      <p:grpSpPr>
+        <a:xfrm>
+          <a:off x="0" y="0"/>
+          <a:ext cx="0" cy="0"/>
+          <a:chOff x="0" y="0"/>
+          <a:chExt cx="0" cy="0"/>
+        </a:xfrm>
+      </p:grpSpPr>
+      <p:sp>
+        <p:nvSpPr>
+          <p:cNvPr id="2" name="Title 1">
+            <a:extLst>
+              <a:ext uri="{FF2B5EF4-FFF2-40B4-BE49-F238E27FC236}">
+                <a16:creationId xmlns:a16="http://schemas.microsoft.com/office/drawing/2014/main" id="{E0832CA6-9FEE-BAFD-474E-778705D2EBF4}"/>
+              </a:ext>
+            </a:extLst>
+          </p:cNvPr>
+          <p:cNvSpPr>
+            <a:spLocks noGrp="1"/>
+          </p:cNvSpPr>
+          <p:nvPr>
+            <p:ph type="title"/>
+          </p:nvPr>
+        </p:nvSpPr>
+        <p:spPr>
+          <a:xfrm>
+            <a:off x="1013520" y="389503"/>
+            <a:ext cx="10158611" cy="666412"/>
+          </a:xfrm>
+        </p:spPr>
+        <p:txBody>
+          <a:bodyPr/>
+          <a:lstStyle/>
+          <a:p>
+            <a:r>
+              <a:rPr lang="da-DK" dirty="0" err="1"/>
+              <a:t>Precondition</a:t>
+            </a:r>
+            <a:r>
+              <a:rPr lang="da-DK" dirty="0"/>
+              <a:t> for </a:t>
+            </a:r>
+            <a:r>
+              <a:rPr lang="da-DK" dirty="0" err="1"/>
+              <a:t>assessing</a:t>
+            </a:r>
+            <a:r>
+              <a:rPr lang="da-DK" dirty="0"/>
+              <a:t> AI screening </a:t>
+            </a:r>
+            <a:r>
+              <a:rPr lang="da-DK" dirty="0" err="1"/>
+              <a:t>cont</a:t>
+            </a:r>
+            <a:r>
+              <a:rPr lang="da-DK" dirty="0"/>
+              <a:t>.</a:t>
+            </a:r>
+            <a:endParaRPr lang="en-US" dirty="0"/>
+          </a:p>
+        </p:txBody>
+      </p:sp>
+      <p:sp>
+        <p:nvSpPr>
+          <p:cNvPr id="3" name="Text Placeholder 2">
+            <a:extLst>
+              <a:ext uri="{FF2B5EF4-FFF2-40B4-BE49-F238E27FC236}">
+                <a16:creationId xmlns:a16="http://schemas.microsoft.com/office/drawing/2014/main" id="{CFC262BF-166C-222F-9200-80D378AFEA7A}"/>
+              </a:ext>
+            </a:extLst>
+          </p:cNvPr>
+          <p:cNvSpPr>
+            <a:spLocks noGrp="1"/>
+          </p:cNvSpPr>
+          <p:nvPr>
+            <p:ph type="body" sz="quarter" idx="10"/>
+          </p:nvPr>
+        </p:nvSpPr>
+        <p:spPr>
+          <a:xfrm>
+            <a:off x="1013520" y="1397926"/>
+            <a:ext cx="10797480" cy="1541217"/>
+          </a:xfrm>
+        </p:spPr>
+        <p:txBody>
+          <a:bodyPr/>
+          <a:lstStyle/>
+          <a:p>
+            <a:r>
+              <a:rPr lang="en-US" dirty="0"/>
+              <a:t>Researchers and/or content-experts have slightly higher recalls.</a:t>
+            </a:r>
+          </a:p>
+          <a:p>
+            <a:r>
+              <a:rPr lang="en-US" dirty="0"/>
+              <a:t>We find in our own group researchers have, on average, a recall = </a:t>
+            </a:r>
+            <a:r>
+              <a:rPr lang="en-US" sz="1800" b="0" i="0" u="none" strike="noStrike" baseline="0" dirty="0"/>
+              <a:t>0.881, 95% CI [0.823, 0.931]</a:t>
+            </a:r>
+            <a:r>
+              <a:rPr lang="en-US" dirty="0"/>
+              <a:t> </a:t>
+            </a:r>
+          </a:p>
+          <a:p>
+            <a:r>
+              <a:rPr lang="en-US" dirty="0"/>
+              <a:t>Using data from the Norwegian Institute for Public Health, comparing researcher-researcher screenings only, we find that the average recall drops to </a:t>
+            </a:r>
+            <a:r>
+              <a:rPr lang="en-US" sz="1800" b="0" i="0" u="none" strike="noStrike" baseline="0" dirty="0"/>
+              <a:t>0.839, 95% CI [0.737, 0.920]. </a:t>
+            </a:r>
+          </a:p>
+          <a:p>
+            <a:endParaRPr lang="it-IT" dirty="0">
+              <a:latin typeface="AdvOTf9433e2d"/>
+            </a:endParaRPr>
+          </a:p>
+          <a:p>
+            <a:pPr marL="0" indent="0">
+              <a:buNone/>
+            </a:pPr>
+            <a:endParaRPr lang="en-US" dirty="0"/>
+          </a:p>
+        </p:txBody>
+      </p:sp>
+      <p:pic>
+        <p:nvPicPr>
+          <p:cNvPr id="5" name="Picture 4" descr="A graph of a statistical analysis&#10;&#10;AI-generated content may be incorrect.">
+            <a:extLst>
+              <a:ext uri="{FF2B5EF4-FFF2-40B4-BE49-F238E27FC236}">
+                <a16:creationId xmlns:a16="http://schemas.microsoft.com/office/drawing/2014/main" id="{4BFD04EE-581C-163D-47ED-E1F79462C421}"/>
+              </a:ext>
+            </a:extLst>
+          </p:cNvPr>
+          <p:cNvPicPr>
+            <a:picLocks noChangeAspect="1"/>
+          </p:cNvPicPr>
+          <p:nvPr/>
+        </p:nvPicPr>
+        <p:blipFill>
+          <a:blip r:embed="rId3">
+            <a:extLst>
+              <a:ext uri="{28A0092B-C50C-407E-A947-70E740481C1C}">
+                <a14:useLocalDpi xmlns:a14="http://schemas.microsoft.com/office/drawing/2010/main" val="0"/>
+              </a:ext>
+            </a:extLst>
+          </a:blip>
+          <a:stretch>
+            <a:fillRect/>
+          </a:stretch>
+        </p:blipFill>
+        <p:spPr>
+          <a:xfrm>
+            <a:off x="1098581" y="3101340"/>
+            <a:ext cx="10158611" cy="2962929"/>
+          </a:xfrm>
+          <a:prstGeom prst="rect">
+            <a:avLst/>
+          </a:prstGeom>
+        </p:spPr>
+      </p:pic>
+    </p:spTree>
+    <p:extLst>
+      <p:ext uri="{BB962C8B-B14F-4D97-AF65-F5344CB8AC3E}">
+        <p14:creationId xmlns:p14="http://schemas.microsoft.com/office/powerpoint/2010/main" val="819782247"/>
+      </p:ext>
+    </p:extLst>
+  </p:cSld>
+  <p:clrMapOvr>
+    <a:masterClrMapping/>
+  </p:clrMapOvr>
+</p:sld>
+</file>
+
+<file path=ppt/slides/slide8.xml><?xml version="1.0" encoding="utf-8"?>
 <p:sld xmlns:a="http://schemas.openxmlformats.org/drawingml/2006/main" xmlns:r="http://schemas.openxmlformats.org/officeDocument/2006/relationships" xmlns:p="http://schemas.openxmlformats.org/presentationml/2006/main">
   <p:cSld>
     <p:spTree>
@@ -49583,7 +50529,7 @@
 </p:sld>
 </file>
 
-<file path=ppt/slides/slide8.xml><?xml version="1.0" encoding="utf-8"?>
+<file path=ppt/slides/slide9.xml><?xml version="1.0" encoding="utf-8"?>
 <p:sld xmlns:a="http://schemas.openxmlformats.org/drawingml/2006/main" xmlns:r="http://schemas.openxmlformats.org/officeDocument/2006/relationships" xmlns:p="http://schemas.openxmlformats.org/presentationml/2006/main">
   <p:cSld>
     <p:spTree>
@@ -49705,183 +50651,6 @@
     <p:extLst>
       <p:ext uri="{BB962C8B-B14F-4D97-AF65-F5344CB8AC3E}">
         <p14:creationId xmlns:p14="http://schemas.microsoft.com/office/powerpoint/2010/main" val="119921284"/>
-      </p:ext>
-    </p:extLst>
-  </p:cSld>
-  <p:clrMapOvr>
-    <a:masterClrMapping/>
-  </p:clrMapOvr>
-</p:sld>
-</file>
-
-<file path=ppt/slides/slide9.xml><?xml version="1.0" encoding="utf-8"?>
-<p:sld xmlns:a="http://schemas.openxmlformats.org/drawingml/2006/main" xmlns:r="http://schemas.openxmlformats.org/officeDocument/2006/relationships" xmlns:p="http://schemas.openxmlformats.org/presentationml/2006/main">
-  <p:cSld>
-    <p:spTree>
-      <p:nvGrpSpPr>
-        <p:cNvPr id="1" name=""/>
-        <p:cNvGrpSpPr/>
-        <p:nvPr/>
-      </p:nvGrpSpPr>
-      <p:grpSpPr>
-        <a:xfrm>
-          <a:off x="0" y="0"/>
-          <a:ext cx="0" cy="0"/>
-          <a:chOff x="0" y="0"/>
-          <a:chExt cx="0" cy="0"/>
-        </a:xfrm>
-      </p:grpSpPr>
-      <p:sp>
-        <p:nvSpPr>
-          <p:cNvPr id="2" name="Title 1">
-            <a:extLst>
-              <a:ext uri="{FF2B5EF4-FFF2-40B4-BE49-F238E27FC236}">
-                <a16:creationId xmlns:a16="http://schemas.microsoft.com/office/drawing/2014/main" id="{7BEA4FB1-1DD4-4639-855A-362928431391}"/>
-              </a:ext>
-            </a:extLst>
-          </p:cNvPr>
-          <p:cNvSpPr>
-            <a:spLocks noGrp="1"/>
-          </p:cNvSpPr>
-          <p:nvPr>
-            <p:ph type="title"/>
-          </p:nvPr>
-        </p:nvSpPr>
-        <p:spPr>
-          <a:xfrm>
-            <a:off x="1013519" y="567233"/>
-            <a:ext cx="10158611" cy="891382"/>
-          </a:xfrm>
-        </p:spPr>
-        <p:txBody>
-          <a:bodyPr/>
-          <a:lstStyle/>
-          <a:p>
-            <a:r>
-              <a:rPr lang="da-DK" dirty="0"/>
-              <a:t>H</a:t>
-            </a:r>
-            <a:r>
-              <a:rPr lang="en-US" dirty="0"/>
-              <a:t>ow generalizable is this approach?</a:t>
-            </a:r>
-          </a:p>
-        </p:txBody>
-      </p:sp>
-      <p:sp>
-        <p:nvSpPr>
-          <p:cNvPr id="3" name="Text Placeholder 2">
-            <a:extLst>
-              <a:ext uri="{FF2B5EF4-FFF2-40B4-BE49-F238E27FC236}">
-                <a16:creationId xmlns:a16="http://schemas.microsoft.com/office/drawing/2014/main" id="{95D961D5-5AD9-4CA6-BC3E-E902F6121AB7}"/>
-              </a:ext>
-            </a:extLst>
-          </p:cNvPr>
-          <p:cNvSpPr>
-            <a:spLocks noGrp="1"/>
-          </p:cNvSpPr>
-          <p:nvPr>
-            <p:ph type="body" sz="quarter" idx="10"/>
-          </p:nvPr>
-        </p:nvSpPr>
-        <p:spPr>
-          <a:xfrm>
-            <a:off x="1013518" y="1458614"/>
-            <a:ext cx="10158611" cy="4911363"/>
-          </a:xfrm>
-        </p:spPr>
-        <p:txBody>
-          <a:bodyPr/>
-          <a:lstStyle/>
-          <a:p>
-            <a:pPr marL="0" indent="0">
-              <a:buNone/>
-            </a:pPr>
-            <a:r>
-              <a:rPr lang="en-US" dirty="0"/>
-              <a:t>We have conducted three large-scale classification experiments with different levels of complexity in terms of the number of inclusion criteria. Herein we found that: </a:t>
-            </a:r>
-            <a:br>
-              <a:rPr lang="en-US" dirty="0"/>
-            </a:br>
-            <a:endParaRPr lang="en-US" dirty="0"/>
-          </a:p>
-          <a:p>
-            <a:pPr>
-              <a:spcAft>
-                <a:spcPts val="800"/>
-              </a:spcAft>
-            </a:pPr>
-            <a:r>
-              <a:rPr lang="en-US" dirty="0"/>
-              <a:t>GPT API models can perform on par with or in some cases even better typical human second screeners in high-quality systematic reviews (Vembye et al., 2024). All models yield recalls above 80% in all of our experiments while showing high exclusion rate as well. </a:t>
-            </a:r>
-          </a:p>
-          <a:p>
-            <a:pPr>
-              <a:spcAft>
-                <a:spcPts val="800"/>
-              </a:spcAft>
-            </a:pPr>
-            <a:r>
-              <a:rPr lang="en-US" dirty="0"/>
-              <a:t>GPT-4 model can be rather over-inclusive in complex review settings.</a:t>
-            </a:r>
-          </a:p>
-          <a:p>
-            <a:pPr>
-              <a:spcAft>
-                <a:spcPts val="800"/>
-              </a:spcAft>
-            </a:pPr>
-            <a:r>
-              <a:rPr lang="en-US" dirty="0"/>
-              <a:t>The GPT-4 model outperforms </a:t>
-            </a:r>
-            <a:r>
-              <a:rPr lang="da-DK" dirty="0"/>
-              <a:t>the GPT-3.5-turbo model. </a:t>
-            </a:r>
-            <a:r>
-              <a:rPr lang="en-US" dirty="0"/>
-              <a:t>We therefore recommend primarily using GPT-4 models for title and abstract screening</a:t>
-            </a:r>
-            <a:r>
-              <a:rPr lang="da-DK" dirty="0"/>
-              <a:t>.</a:t>
-            </a:r>
-          </a:p>
-          <a:p>
-            <a:pPr>
-              <a:spcAft>
-                <a:spcPts val="800"/>
-              </a:spcAft>
-            </a:pPr>
-            <a:r>
-              <a:rPr lang="en-US" dirty="0"/>
-              <a:t>Moreover, our newest results suggest that GPT-4o-mini, which is 200 times cheaper than GPT-4, can perform on par the GPT-4, when using 10 screenings</a:t>
-            </a:r>
-            <a:r>
-              <a:rPr lang="da-DK" dirty="0"/>
-              <a:t>. </a:t>
-            </a:r>
-            <a:r>
-              <a:rPr lang="en-US" dirty="0"/>
-              <a:t>This is a game-changer in order to reduce the cost of this screening approach. </a:t>
-            </a:r>
-          </a:p>
-          <a:p>
-            <a:pPr marL="0" indent="0">
-              <a:buNone/>
-            </a:pPr>
-            <a:endParaRPr lang="en-US" dirty="0"/>
-          </a:p>
-        </p:txBody>
-      </p:sp>
-    </p:spTree>
-    <p:extLst>
-      <p:ext uri="{BB962C8B-B14F-4D97-AF65-F5344CB8AC3E}">
-        <p14:creationId xmlns:p14="http://schemas.microsoft.com/office/powerpoint/2010/main" val="3991849016"/>
       </p:ext>
     </p:extLst>
   </p:cSld>

--- a/screen-with-gpt-models.pptx
+++ b/screen-with-gpt-models.pptx
@@ -46135,18 +46135,9 @@
           <a:lstStyle/>
           <a:p>
             <a:r>
-              <a:rPr lang="da-DK" dirty="0"/>
-              <a:t>Future </a:t>
-            </a:r>
-            <a:r>
-              <a:rPr lang="da-DK" dirty="0" err="1"/>
-              <a:t>perspectives</a:t>
-            </a:r>
-            <a:r>
-              <a:rPr lang="da-DK" dirty="0"/>
-              <a:t> – the future is AI.</a:t>
-            </a:r>
-            <a:endParaRPr lang="en-US" dirty="0"/>
+              <a:rPr lang="en-US" dirty="0"/>
+              <a:t>Future perspectives – the future is AI!</a:t>
+            </a:r>
           </a:p>
         </p:txBody>
       </p:sp>
@@ -46177,308 +46168,41 @@
               </a:spcAft>
             </a:pPr>
             <a:r>
-              <a:rPr lang="da-DK" dirty="0"/>
-              <a:t>My </a:t>
-            </a:r>
-            <a:r>
               <a:rPr lang="en-US" dirty="0"/>
-              <a:t>projection</a:t>
-            </a:r>
-            <a:r>
-              <a:rPr lang="da-DK" dirty="0"/>
-              <a:t>: Title and abstract and </a:t>
-            </a:r>
-            <a:r>
-              <a:rPr lang="da-DK" dirty="0" err="1"/>
-              <a:t>full</a:t>
-            </a:r>
-            <a:r>
-              <a:rPr lang="da-DK" dirty="0"/>
-              <a:t> </a:t>
-            </a:r>
-            <a:r>
-              <a:rPr lang="da-DK" dirty="0" err="1"/>
-              <a:t>text</a:t>
-            </a:r>
-            <a:r>
-              <a:rPr lang="da-DK" dirty="0"/>
-              <a:t> screening </a:t>
-            </a:r>
-            <a:r>
-              <a:rPr lang="da-DK" dirty="0" err="1"/>
-              <a:t>will</a:t>
-            </a:r>
-            <a:r>
-              <a:rPr lang="da-DK" dirty="0"/>
-              <a:t> </a:t>
-            </a:r>
-            <a:r>
-              <a:rPr lang="da-DK" dirty="0" err="1"/>
-              <a:t>be</a:t>
-            </a:r>
-            <a:r>
-              <a:rPr lang="da-DK" dirty="0"/>
-              <a:t> more of </a:t>
-            </a:r>
-            <a:r>
-              <a:rPr lang="da-DK" dirty="0" err="1"/>
-              <a:t>less</a:t>
-            </a:r>
-            <a:r>
-              <a:rPr lang="da-DK" dirty="0"/>
-              <a:t> </a:t>
-            </a:r>
-            <a:r>
-              <a:rPr lang="da-DK" dirty="0" err="1"/>
-              <a:t>eradicted</a:t>
-            </a:r>
-            <a:r>
-              <a:rPr lang="da-DK" dirty="0"/>
-              <a:t> </a:t>
-            </a:r>
-            <a:r>
-              <a:rPr lang="da-DK" dirty="0" err="1"/>
-              <a:t>within</a:t>
-            </a:r>
-            <a:r>
-              <a:rPr lang="da-DK" dirty="0"/>
-              <a:t> 10 </a:t>
-            </a:r>
-            <a:r>
-              <a:rPr lang="da-DK" dirty="0" err="1"/>
-              <a:t>year</a:t>
-            </a:r>
-            <a:r>
-              <a:rPr lang="da-DK" dirty="0"/>
+              <a:t>My projection: Title and abstract and full text screening will be more or less eradicated within the next 10 years.</a:t>
+            </a:r>
+          </a:p>
+          <a:p>
+            <a:pPr>
+              <a:spcAft>
+                <a:spcPts val="800"/>
+              </a:spcAft>
+            </a:pPr>
+            <a:r>
+              <a:rPr lang="en-US" dirty="0"/>
+              <a:t>We need local models to overcome legal issues. Extremely important when conducting full-text screening, data extraction, and risk of bias. </a:t>
+            </a:r>
+          </a:p>
+          <a:p>
+            <a:pPr>
+              <a:spcAft>
+                <a:spcPts val="800"/>
+              </a:spcAft>
+            </a:pPr>
+            <a:r>
+              <a:rPr lang="en-US" dirty="0"/>
+              <a:t>Many countries’ licensing agreements with publishers do not allow uploading PDF/full text to remote commercial AIs. Even if they do, it might be problematic due to the </a:t>
+            </a:r>
+            <a:r>
+              <a:rPr lang="en-US" dirty="0">
+                <a:hlinkClick r:id="rId3"/>
+              </a:rPr>
+              <a:t>European AI Act</a:t>
+            </a:r>
+            <a:r>
+              <a:rPr lang="en-US" dirty="0"/>
               <a:t>.</a:t>
             </a:r>
-          </a:p>
-          <a:p>
-            <a:pPr>
-              <a:spcAft>
-                <a:spcPts val="800"/>
-              </a:spcAft>
-            </a:pPr>
-            <a:r>
-              <a:rPr lang="da-DK" dirty="0" err="1"/>
-              <a:t>We</a:t>
-            </a:r>
-            <a:r>
-              <a:rPr lang="da-DK" dirty="0"/>
-              <a:t> </a:t>
-            </a:r>
-            <a:r>
-              <a:rPr lang="da-DK" dirty="0" err="1"/>
-              <a:t>need</a:t>
-            </a:r>
-            <a:r>
-              <a:rPr lang="da-DK" dirty="0"/>
-              <a:t> </a:t>
-            </a:r>
-            <a:r>
-              <a:rPr lang="da-DK" dirty="0" err="1"/>
-              <a:t>local</a:t>
-            </a:r>
-            <a:r>
-              <a:rPr lang="da-DK" dirty="0"/>
-              <a:t> models to over legal issues. </a:t>
-            </a:r>
-            <a:r>
-              <a:rPr lang="da-DK" dirty="0" err="1"/>
-              <a:t>Extremely</a:t>
-            </a:r>
-            <a:r>
-              <a:rPr lang="da-DK" dirty="0"/>
-              <a:t> </a:t>
-            </a:r>
-            <a:r>
-              <a:rPr lang="da-DK" dirty="0" err="1"/>
-              <a:t>important</a:t>
-            </a:r>
-            <a:r>
-              <a:rPr lang="da-DK" dirty="0"/>
-              <a:t> </a:t>
-            </a:r>
-            <a:r>
-              <a:rPr lang="da-DK" dirty="0" err="1"/>
-              <a:t>when</a:t>
-            </a:r>
-            <a:r>
-              <a:rPr lang="da-DK" dirty="0"/>
-              <a:t> </a:t>
-            </a:r>
-            <a:r>
-              <a:rPr lang="da-DK" dirty="0" err="1"/>
-              <a:t>conducting</a:t>
-            </a:r>
-            <a:r>
-              <a:rPr lang="da-DK" dirty="0"/>
-              <a:t> </a:t>
-            </a:r>
-            <a:r>
-              <a:rPr lang="da-DK" dirty="0" err="1"/>
-              <a:t>full-text</a:t>
-            </a:r>
-            <a:r>
-              <a:rPr lang="da-DK" dirty="0"/>
-              <a:t> screening, data </a:t>
-            </a:r>
-            <a:r>
-              <a:rPr lang="da-DK" dirty="0" err="1"/>
-              <a:t>extraction</a:t>
-            </a:r>
-            <a:r>
-              <a:rPr lang="da-DK" dirty="0"/>
-              <a:t>, and </a:t>
-            </a:r>
-            <a:r>
-              <a:rPr lang="da-DK" dirty="0" err="1"/>
-              <a:t>risk</a:t>
-            </a:r>
-            <a:r>
-              <a:rPr lang="da-DK" dirty="0"/>
-              <a:t> of bias. </a:t>
-            </a:r>
-          </a:p>
-          <a:p>
-            <a:pPr>
-              <a:spcAft>
-                <a:spcPts val="800"/>
-              </a:spcAft>
-            </a:pPr>
-            <a:r>
-              <a:rPr lang="da-DK" dirty="0" err="1"/>
-              <a:t>Many</a:t>
-            </a:r>
-            <a:r>
-              <a:rPr lang="da-DK" dirty="0"/>
-              <a:t> </a:t>
-            </a:r>
-            <a:r>
-              <a:rPr lang="da-DK" dirty="0" err="1"/>
-              <a:t>countires</a:t>
-            </a:r>
-            <a:r>
-              <a:rPr lang="da-DK" dirty="0"/>
-              <a:t> </a:t>
-            </a:r>
-            <a:r>
-              <a:rPr lang="da-DK" dirty="0" err="1"/>
-              <a:t>lincence</a:t>
-            </a:r>
-            <a:r>
-              <a:rPr lang="da-DK" dirty="0"/>
-              <a:t> agreements with </a:t>
-            </a:r>
-            <a:r>
-              <a:rPr lang="da-DK" dirty="0" err="1"/>
-              <a:t>publishers</a:t>
-            </a:r>
-            <a:r>
-              <a:rPr lang="da-DK" dirty="0"/>
-              <a:t> </a:t>
-            </a:r>
-            <a:r>
-              <a:rPr lang="da-DK" dirty="0" err="1"/>
-              <a:t>does</a:t>
-            </a:r>
-            <a:r>
-              <a:rPr lang="da-DK" dirty="0"/>
-              <a:t> not </a:t>
-            </a:r>
-            <a:r>
-              <a:rPr lang="da-DK" dirty="0" err="1"/>
-              <a:t>allow</a:t>
-            </a:r>
-            <a:r>
-              <a:rPr lang="da-DK" dirty="0"/>
-              <a:t> uploading PDF/</a:t>
-            </a:r>
-            <a:r>
-              <a:rPr lang="da-DK" dirty="0" err="1"/>
-              <a:t>full</a:t>
-            </a:r>
-            <a:r>
-              <a:rPr lang="da-DK" dirty="0"/>
-              <a:t> </a:t>
-            </a:r>
-            <a:r>
-              <a:rPr lang="da-DK" dirty="0" err="1"/>
-              <a:t>text</a:t>
-            </a:r>
-            <a:r>
-              <a:rPr lang="da-DK" dirty="0"/>
-              <a:t> to </a:t>
-            </a:r>
-            <a:r>
-              <a:rPr lang="da-DK" dirty="0" err="1"/>
-              <a:t>remote</a:t>
-            </a:r>
-            <a:r>
-              <a:rPr lang="da-DK" dirty="0"/>
-              <a:t> </a:t>
-            </a:r>
-            <a:r>
-              <a:rPr lang="da-DK" dirty="0" err="1"/>
-              <a:t>commercial</a:t>
-            </a:r>
-            <a:r>
-              <a:rPr lang="da-DK" dirty="0"/>
-              <a:t> </a:t>
-            </a:r>
-            <a:r>
-              <a:rPr lang="da-DK" dirty="0" err="1"/>
-              <a:t>AIs</a:t>
-            </a:r>
-            <a:r>
-              <a:rPr lang="da-DK" dirty="0"/>
-              <a:t>. Even </a:t>
-            </a:r>
-            <a:r>
-              <a:rPr lang="da-DK" dirty="0" err="1"/>
-              <a:t>if</a:t>
-            </a:r>
-            <a:r>
-              <a:rPr lang="da-DK" dirty="0"/>
-              <a:t> </a:t>
-            </a:r>
-            <a:r>
-              <a:rPr lang="da-DK" dirty="0" err="1"/>
-              <a:t>they</a:t>
-            </a:r>
-            <a:r>
-              <a:rPr lang="da-DK" dirty="0"/>
-              <a:t> do it </a:t>
-            </a:r>
-            <a:r>
-              <a:rPr lang="da-DK" dirty="0" err="1"/>
-              <a:t>might</a:t>
-            </a:r>
-            <a:r>
-              <a:rPr lang="da-DK" dirty="0"/>
-              <a:t> </a:t>
-            </a:r>
-            <a:r>
-              <a:rPr lang="da-DK" dirty="0" err="1"/>
-              <a:t>be</a:t>
-            </a:r>
-            <a:r>
-              <a:rPr lang="da-DK" dirty="0"/>
-              <a:t> </a:t>
-            </a:r>
-            <a:r>
-              <a:rPr lang="da-DK" dirty="0" err="1"/>
-              <a:t>probelmatic</a:t>
-            </a:r>
-            <a:r>
-              <a:rPr lang="da-DK" dirty="0"/>
-              <a:t> due to the European AI </a:t>
-            </a:r>
-            <a:r>
-              <a:rPr lang="da-DK" dirty="0" err="1"/>
-              <a:t>act</a:t>
-            </a:r>
-            <a:endParaRPr lang="da-DK" dirty="0"/>
           </a:p>
           <a:p>
             <a:pPr marL="317500" lvl="1" indent="0">
@@ -46665,7 +46389,7 @@
         </p:blipFill>
         <p:spPr>
           <a:xfrm>
-            <a:off x="9272605" y="248850"/>
+            <a:off x="8575920" y="694541"/>
             <a:ext cx="2090877" cy="2419530"/>
           </a:xfrm>
           <a:prstGeom prst="rect">

--- a/screen-with-gpt-models.pptx
+++ b/screen-with-gpt-models.pptx
@@ -245,7 +245,7 @@
           <a:p>
             <a:fld id="{7BEB8190-3B91-4E7B-8634-E458355F2E20}" type="datetimeFigureOut">
               <a:rPr lang="en-GB" smtClean="0"/>
-              <a:t>21/04/2026</a:t>
+              <a:t>22/04/2026</a:t>
             </a:fld>
             <a:endParaRPr lang="en-GB"/>
           </a:p>
@@ -45192,360 +45192,6 @@
           <a:chExt cx="0" cy="0"/>
         </a:xfrm>
       </p:grpSpPr>
-      <p:sp>
-        <p:nvSpPr>
-          <p:cNvPr id="4" name="Text Placeholder 2">
-            <a:extLst>
-              <a:ext uri="{FF2B5EF4-FFF2-40B4-BE49-F238E27FC236}">
-                <a16:creationId xmlns:a16="http://schemas.microsoft.com/office/drawing/2014/main" id="{53354405-76D0-4268-8EE0-44258B5D5318}"/>
-              </a:ext>
-            </a:extLst>
-          </p:cNvPr>
-          <p:cNvSpPr txBox="1">
-            <a:spLocks/>
-          </p:cNvSpPr>
-          <p:nvPr/>
-        </p:nvSpPr>
-        <p:spPr>
-          <a:xfrm>
-            <a:off x="1013520" y="1119244"/>
-            <a:ext cx="4791378" cy="4911441"/>
-          </a:xfrm>
-          <a:prstGeom prst="rect">
-            <a:avLst/>
-          </a:prstGeom>
-        </p:spPr>
-        <p:txBody>
-          <a:bodyPr vert="horz" lIns="0" tIns="0" rIns="0" bIns="0" rtlCol="0" anchor="t">
-            <a:noAutofit/>
-          </a:bodyPr>
-          <a:lstStyle>
-            <a:lvl1pPr marL="285750" indent="-285750" algn="l" defTabSz="914400" rtl="0" eaLnBrk="1" latinLnBrk="0" hangingPunct="1">
-              <a:lnSpc>
-                <a:spcPct val="100000"/>
-              </a:lnSpc>
-              <a:spcBef>
-                <a:spcPts val="1000"/>
-              </a:spcBef>
-              <a:buClr>
-                <a:schemeClr val="bg1"/>
-              </a:buClr>
-              <a:buSzPct val="110000"/>
-              <a:buFontTx/>
-              <a:buBlip>
-                <a:blip r:embed="rId2">
-                  <a:extLst>
-                    <a:ext uri="{96DAC541-7B7A-43D3-8B79-37D633B846F1}">
-                      <asvg:svgBlip xmlns:asvg="http://schemas.microsoft.com/office/drawing/2016/SVG/main" r:embed="rId3"/>
-                    </a:ext>
-                  </a:extLst>
-                </a:blip>
-              </a:buBlip>
-              <a:defRPr sz="1800" kern="1200">
-                <a:solidFill>
-                  <a:schemeClr val="tx1"/>
-                </a:solidFill>
-                <a:latin typeface="+mn-lt"/>
-                <a:ea typeface="+mn-ea"/>
-                <a:cs typeface="+mn-cs"/>
-              </a:defRPr>
-            </a:lvl1pPr>
-            <a:lvl2pPr marL="603250" indent="-285750" algn="l" defTabSz="914400" rtl="0" eaLnBrk="1" latinLnBrk="0" hangingPunct="1">
-              <a:lnSpc>
-                <a:spcPct val="100000"/>
-              </a:lnSpc>
-              <a:spcBef>
-                <a:spcPts val="1000"/>
-              </a:spcBef>
-              <a:buClr>
-                <a:schemeClr val="bg1"/>
-              </a:buClr>
-              <a:buSzPct val="110000"/>
-              <a:buFontTx/>
-              <a:buBlip>
-                <a:blip r:embed="rId2">
-                  <a:extLst>
-                    <a:ext uri="{96DAC541-7B7A-43D3-8B79-37D633B846F1}">
-                      <asvg:svgBlip xmlns:asvg="http://schemas.microsoft.com/office/drawing/2016/SVG/main" r:embed="rId3"/>
-                    </a:ext>
-                  </a:extLst>
-                </a:blip>
-              </a:buBlip>
-              <a:defRPr sz="1600" kern="1200">
-                <a:solidFill>
-                  <a:schemeClr val="tx1"/>
-                </a:solidFill>
-                <a:latin typeface="+mn-lt"/>
-                <a:ea typeface="+mn-ea"/>
-                <a:cs typeface="+mn-cs"/>
-              </a:defRPr>
-            </a:lvl2pPr>
-            <a:lvl3pPr marL="920750" indent="-285750" algn="l" defTabSz="914400" rtl="0" eaLnBrk="1" latinLnBrk="0" hangingPunct="1">
-              <a:lnSpc>
-                <a:spcPct val="100000"/>
-              </a:lnSpc>
-              <a:spcBef>
-                <a:spcPts val="1000"/>
-              </a:spcBef>
-              <a:buClr>
-                <a:schemeClr val="bg1"/>
-              </a:buClr>
-              <a:buSzPct val="110000"/>
-              <a:buFontTx/>
-              <a:buBlip>
-                <a:blip r:embed="rId2">
-                  <a:extLst>
-                    <a:ext uri="{96DAC541-7B7A-43D3-8B79-37D633B846F1}">
-                      <asvg:svgBlip xmlns:asvg="http://schemas.microsoft.com/office/drawing/2016/SVG/main" r:embed="rId3"/>
-                    </a:ext>
-                  </a:extLst>
-                </a:blip>
-              </a:buBlip>
-              <a:defRPr sz="1400" kern="1200">
-                <a:solidFill>
-                  <a:schemeClr val="tx1"/>
-                </a:solidFill>
-                <a:latin typeface="+mn-lt"/>
-                <a:ea typeface="+mn-ea"/>
-                <a:cs typeface="+mn-cs"/>
-              </a:defRPr>
-            </a:lvl3pPr>
-            <a:lvl4pPr marL="1238250" indent="-285750" algn="l" defTabSz="914400" rtl="0" eaLnBrk="1" latinLnBrk="0" hangingPunct="1">
-              <a:lnSpc>
-                <a:spcPct val="100000"/>
-              </a:lnSpc>
-              <a:spcBef>
-                <a:spcPts val="1000"/>
-              </a:spcBef>
-              <a:buClr>
-                <a:schemeClr val="bg1"/>
-              </a:buClr>
-              <a:buSzPct val="110000"/>
-              <a:buFontTx/>
-              <a:buBlip>
-                <a:blip r:embed="rId2">
-                  <a:extLst>
-                    <a:ext uri="{96DAC541-7B7A-43D3-8B79-37D633B846F1}">
-                      <asvg:svgBlip xmlns:asvg="http://schemas.microsoft.com/office/drawing/2016/SVG/main" r:embed="rId3"/>
-                    </a:ext>
-                  </a:extLst>
-                </a:blip>
-              </a:buBlip>
-              <a:defRPr sz="1200" kern="1200">
-                <a:solidFill>
-                  <a:schemeClr val="tx1"/>
-                </a:solidFill>
-                <a:latin typeface="+mn-lt"/>
-                <a:ea typeface="+mn-ea"/>
-                <a:cs typeface="+mn-cs"/>
-              </a:defRPr>
-            </a:lvl4pPr>
-            <a:lvl5pPr marL="1555750" indent="-285750" algn="l" defTabSz="914400" rtl="0" eaLnBrk="1" latinLnBrk="0" hangingPunct="1">
-              <a:lnSpc>
-                <a:spcPct val="100000"/>
-              </a:lnSpc>
-              <a:spcBef>
-                <a:spcPts val="1000"/>
-              </a:spcBef>
-              <a:buClr>
-                <a:schemeClr val="bg1"/>
-              </a:buClr>
-              <a:buSzPct val="110000"/>
-              <a:buFontTx/>
-              <a:buBlip>
-                <a:blip r:embed="rId2">
-                  <a:extLst>
-                    <a:ext uri="{96DAC541-7B7A-43D3-8B79-37D633B846F1}">
-                      <asvg:svgBlip xmlns:asvg="http://schemas.microsoft.com/office/drawing/2016/SVG/main" r:embed="rId3"/>
-                    </a:ext>
-                  </a:extLst>
-                </a:blip>
-              </a:buBlip>
-              <a:defRPr sz="1000" kern="1200">
-                <a:solidFill>
-                  <a:schemeClr val="tx1"/>
-                </a:solidFill>
-                <a:latin typeface="+mn-lt"/>
-                <a:ea typeface="+mn-ea"/>
-                <a:cs typeface="+mn-cs"/>
-              </a:defRPr>
-            </a:lvl5pPr>
-            <a:lvl6pPr marL="2514600" indent="-228600" algn="l" defTabSz="914400" rtl="0" eaLnBrk="1" latinLnBrk="0" hangingPunct="1">
-              <a:lnSpc>
-                <a:spcPct val="90000"/>
-              </a:lnSpc>
-              <a:spcBef>
-                <a:spcPts val="500"/>
-              </a:spcBef>
-              <a:buFont typeface="Arial" panose="020B0604020202020204" pitchFamily="34" charset="0"/>
-              <a:buChar char="•"/>
-              <a:defRPr sz="1800" kern="1200">
-                <a:solidFill>
-                  <a:schemeClr val="tx1"/>
-                </a:solidFill>
-                <a:latin typeface="+mn-lt"/>
-                <a:ea typeface="+mn-ea"/>
-                <a:cs typeface="+mn-cs"/>
-              </a:defRPr>
-            </a:lvl6pPr>
-            <a:lvl7pPr marL="2971800" indent="-228600" algn="l" defTabSz="914400" rtl="0" eaLnBrk="1" latinLnBrk="0" hangingPunct="1">
-              <a:lnSpc>
-                <a:spcPct val="90000"/>
-              </a:lnSpc>
-              <a:spcBef>
-                <a:spcPts val="500"/>
-              </a:spcBef>
-              <a:buFont typeface="Arial" panose="020B0604020202020204" pitchFamily="34" charset="0"/>
-              <a:buChar char="•"/>
-              <a:defRPr sz="1800" kern="1200">
-                <a:solidFill>
-                  <a:schemeClr val="tx1"/>
-                </a:solidFill>
-                <a:latin typeface="+mn-lt"/>
-                <a:ea typeface="+mn-ea"/>
-                <a:cs typeface="+mn-cs"/>
-              </a:defRPr>
-            </a:lvl7pPr>
-            <a:lvl8pPr marL="3429000" indent="-228600" algn="l" defTabSz="914400" rtl="0" eaLnBrk="1" latinLnBrk="0" hangingPunct="1">
-              <a:lnSpc>
-                <a:spcPct val="90000"/>
-              </a:lnSpc>
-              <a:spcBef>
-                <a:spcPts val="500"/>
-              </a:spcBef>
-              <a:buFont typeface="Arial" panose="020B0604020202020204" pitchFamily="34" charset="0"/>
-              <a:buChar char="•"/>
-              <a:defRPr sz="1800" kern="1200">
-                <a:solidFill>
-                  <a:schemeClr val="tx1"/>
-                </a:solidFill>
-                <a:latin typeface="+mn-lt"/>
-                <a:ea typeface="+mn-ea"/>
-                <a:cs typeface="+mn-cs"/>
-              </a:defRPr>
-            </a:lvl8pPr>
-            <a:lvl9pPr marL="3886200" indent="-228600" algn="l" defTabSz="914400" rtl="0" eaLnBrk="1" latinLnBrk="0" hangingPunct="1">
-              <a:lnSpc>
-                <a:spcPct val="90000"/>
-              </a:lnSpc>
-              <a:spcBef>
-                <a:spcPts val="500"/>
-              </a:spcBef>
-              <a:buFont typeface="Arial" panose="020B0604020202020204" pitchFamily="34" charset="0"/>
-              <a:buChar char="•"/>
-              <a:defRPr sz="1800" kern="1200">
-                <a:solidFill>
-                  <a:schemeClr val="tx1"/>
-                </a:solidFill>
-                <a:latin typeface="+mn-lt"/>
-                <a:ea typeface="+mn-ea"/>
-                <a:cs typeface="+mn-cs"/>
-              </a:defRPr>
-            </a:lvl9pPr>
-          </a:lstStyle>
-          <a:p>
-            <a:pPr marL="0" indent="0">
-              <a:buNone/>
-            </a:pPr>
-            <a:r>
-              <a:rPr lang="en-US" sz="2400" b="1" dirty="0"/>
-              <a:t>Advantages</a:t>
-            </a:r>
-          </a:p>
-          <a:p>
-            <a:pPr>
-              <a:spcAft>
-                <a:spcPts val="800"/>
-              </a:spcAft>
-            </a:pPr>
-            <a:r>
-              <a:rPr lang="en-US" dirty="0"/>
-              <a:t>Equal treatment of all titles and abstracts</a:t>
-            </a:r>
-          </a:p>
-          <a:p>
-            <a:pPr>
-              <a:spcAft>
-                <a:spcPts val="800"/>
-              </a:spcAft>
-            </a:pPr>
-            <a:r>
-              <a:rPr lang="en-US" dirty="0"/>
-              <a:t>It is most often accurate</a:t>
-            </a:r>
-          </a:p>
-          <a:p>
-            <a:pPr>
-              <a:spcAft>
-                <a:spcPts val="800"/>
-              </a:spcAft>
-            </a:pPr>
-            <a:r>
-              <a:rPr lang="en-US" dirty="0"/>
-              <a:t>It is fast</a:t>
-            </a:r>
-          </a:p>
-          <a:p>
-            <a:pPr>
-              <a:spcAft>
-                <a:spcPts val="800"/>
-              </a:spcAft>
-            </a:pPr>
-            <a:r>
-              <a:rPr lang="en-US" dirty="0"/>
-              <a:t>It is cheap </a:t>
-            </a:r>
-          </a:p>
-          <a:p>
-            <a:pPr>
-              <a:spcAft>
-                <a:spcPts val="800"/>
-              </a:spcAft>
-            </a:pPr>
-            <a:r>
-              <a:rPr lang="en-US" dirty="0"/>
-              <a:t>Can guard against human drifting. </a:t>
-            </a:r>
-          </a:p>
-          <a:p>
-            <a:pPr>
-              <a:spcAft>
-                <a:spcPts val="800"/>
-              </a:spcAft>
-            </a:pPr>
-            <a:r>
-              <a:rPr lang="en-US" dirty="0"/>
-              <a:t>Extra insurance that you have found all relevant records. It can also be used as a third screener.</a:t>
-            </a:r>
-          </a:p>
-          <a:p>
-            <a:pPr>
-              <a:spcAft>
-                <a:spcPts val="800"/>
-              </a:spcAft>
-            </a:pPr>
-            <a:r>
-              <a:rPr lang="en-US" dirty="0"/>
-              <a:t>Agnostic to data imbalance</a:t>
-            </a:r>
-          </a:p>
-          <a:p>
-            <a:pPr>
-              <a:spcAft>
-                <a:spcPts val="800"/>
-              </a:spcAft>
-            </a:pPr>
-            <a:r>
-              <a:rPr lang="da-DK" dirty="0"/>
-              <a:t>I</a:t>
-            </a:r>
-            <a:r>
-              <a:rPr lang="en-US" dirty="0"/>
-              <a:t>t’s flexible. That is, it can rapidly be fitted to many different situations. </a:t>
-            </a:r>
-          </a:p>
-        </p:txBody>
-      </p:sp>
       <p:cxnSp>
         <p:nvCxnSpPr>
           <p:cNvPr id="8" name="Straight Connector 7">
@@ -45598,7 +45244,7 @@
         </p:nvSpPr>
         <p:spPr>
           <a:xfrm>
-            <a:off x="6460287" y="1119245"/>
+            <a:off x="815487" y="917046"/>
             <a:ext cx="4791378" cy="4586842"/>
           </a:xfrm>
           <a:prstGeom prst="rect">
@@ -45896,6 +45542,371 @@
             <a:r>
               <a:rPr lang="en-US" dirty="0"/>
               <a:t>Hard to keep up with new model developments</a:t>
+            </a:r>
+          </a:p>
+          <a:p>
+            <a:pPr>
+              <a:spcAft>
+                <a:spcPts val="800"/>
+              </a:spcAft>
+            </a:pPr>
+            <a:r>
+              <a:rPr lang="en-US" dirty="0"/>
+              <a:t>Supporting American and Chinese big tech companies. </a:t>
+            </a:r>
+          </a:p>
+        </p:txBody>
+      </p:sp>
+      <p:sp>
+        <p:nvSpPr>
+          <p:cNvPr id="2" name="Text Placeholder 2">
+            <a:extLst>
+              <a:ext uri="{FF2B5EF4-FFF2-40B4-BE49-F238E27FC236}">
+                <a16:creationId xmlns:a16="http://schemas.microsoft.com/office/drawing/2014/main" id="{53354405-76D0-4268-8EE0-44258B5D5318}"/>
+              </a:ext>
+            </a:extLst>
+          </p:cNvPr>
+          <p:cNvSpPr txBox="1">
+            <a:spLocks/>
+          </p:cNvSpPr>
+          <p:nvPr/>
+        </p:nvSpPr>
+        <p:spPr>
+          <a:xfrm>
+            <a:off x="6687120" y="917046"/>
+            <a:ext cx="4791378" cy="5159754"/>
+          </a:xfrm>
+          <a:prstGeom prst="rect">
+            <a:avLst/>
+          </a:prstGeom>
+        </p:spPr>
+        <p:txBody>
+          <a:bodyPr vert="horz" lIns="0" tIns="0" rIns="0" bIns="0" rtlCol="0" anchor="t">
+            <a:noAutofit/>
+          </a:bodyPr>
+          <a:lstStyle>
+            <a:lvl1pPr marL="285750" indent="-285750" algn="l" defTabSz="914400" rtl="0" eaLnBrk="1" latinLnBrk="0" hangingPunct="1">
+              <a:lnSpc>
+                <a:spcPct val="100000"/>
+              </a:lnSpc>
+              <a:spcBef>
+                <a:spcPts val="1000"/>
+              </a:spcBef>
+              <a:buClr>
+                <a:schemeClr val="bg1"/>
+              </a:buClr>
+              <a:buSzPct val="110000"/>
+              <a:buFontTx/>
+              <a:buBlip>
+                <a:blip r:embed="rId2">
+                  <a:extLst>
+                    <a:ext uri="{96DAC541-7B7A-43D3-8B79-37D633B846F1}">
+                      <asvg:svgBlip xmlns:asvg="http://schemas.microsoft.com/office/drawing/2016/SVG/main" r:embed="rId3"/>
+                    </a:ext>
+                  </a:extLst>
+                </a:blip>
+              </a:buBlip>
+              <a:defRPr sz="1800" kern="1200">
+                <a:solidFill>
+                  <a:schemeClr val="tx1"/>
+                </a:solidFill>
+                <a:latin typeface="+mn-lt"/>
+                <a:ea typeface="+mn-ea"/>
+                <a:cs typeface="+mn-cs"/>
+              </a:defRPr>
+            </a:lvl1pPr>
+            <a:lvl2pPr marL="603250" indent="-285750" algn="l" defTabSz="914400" rtl="0" eaLnBrk="1" latinLnBrk="0" hangingPunct="1">
+              <a:lnSpc>
+                <a:spcPct val="100000"/>
+              </a:lnSpc>
+              <a:spcBef>
+                <a:spcPts val="1000"/>
+              </a:spcBef>
+              <a:buClr>
+                <a:schemeClr val="bg1"/>
+              </a:buClr>
+              <a:buSzPct val="110000"/>
+              <a:buFontTx/>
+              <a:buBlip>
+                <a:blip r:embed="rId2">
+                  <a:extLst>
+                    <a:ext uri="{96DAC541-7B7A-43D3-8B79-37D633B846F1}">
+                      <asvg:svgBlip xmlns:asvg="http://schemas.microsoft.com/office/drawing/2016/SVG/main" r:embed="rId3"/>
+                    </a:ext>
+                  </a:extLst>
+                </a:blip>
+              </a:buBlip>
+              <a:defRPr sz="1600" kern="1200">
+                <a:solidFill>
+                  <a:schemeClr val="tx1"/>
+                </a:solidFill>
+                <a:latin typeface="+mn-lt"/>
+                <a:ea typeface="+mn-ea"/>
+                <a:cs typeface="+mn-cs"/>
+              </a:defRPr>
+            </a:lvl2pPr>
+            <a:lvl3pPr marL="920750" indent="-285750" algn="l" defTabSz="914400" rtl="0" eaLnBrk="1" latinLnBrk="0" hangingPunct="1">
+              <a:lnSpc>
+                <a:spcPct val="100000"/>
+              </a:lnSpc>
+              <a:spcBef>
+                <a:spcPts val="1000"/>
+              </a:spcBef>
+              <a:buClr>
+                <a:schemeClr val="bg1"/>
+              </a:buClr>
+              <a:buSzPct val="110000"/>
+              <a:buFontTx/>
+              <a:buBlip>
+                <a:blip r:embed="rId2">
+                  <a:extLst>
+                    <a:ext uri="{96DAC541-7B7A-43D3-8B79-37D633B846F1}">
+                      <asvg:svgBlip xmlns:asvg="http://schemas.microsoft.com/office/drawing/2016/SVG/main" r:embed="rId3"/>
+                    </a:ext>
+                  </a:extLst>
+                </a:blip>
+              </a:buBlip>
+              <a:defRPr sz="1400" kern="1200">
+                <a:solidFill>
+                  <a:schemeClr val="tx1"/>
+                </a:solidFill>
+                <a:latin typeface="+mn-lt"/>
+                <a:ea typeface="+mn-ea"/>
+                <a:cs typeface="+mn-cs"/>
+              </a:defRPr>
+            </a:lvl3pPr>
+            <a:lvl4pPr marL="1238250" indent="-285750" algn="l" defTabSz="914400" rtl="0" eaLnBrk="1" latinLnBrk="0" hangingPunct="1">
+              <a:lnSpc>
+                <a:spcPct val="100000"/>
+              </a:lnSpc>
+              <a:spcBef>
+                <a:spcPts val="1000"/>
+              </a:spcBef>
+              <a:buClr>
+                <a:schemeClr val="bg1"/>
+              </a:buClr>
+              <a:buSzPct val="110000"/>
+              <a:buFontTx/>
+              <a:buBlip>
+                <a:blip r:embed="rId2">
+                  <a:extLst>
+                    <a:ext uri="{96DAC541-7B7A-43D3-8B79-37D633B846F1}">
+                      <asvg:svgBlip xmlns:asvg="http://schemas.microsoft.com/office/drawing/2016/SVG/main" r:embed="rId3"/>
+                    </a:ext>
+                  </a:extLst>
+                </a:blip>
+              </a:buBlip>
+              <a:defRPr sz="1200" kern="1200">
+                <a:solidFill>
+                  <a:schemeClr val="tx1"/>
+                </a:solidFill>
+                <a:latin typeface="+mn-lt"/>
+                <a:ea typeface="+mn-ea"/>
+                <a:cs typeface="+mn-cs"/>
+              </a:defRPr>
+            </a:lvl4pPr>
+            <a:lvl5pPr marL="1555750" indent="-285750" algn="l" defTabSz="914400" rtl="0" eaLnBrk="1" latinLnBrk="0" hangingPunct="1">
+              <a:lnSpc>
+                <a:spcPct val="100000"/>
+              </a:lnSpc>
+              <a:spcBef>
+                <a:spcPts val="1000"/>
+              </a:spcBef>
+              <a:buClr>
+                <a:schemeClr val="bg1"/>
+              </a:buClr>
+              <a:buSzPct val="110000"/>
+              <a:buFontTx/>
+              <a:buBlip>
+                <a:blip r:embed="rId2">
+                  <a:extLst>
+                    <a:ext uri="{96DAC541-7B7A-43D3-8B79-37D633B846F1}">
+                      <asvg:svgBlip xmlns:asvg="http://schemas.microsoft.com/office/drawing/2016/SVG/main" r:embed="rId3"/>
+                    </a:ext>
+                  </a:extLst>
+                </a:blip>
+              </a:buBlip>
+              <a:defRPr sz="1000" kern="1200">
+                <a:solidFill>
+                  <a:schemeClr val="tx1"/>
+                </a:solidFill>
+                <a:latin typeface="+mn-lt"/>
+                <a:ea typeface="+mn-ea"/>
+                <a:cs typeface="+mn-cs"/>
+              </a:defRPr>
+            </a:lvl5pPr>
+            <a:lvl6pPr marL="2514600" indent="-228600" algn="l" defTabSz="914400" rtl="0" eaLnBrk="1" latinLnBrk="0" hangingPunct="1">
+              <a:lnSpc>
+                <a:spcPct val="90000"/>
+              </a:lnSpc>
+              <a:spcBef>
+                <a:spcPts val="500"/>
+              </a:spcBef>
+              <a:buFont typeface="Arial" panose="020B0604020202020204" pitchFamily="34" charset="0"/>
+              <a:buChar char="•"/>
+              <a:defRPr sz="1800" kern="1200">
+                <a:solidFill>
+                  <a:schemeClr val="tx1"/>
+                </a:solidFill>
+                <a:latin typeface="+mn-lt"/>
+                <a:ea typeface="+mn-ea"/>
+                <a:cs typeface="+mn-cs"/>
+              </a:defRPr>
+            </a:lvl6pPr>
+            <a:lvl7pPr marL="2971800" indent="-228600" algn="l" defTabSz="914400" rtl="0" eaLnBrk="1" latinLnBrk="0" hangingPunct="1">
+              <a:lnSpc>
+                <a:spcPct val="90000"/>
+              </a:lnSpc>
+              <a:spcBef>
+                <a:spcPts val="500"/>
+              </a:spcBef>
+              <a:buFont typeface="Arial" panose="020B0604020202020204" pitchFamily="34" charset="0"/>
+              <a:buChar char="•"/>
+              <a:defRPr sz="1800" kern="1200">
+                <a:solidFill>
+                  <a:schemeClr val="tx1"/>
+                </a:solidFill>
+                <a:latin typeface="+mn-lt"/>
+                <a:ea typeface="+mn-ea"/>
+                <a:cs typeface="+mn-cs"/>
+              </a:defRPr>
+            </a:lvl7pPr>
+            <a:lvl8pPr marL="3429000" indent="-228600" algn="l" defTabSz="914400" rtl="0" eaLnBrk="1" latinLnBrk="0" hangingPunct="1">
+              <a:lnSpc>
+                <a:spcPct val="90000"/>
+              </a:lnSpc>
+              <a:spcBef>
+                <a:spcPts val="500"/>
+              </a:spcBef>
+              <a:buFont typeface="Arial" panose="020B0604020202020204" pitchFamily="34" charset="0"/>
+              <a:buChar char="•"/>
+              <a:defRPr sz="1800" kern="1200">
+                <a:solidFill>
+                  <a:schemeClr val="tx1"/>
+                </a:solidFill>
+                <a:latin typeface="+mn-lt"/>
+                <a:ea typeface="+mn-ea"/>
+                <a:cs typeface="+mn-cs"/>
+              </a:defRPr>
+            </a:lvl8pPr>
+            <a:lvl9pPr marL="3886200" indent="-228600" algn="l" defTabSz="914400" rtl="0" eaLnBrk="1" latinLnBrk="0" hangingPunct="1">
+              <a:lnSpc>
+                <a:spcPct val="90000"/>
+              </a:lnSpc>
+              <a:spcBef>
+                <a:spcPts val="500"/>
+              </a:spcBef>
+              <a:buFont typeface="Arial" panose="020B0604020202020204" pitchFamily="34" charset="0"/>
+              <a:buChar char="•"/>
+              <a:defRPr sz="1800" kern="1200">
+                <a:solidFill>
+                  <a:schemeClr val="tx1"/>
+                </a:solidFill>
+                <a:latin typeface="+mn-lt"/>
+                <a:ea typeface="+mn-ea"/>
+                <a:cs typeface="+mn-cs"/>
+              </a:defRPr>
+            </a:lvl9pPr>
+          </a:lstStyle>
+          <a:p>
+            <a:pPr marL="0" indent="0">
+              <a:buNone/>
+            </a:pPr>
+            <a:r>
+              <a:rPr lang="en-US" sz="2400" b="1" dirty="0"/>
+              <a:t>Advantages</a:t>
+            </a:r>
+          </a:p>
+          <a:p>
+            <a:pPr>
+              <a:spcAft>
+                <a:spcPts val="800"/>
+              </a:spcAft>
+            </a:pPr>
+            <a:r>
+              <a:rPr lang="en-US" dirty="0"/>
+              <a:t>Equal treatment of all titles and abstracts</a:t>
+            </a:r>
+          </a:p>
+          <a:p>
+            <a:pPr>
+              <a:spcAft>
+                <a:spcPts val="800"/>
+              </a:spcAft>
+            </a:pPr>
+            <a:r>
+              <a:rPr lang="en-US" dirty="0"/>
+              <a:t>It is most often accurate</a:t>
+            </a:r>
+          </a:p>
+          <a:p>
+            <a:pPr>
+              <a:spcAft>
+                <a:spcPts val="800"/>
+              </a:spcAft>
+            </a:pPr>
+            <a:r>
+              <a:rPr lang="en-US" dirty="0"/>
+              <a:t>It is fast</a:t>
+            </a:r>
+          </a:p>
+          <a:p>
+            <a:pPr>
+              <a:spcAft>
+                <a:spcPts val="800"/>
+              </a:spcAft>
+            </a:pPr>
+            <a:r>
+              <a:rPr lang="en-US" dirty="0"/>
+              <a:t>It is cheap </a:t>
+            </a:r>
+          </a:p>
+          <a:p>
+            <a:pPr>
+              <a:spcAft>
+                <a:spcPts val="800"/>
+              </a:spcAft>
+            </a:pPr>
+            <a:r>
+              <a:rPr lang="en-US" dirty="0"/>
+              <a:t>Can guard against human drifting. </a:t>
+            </a:r>
+          </a:p>
+          <a:p>
+            <a:pPr>
+              <a:spcAft>
+                <a:spcPts val="800"/>
+              </a:spcAft>
+            </a:pPr>
+            <a:r>
+              <a:rPr lang="en-US" dirty="0"/>
+              <a:t>Extra insurance that you have found all relevant records. It can also be used as a third screener.</a:t>
+            </a:r>
+          </a:p>
+          <a:p>
+            <a:pPr>
+              <a:spcAft>
+                <a:spcPts val="800"/>
+              </a:spcAft>
+            </a:pPr>
+            <a:r>
+              <a:rPr lang="en-US" dirty="0"/>
+              <a:t>Agnostic to data imbalance</a:t>
+            </a:r>
+          </a:p>
+          <a:p>
+            <a:pPr>
+              <a:spcAft>
+                <a:spcPts val="800"/>
+              </a:spcAft>
+            </a:pPr>
+            <a:r>
+              <a:rPr lang="da-DK" dirty="0"/>
+              <a:t>I</a:t>
+            </a:r>
+            <a:r>
+              <a:rPr lang="en-US" dirty="0"/>
+              <a:t>t’s flexible. That is, it can rapidly be fitted to many different situations. </a:t>
             </a:r>
           </a:p>
         </p:txBody>
@@ -49642,6 +49653,20 @@
             </a:pPr>
             <a:r>
               <a:rPr lang="en-US" dirty="0"/>
+              <a:t>Might not be agnostic to data imbalance.</a:t>
+            </a:r>
+          </a:p>
+          <a:p>
+            <a:pPr>
+              <a:spcBef>
+                <a:spcPts val="1200"/>
+              </a:spcBef>
+              <a:spcAft>
+                <a:spcPts val="1200"/>
+              </a:spcAft>
+            </a:pPr>
+            <a:r>
+              <a:rPr lang="en-US" dirty="0"/>
               <a:t>You can screen an incredibly large number of references in a very short time – in theory, 30.000 records per minute. </a:t>
             </a:r>
           </a:p>
@@ -49791,7 +49816,7 @@
           <a:p>
             <a:r>
               <a:rPr lang="en-US" dirty="0"/>
-              <a:t>Precondition for assessing AI screening</a:t>
+              <a:t>Quality assessing AI screening</a:t>
             </a:r>
           </a:p>
         </p:txBody>
@@ -49815,7 +49840,7 @@
         <p:spPr>
           <a:xfrm>
             <a:off x="1013519" y="1306326"/>
-            <a:ext cx="10612423" cy="997511"/>
+            <a:ext cx="10592881" cy="997511"/>
           </a:xfrm>
         </p:spPr>
         <p:txBody>
@@ -49824,11 +49849,11 @@
           <a:p>
             <a:r>
               <a:rPr lang="en-US" dirty="0"/>
-              <a:t>To know common human screening behavior</a:t>
+              <a:t>A precondition for quality assessing AI screening is to know common human screening behavior</a:t>
             </a:r>
             <a:r>
               <a:rPr lang="da-DK" dirty="0"/>
-              <a:t> </a:t>
+              <a:t>/performance</a:t>
             </a:r>
           </a:p>
           <a:p>
@@ -49884,8 +49909,8 @@
         </p:blipFill>
         <p:spPr>
           <a:xfrm>
-            <a:off x="1977656" y="2303837"/>
-            <a:ext cx="7740513" cy="4515300"/>
+            <a:off x="1977657" y="2504369"/>
+            <a:ext cx="7396744" cy="4314768"/>
           </a:xfrm>
           <a:prstGeom prst="rect">
             <a:avLst/>
@@ -49949,28 +49974,20 @@
           <a:lstStyle/>
           <a:p>
             <a:r>
+              <a:rPr lang="en-US" dirty="0"/>
+              <a:t>Quality assessing AI screening </a:t>
+            </a:r>
+            <a:r>
+              <a:rPr lang="da-DK" dirty="0"/>
+              <a:t>(</a:t>
+            </a:r>
+            <a:r>
               <a:rPr lang="da-DK" dirty="0" err="1"/>
-              <a:t>Precondition</a:t>
+              <a:t>continued</a:t>
             </a:r>
             <a:r>
               <a:rPr lang="da-DK" dirty="0"/>
-              <a:t> for </a:t>
-            </a:r>
-            <a:r>
-              <a:rPr lang="da-DK" dirty="0" err="1"/>
-              <a:t>assessing</a:t>
-            </a:r>
-            <a:r>
-              <a:rPr lang="da-DK" dirty="0"/>
-              <a:t> AI screening </a:t>
-            </a:r>
-            <a:r>
-              <a:rPr lang="da-DK" dirty="0" err="1"/>
-              <a:t>cont</a:t>
-            </a:r>
-            <a:r>
-              <a:rPr lang="da-DK" dirty="0"/>
-              <a:t>.</a:t>
+              <a:t>)</a:t>
             </a:r>
             <a:endParaRPr lang="en-US" dirty="0"/>
           </a:p>

--- a/screen-with-gpt-models.pptx
+++ b/screen-with-gpt-models.pptx
@@ -46374,10 +46374,10 @@
       </p:sp>
       <p:pic>
         <p:nvPicPr>
-          <p:cNvPr id="5" name="Picture 4">
+          <p:cNvPr id="6" name="Picture 5" descr="A robot touching a finger&#10;&#10;AI-generated content may be incorrect.">
             <a:extLst>
               <a:ext uri="{FF2B5EF4-FFF2-40B4-BE49-F238E27FC236}">
-                <a16:creationId xmlns:a16="http://schemas.microsoft.com/office/drawing/2014/main" id="{AB44329E-E87C-407A-AE52-8679855D09F7}"/>
+                <a16:creationId xmlns:a16="http://schemas.microsoft.com/office/drawing/2014/main" id="{65376440-27A5-0805-8CDA-9BBA38F5E911}"/>
               </a:ext>
             </a:extLst>
           </p:cNvPr>
@@ -46400,8 +46400,8 @@
         </p:blipFill>
         <p:spPr>
           <a:xfrm>
-            <a:off x="8575920" y="694541"/>
-            <a:ext cx="2090877" cy="2419530"/>
+            <a:off x="7579044" y="363738"/>
+            <a:ext cx="2739000" cy="2739000"/>
           </a:xfrm>
           <a:prstGeom prst="rect">
             <a:avLst/>
@@ -49497,11 +49497,11 @@
       </p:sp>
       <p:pic>
         <p:nvPicPr>
-          <p:cNvPr id="5" name="Picture 4">
+          <p:cNvPr id="6" name="Picture 5">
             <a:hlinkClick r:id="rId7"/>
             <a:extLst>
               <a:ext uri="{FF2B5EF4-FFF2-40B4-BE49-F238E27FC236}">
-                <a16:creationId xmlns:a16="http://schemas.microsoft.com/office/drawing/2014/main" id="{81ADB48C-5D14-F15A-668D-59C166D432D0}"/>
+                <a16:creationId xmlns:a16="http://schemas.microsoft.com/office/drawing/2014/main" id="{40D9B2F4-F21C-3C69-C0AF-55F3551DF31D}"/>
               </a:ext>
             </a:extLst>
           </p:cNvPr>
@@ -49518,8 +49518,8 @@
         </p:blipFill>
         <p:spPr>
           <a:xfrm>
-            <a:off x="7083950" y="4114078"/>
-            <a:ext cx="4889696" cy="1980216"/>
+            <a:off x="7083950" y="4378160"/>
+            <a:ext cx="4798510" cy="1716134"/>
           </a:xfrm>
           <a:prstGeom prst="rect">
             <a:avLst/>

--- a/screen-with-gpt-models.pptx
+++ b/screen-with-gpt-models.pptx
@@ -5,16 +5,16 @@
     <p:sldMasterId id="2147483693" r:id="rId1"/>
   </p:sldMasterIdLst>
   <p:notesMasterIdLst>
-    <p:notesMasterId r:id="rId21"/>
+    <p:notesMasterId r:id="rId20"/>
   </p:notesMasterIdLst>
   <p:sldIdLst>
     <p:sldId id="509" r:id="rId2"/>
     <p:sldId id="524" r:id="rId3"/>
     <p:sldId id="541" r:id="rId4"/>
     <p:sldId id="542" r:id="rId5"/>
-    <p:sldId id="556" r:id="rId6"/>
-    <p:sldId id="543" r:id="rId7"/>
-    <p:sldId id="558" r:id="rId8"/>
+    <p:sldId id="559" r:id="rId6"/>
+    <p:sldId id="560" r:id="rId7"/>
+    <p:sldId id="561" r:id="rId8"/>
     <p:sldId id="546" r:id="rId9"/>
     <p:sldId id="547" r:id="rId10"/>
     <p:sldId id="549" r:id="rId11"/>
@@ -26,7 +26,6 @@
     <p:sldId id="548" r:id="rId17"/>
     <p:sldId id="536" r:id="rId18"/>
     <p:sldId id="555" r:id="rId19"/>
-    <p:sldId id="551" r:id="rId20"/>
   </p:sldIdLst>
   <p:sldSz cx="12192000" cy="6858000"/>
   <p:notesSz cx="6858000" cy="9144000"/>
@@ -137,9 +136,9 @@
             <p14:sldId id="524"/>
             <p14:sldId id="541"/>
             <p14:sldId id="542"/>
-            <p14:sldId id="556"/>
-            <p14:sldId id="543"/>
-            <p14:sldId id="558"/>
+            <p14:sldId id="559"/>
+            <p14:sldId id="560"/>
+            <p14:sldId id="561"/>
             <p14:sldId id="546"/>
             <p14:sldId id="547"/>
             <p14:sldId id="549"/>
@@ -151,7 +150,6 @@
             <p14:sldId id="548"/>
             <p14:sldId id="536"/>
             <p14:sldId id="555"/>
-            <p14:sldId id="551"/>
           </p14:sldIdLst>
         </p14:section>
       </p14:sectionLst>
@@ -245,7 +243,7 @@
           <a:p>
             <a:fld id="{7BEB8190-3B91-4E7B-8634-E458355F2E20}" type="datetimeFigureOut">
               <a:rPr lang="en-GB" smtClean="0"/>
-              <a:t>22/04/2026</a:t>
+              <a:t>23/04/2026</a:t>
             </a:fld>
             <a:endParaRPr lang="en-GB"/>
           </a:p>
@@ -1039,7 +1037,7 @@
     </p:spTree>
     <p:extLst>
       <p:ext uri="{BB962C8B-B14F-4D97-AF65-F5344CB8AC3E}">
-        <p14:creationId xmlns:p14="http://schemas.microsoft.com/office/powerpoint/2010/main" val="1473025834"/>
+        <p14:creationId xmlns:p14="http://schemas.microsoft.com/office/powerpoint/2010/main" val="4268854391"/>
       </p:ext>
     </p:extLst>
   </p:cSld>
@@ -1094,104 +1092,9 @@
           <a:lstStyle/>
           <a:p>
             <a:r>
-              <a:rPr lang="da-DK" dirty="0" err="1"/>
-              <a:t>Before</a:t>
-            </a:r>
-            <a:r>
-              <a:rPr lang="da-DK" dirty="0"/>
-              <a:t> </a:t>
-            </a:r>
-            <a:r>
-              <a:rPr lang="da-DK" dirty="0" err="1"/>
-              <a:t>discussing</a:t>
-            </a:r>
-            <a:r>
-              <a:rPr lang="da-DK" dirty="0"/>
-              <a:t> the screening performance of AI </a:t>
-            </a:r>
-            <a:r>
-              <a:rPr lang="da-DK" dirty="0" err="1"/>
-              <a:t>tools</a:t>
-            </a:r>
-            <a:r>
-              <a:rPr lang="da-DK" dirty="0"/>
-              <a:t>, I </a:t>
-            </a:r>
-            <a:r>
-              <a:rPr lang="da-DK" dirty="0" err="1"/>
-              <a:t>will</a:t>
-            </a:r>
-            <a:r>
-              <a:rPr lang="da-DK" dirty="0"/>
-              <a:t> </a:t>
-            </a:r>
-            <a:r>
-              <a:rPr lang="da-DK" dirty="0" err="1"/>
-              <a:t>spent</a:t>
-            </a:r>
-            <a:r>
-              <a:rPr lang="da-DK" dirty="0"/>
-              <a:t> </a:t>
-            </a:r>
-            <a:r>
-              <a:rPr lang="da-DK" dirty="0" err="1"/>
-              <a:t>some</a:t>
-            </a:r>
-            <a:r>
-              <a:rPr lang="da-DK" dirty="0"/>
-              <a:t> time </a:t>
-            </a:r>
-            <a:r>
-              <a:rPr lang="da-DK" dirty="0" err="1"/>
-              <a:t>embarking</a:t>
-            </a:r>
-            <a:r>
-              <a:rPr lang="da-DK" dirty="0"/>
-              <a:t> the </a:t>
-            </a:r>
-            <a:r>
-              <a:rPr lang="da-DK" dirty="0" err="1"/>
-              <a:t>question</a:t>
-            </a:r>
-            <a:r>
-              <a:rPr lang="da-DK" dirty="0"/>
-              <a:t> </a:t>
-            </a:r>
-            <a:r>
-              <a:rPr lang="da-DK" dirty="0" err="1"/>
-              <a:t>how</a:t>
-            </a:r>
-            <a:r>
-              <a:rPr lang="da-DK" dirty="0"/>
-              <a:t> </a:t>
-            </a:r>
-            <a:r>
-              <a:rPr lang="da-DK" dirty="0" err="1"/>
-              <a:t>good</a:t>
-            </a:r>
-            <a:r>
-              <a:rPr lang="da-DK" dirty="0"/>
-              <a:t> </a:t>
-            </a:r>
-            <a:r>
-              <a:rPr lang="da-DK" dirty="0" err="1"/>
-              <a:t>are</a:t>
-            </a:r>
-            <a:r>
-              <a:rPr lang="da-DK" dirty="0"/>
-              <a:t> human at screening </a:t>
-            </a:r>
-            <a:r>
-              <a:rPr lang="da-DK" dirty="0" err="1"/>
-              <a:t>title</a:t>
-            </a:r>
-            <a:r>
-              <a:rPr lang="da-DK" dirty="0"/>
-              <a:t> and abstract. </a:t>
-            </a:r>
-          </a:p>
-          <a:p>
-            <a:endParaRPr lang="en-US" dirty="0"/>
+              <a:rPr lang="en-US" dirty="0"/>
+              <a:t>With a sufficiently powerful computer, you can screen up to 30,000 per minute.</a:t>
+            </a:r>
           </a:p>
         </p:txBody>
       </p:sp>
@@ -1221,7 +1124,7 @@
     </p:spTree>
     <p:extLst>
       <p:ext uri="{BB962C8B-B14F-4D97-AF65-F5344CB8AC3E}">
-        <p14:creationId xmlns:p14="http://schemas.microsoft.com/office/powerpoint/2010/main" val="2543677367"/>
+        <p14:creationId xmlns:p14="http://schemas.microsoft.com/office/powerpoint/2010/main" val="3329463030"/>
       </p:ext>
     </p:extLst>
   </p:cSld>
@@ -1276,104 +1179,9 @@
           <a:lstStyle/>
           <a:p>
             <a:r>
-              <a:rPr lang="da-DK" dirty="0" err="1"/>
-              <a:t>Before</a:t>
-            </a:r>
-            <a:r>
-              <a:rPr lang="da-DK" dirty="0"/>
-              <a:t> </a:t>
-            </a:r>
-            <a:r>
-              <a:rPr lang="da-DK" dirty="0" err="1"/>
-              <a:t>discussing</a:t>
-            </a:r>
-            <a:r>
-              <a:rPr lang="da-DK" dirty="0"/>
-              <a:t> the screening performance of AI </a:t>
-            </a:r>
-            <a:r>
-              <a:rPr lang="da-DK" dirty="0" err="1"/>
-              <a:t>tools</a:t>
-            </a:r>
-            <a:r>
-              <a:rPr lang="da-DK" dirty="0"/>
-              <a:t>, I </a:t>
-            </a:r>
-            <a:r>
-              <a:rPr lang="da-DK" dirty="0" err="1"/>
-              <a:t>will</a:t>
-            </a:r>
-            <a:r>
-              <a:rPr lang="da-DK" dirty="0"/>
-              <a:t> </a:t>
-            </a:r>
-            <a:r>
-              <a:rPr lang="da-DK" dirty="0" err="1"/>
-              <a:t>spent</a:t>
-            </a:r>
-            <a:r>
-              <a:rPr lang="da-DK" dirty="0"/>
-              <a:t> </a:t>
-            </a:r>
-            <a:r>
-              <a:rPr lang="da-DK" dirty="0" err="1"/>
-              <a:t>some</a:t>
-            </a:r>
-            <a:r>
-              <a:rPr lang="da-DK" dirty="0"/>
-              <a:t> time </a:t>
-            </a:r>
-            <a:r>
-              <a:rPr lang="da-DK" dirty="0" err="1"/>
-              <a:t>embarking</a:t>
-            </a:r>
-            <a:r>
-              <a:rPr lang="da-DK" dirty="0"/>
-              <a:t> the </a:t>
-            </a:r>
-            <a:r>
-              <a:rPr lang="da-DK" dirty="0" err="1"/>
-              <a:t>question</a:t>
-            </a:r>
-            <a:r>
-              <a:rPr lang="da-DK" dirty="0"/>
-              <a:t> </a:t>
-            </a:r>
-            <a:r>
-              <a:rPr lang="da-DK" dirty="0" err="1"/>
-              <a:t>how</a:t>
-            </a:r>
-            <a:r>
-              <a:rPr lang="da-DK" dirty="0"/>
-              <a:t> </a:t>
-            </a:r>
-            <a:r>
-              <a:rPr lang="da-DK" dirty="0" err="1"/>
-              <a:t>good</a:t>
-            </a:r>
-            <a:r>
-              <a:rPr lang="da-DK" dirty="0"/>
-              <a:t> </a:t>
-            </a:r>
-            <a:r>
-              <a:rPr lang="da-DK" dirty="0" err="1"/>
-              <a:t>are</a:t>
-            </a:r>
-            <a:r>
-              <a:rPr lang="da-DK" dirty="0"/>
-              <a:t> human at screening </a:t>
-            </a:r>
-            <a:r>
-              <a:rPr lang="da-DK" dirty="0" err="1"/>
-              <a:t>title</a:t>
-            </a:r>
-            <a:r>
-              <a:rPr lang="da-DK" dirty="0"/>
-              <a:t> and abstract. </a:t>
-            </a:r>
-          </a:p>
-          <a:p>
-            <a:endParaRPr lang="en-US" dirty="0"/>
+              <a:rPr lang="en-US" dirty="0"/>
+              <a:t>With a sufficiently powerful computer, you can screen up to 30,000 per minute.</a:t>
+            </a:r>
           </a:p>
         </p:txBody>
       </p:sp>
@@ -1403,7 +1211,7 @@
     </p:spTree>
     <p:extLst>
       <p:ext uri="{BB962C8B-B14F-4D97-AF65-F5344CB8AC3E}">
-        <p14:creationId xmlns:p14="http://schemas.microsoft.com/office/powerpoint/2010/main" val="3619731482"/>
+        <p14:creationId xmlns:p14="http://schemas.microsoft.com/office/powerpoint/2010/main" val="289230918"/>
       </p:ext>
     </p:extLst>
   </p:cSld>
@@ -45120,7 +44928,7 @@
             </a:pPr>
             <a:r>
               <a:rPr lang="en-US" dirty="0"/>
-              <a:t>The GPT-4 model outperforms </a:t>
+              <a:t>The GPT-4 and GPT-5 models outperform, </a:t>
             </a:r>
             <a:r>
               <a:rPr lang="da-DK" dirty="0"/>
@@ -45128,7 +44936,7 @@
             </a:r>
             <a:r>
               <a:rPr lang="en-US" dirty="0"/>
-              <a:t>We therefore recommend primarily using GPT-4 models for title and abstract screening</a:t>
+              <a:t>We therefore recommend primarily using GPT-4 or GPT-5 models for title and abstract screening</a:t>
             </a:r>
             <a:r>
               <a:rPr lang="da-DK" dirty="0"/>
@@ -45964,7 +45772,7 @@
           <a:p>
             <a:r>
               <a:rPr lang="en-US" dirty="0"/>
-              <a:t>Future research</a:t>
+              <a:t>Future research </a:t>
             </a:r>
           </a:p>
         </p:txBody>
@@ -46140,14 +45948,19 @@
             <p:ph type="title"/>
           </p:nvPr>
         </p:nvSpPr>
-        <p:spPr/>
+        <p:spPr>
+          <a:xfrm>
+            <a:off x="1013520" y="1012923"/>
+            <a:ext cx="10158611" cy="1054001"/>
+          </a:xfrm>
+        </p:spPr>
         <p:txBody>
           <a:bodyPr/>
           <a:lstStyle/>
           <a:p>
             <a:r>
               <a:rPr lang="en-US" dirty="0"/>
-              <a:t>Future perspectives – the future is AI!</a:t>
+              <a:t>Future perspectives beyond title and abstract screening</a:t>
             </a:r>
           </a:p>
         </p:txBody>
@@ -46168,7 +45981,12 @@
             <p:ph type="body" sz="quarter" idx="10"/>
           </p:nvPr>
         </p:nvSpPr>
-        <p:spPr/>
+        <p:spPr>
+          <a:xfrm>
+            <a:off x="1013520" y="2400300"/>
+            <a:ext cx="10158611" cy="3444776"/>
+          </a:xfrm>
+        </p:spPr>
         <p:txBody>
           <a:bodyPr/>
           <a:lstStyle/>
@@ -46180,18 +45998,7 @@
             </a:pPr>
             <a:r>
               <a:rPr lang="en-US" dirty="0"/>
-              <a:t>My projection: Title and abstract and full text screening will be more or less eradicated within the next 10 years.</a:t>
-            </a:r>
-          </a:p>
-          <a:p>
-            <a:pPr>
-              <a:spcAft>
-                <a:spcPts val="800"/>
-              </a:spcAft>
-            </a:pPr>
-            <a:r>
-              <a:rPr lang="en-US" dirty="0"/>
-              <a:t>We need local models to overcome legal issues. Extremely important when conducting full-text screening, data extraction, and risk of bias. </a:t>
+              <a:t>We need local models to overcome legal issues. Extremely important when conducting full-text screening, data extraction, and risk-of-bias assessment. </a:t>
             </a:r>
           </a:p>
           <a:p>
@@ -46213,6 +46020,17 @@
             <a:r>
               <a:rPr lang="en-US" dirty="0"/>
               <a:t>.</a:t>
+            </a:r>
+          </a:p>
+          <a:p>
+            <a:pPr>
+              <a:spcAft>
+                <a:spcPts val="800"/>
+              </a:spcAft>
+            </a:pPr>
+            <a:r>
+              <a:rPr lang="en-US" dirty="0"/>
+              <a:t>THE FUTURE IS AI! I project that screening, as we know it today, will be largely be eradicated within the next 10 years. </a:t>
             </a:r>
           </a:p>
           <a:p>
@@ -46278,7 +46096,12 @@
             <p:ph type="title"/>
           </p:nvPr>
         </p:nvSpPr>
-        <p:spPr/>
+        <p:spPr>
+          <a:xfrm>
+            <a:off x="1741871" y="819245"/>
+            <a:ext cx="4618612" cy="825401"/>
+          </a:xfrm>
+        </p:spPr>
         <p:txBody>
           <a:bodyPr/>
           <a:lstStyle/>
@@ -46309,7 +46132,7 @@
         </p:nvSpPr>
         <p:spPr>
           <a:xfrm>
-            <a:off x="1013520" y="2668380"/>
+            <a:off x="1741871" y="2754487"/>
             <a:ext cx="9304524" cy="3825882"/>
           </a:xfrm>
         </p:spPr>
@@ -46400,7 +46223,7 @@
         </p:blipFill>
         <p:spPr>
           <a:xfrm>
-            <a:off x="7579044" y="363738"/>
+            <a:off x="7379019" y="534806"/>
             <a:ext cx="2739000" cy="2739000"/>
           </a:xfrm>
           <a:prstGeom prst="rect">
@@ -48479,126 +48302,6 @@
 </p:sld>
 </file>
 
-<file path=ppt/slides/slide19.xml><?xml version="1.0" encoding="utf-8"?>
-<p:sld xmlns:a="http://schemas.openxmlformats.org/drawingml/2006/main" xmlns:r="http://schemas.openxmlformats.org/officeDocument/2006/relationships" xmlns:p="http://schemas.openxmlformats.org/presentationml/2006/main">
-  <p:cSld>
-    <p:spTree>
-      <p:nvGrpSpPr>
-        <p:cNvPr id="1" name=""/>
-        <p:cNvGrpSpPr/>
-        <p:nvPr/>
-      </p:nvGrpSpPr>
-      <p:grpSpPr>
-        <a:xfrm>
-          <a:off x="0" y="0"/>
-          <a:ext cx="0" cy="0"/>
-          <a:chOff x="0" y="0"/>
-          <a:chExt cx="0" cy="0"/>
-        </a:xfrm>
-      </p:grpSpPr>
-      <p:sp>
-        <p:nvSpPr>
-          <p:cNvPr id="2" name="Title 1">
-            <a:extLst>
-              <a:ext uri="{FF2B5EF4-FFF2-40B4-BE49-F238E27FC236}">
-                <a16:creationId xmlns:a16="http://schemas.microsoft.com/office/drawing/2014/main" id="{9A2396E2-9EBF-4B0D-B303-A2BEDAEF8B4B}"/>
-              </a:ext>
-            </a:extLst>
-          </p:cNvPr>
-          <p:cNvSpPr>
-            <a:spLocks noGrp="1"/>
-          </p:cNvSpPr>
-          <p:nvPr>
-            <p:ph type="title"/>
-          </p:nvPr>
-        </p:nvSpPr>
-        <p:spPr/>
-        <p:txBody>
-          <a:bodyPr/>
-          <a:lstStyle/>
-          <a:p>
-            <a:r>
-              <a:rPr lang="en-US" dirty="0"/>
-              <a:t>Appendix 4: Other possibilities with AIscreenR</a:t>
-            </a:r>
-          </a:p>
-        </p:txBody>
-      </p:sp>
-      <p:sp>
-        <p:nvSpPr>
-          <p:cNvPr id="3" name="Text Placeholder 2">
-            <a:extLst>
-              <a:ext uri="{FF2B5EF4-FFF2-40B4-BE49-F238E27FC236}">
-                <a16:creationId xmlns:a16="http://schemas.microsoft.com/office/drawing/2014/main" id="{912A750B-9D57-4767-886D-ACA18619E83A}"/>
-              </a:ext>
-            </a:extLst>
-          </p:cNvPr>
-          <p:cNvSpPr>
-            <a:spLocks noGrp="1"/>
-          </p:cNvSpPr>
-          <p:nvPr>
-            <p:ph type="body" sz="quarter" idx="10"/>
-          </p:nvPr>
-        </p:nvSpPr>
-        <p:spPr/>
-        <p:txBody>
-          <a:bodyPr/>
-          <a:lstStyle/>
-          <a:p>
-            <a:r>
-              <a:rPr lang="en-US" dirty="0"/>
-              <a:t>Can be combined with other (semi) automated screening tools such as priority and classifier screening. </a:t>
-            </a:r>
-          </a:p>
-          <a:p>
-            <a:pPr marL="0" indent="0">
-              <a:buNone/>
-            </a:pPr>
-            <a:endParaRPr lang="en-US" dirty="0"/>
-          </a:p>
-          <a:p>
-            <a:r>
-              <a:rPr lang="da-DK" dirty="0"/>
-              <a:t>U</a:t>
-            </a:r>
-            <a:r>
-              <a:rPr lang="en-US" dirty="0"/>
-              <a:t>sed to reduce the number of studies needed to be humanly double screened. This can be done by making too over-inclusive prompt on purpose. </a:t>
-            </a:r>
-          </a:p>
-          <a:p>
-            <a:endParaRPr lang="da-DK" dirty="0"/>
-          </a:p>
-          <a:p>
-            <a:r>
-              <a:rPr lang="en-US" dirty="0"/>
-              <a:t>Can be fine tuned to the specific review</a:t>
-            </a:r>
-            <a:r>
-              <a:rPr lang="da-DK" dirty="0"/>
-              <a:t> </a:t>
-            </a:r>
-            <a:r>
-              <a:rPr lang="da-DK" dirty="0" err="1"/>
-              <a:t>context</a:t>
-            </a:r>
-            <a:endParaRPr lang="en-US" dirty="0"/>
-          </a:p>
-        </p:txBody>
-      </p:sp>
-    </p:spTree>
-    <p:extLst>
-      <p:ext uri="{BB962C8B-B14F-4D97-AF65-F5344CB8AC3E}">
-        <p14:creationId xmlns:p14="http://schemas.microsoft.com/office/powerpoint/2010/main" val="471587923"/>
-      </p:ext>
-    </p:extLst>
-  </p:cSld>
-  <p:clrMapOvr>
-    <a:masterClrMapping/>
-  </p:clrMapOvr>
-</p:sld>
-</file>
-
 <file path=ppt/slides/slide2.xml><?xml version="1.0" encoding="utf-8"?>
 <p:sld xmlns:a="http://schemas.openxmlformats.org/drawingml/2006/main" xmlns:r="http://schemas.openxmlformats.org/officeDocument/2006/relationships" xmlns:p="http://schemas.openxmlformats.org/presentationml/2006/main">
   <p:cSld>
@@ -48644,7 +48347,7 @@
           <a:p>
             <a:r>
               <a:rPr lang="en-US" dirty="0"/>
-              <a:t>Workshop Objectives</a:t>
+              <a:t>Workshop objectives</a:t>
             </a:r>
           </a:p>
         </p:txBody>
@@ -48916,7 +48619,7 @@
           <a:p>
             <a:r>
               <a:rPr lang="en-US" sz="3200" dirty="0"/>
-              <a:t>Why Use AI for Screening in Systematic Reviews?</a:t>
+              <a:t>Why use AI for screening in systematic reviews?</a:t>
             </a:r>
           </a:p>
         </p:txBody>
@@ -49497,11 +49200,11 @@
       </p:sp>
       <p:pic>
         <p:nvPicPr>
-          <p:cNvPr id="6" name="Picture 5">
+          <p:cNvPr id="5" name="Picture 4">
             <a:hlinkClick r:id="rId7"/>
             <a:extLst>
               <a:ext uri="{FF2B5EF4-FFF2-40B4-BE49-F238E27FC236}">
-                <a16:creationId xmlns:a16="http://schemas.microsoft.com/office/drawing/2014/main" id="{40D9B2F4-F21C-3C69-C0AF-55F3551DF31D}"/>
+                <a16:creationId xmlns:a16="http://schemas.microsoft.com/office/drawing/2014/main" id="{EAC24E43-04B9-8406-94FB-86F04591171E}"/>
               </a:ext>
             </a:extLst>
           </p:cNvPr>
@@ -49518,8 +49221,8 @@
         </p:blipFill>
         <p:spPr>
           <a:xfrm>
-            <a:off x="7083950" y="4378160"/>
-            <a:ext cx="4798510" cy="1716134"/>
+            <a:off x="7083949" y="4029075"/>
+            <a:ext cx="4965175" cy="2033687"/>
           </a:xfrm>
           <a:prstGeom prst="rect">
             <a:avLst/>
@@ -49574,7 +49277,7 @@
         </p:nvSpPr>
         <p:spPr>
           <a:xfrm>
-            <a:off x="1013519" y="653328"/>
+            <a:off x="1013519" y="453303"/>
             <a:ext cx="10158611" cy="891382"/>
           </a:xfrm>
         </p:spPr>
@@ -49607,8 +49310,8 @@
         </p:nvSpPr>
         <p:spPr>
           <a:xfrm>
-            <a:off x="1013519" y="1722474"/>
-            <a:ext cx="10363318" cy="4399049"/>
+            <a:off x="1013519" y="1465299"/>
+            <a:ext cx="10363318" cy="4602126"/>
           </a:xfrm>
         </p:spPr>
         <p:txBody>
@@ -49625,7 +49328,7 @@
             </a:pPr>
             <a:r>
               <a:rPr lang="en-US" dirty="0"/>
-              <a:t>Avoids copy-paste procedures, and it is easier to bypass model hallucination (perhaps outdated?).</a:t>
+              <a:t>Overcomes copy–paste procedures; may reduce hallucination risk.</a:t>
             </a:r>
           </a:p>
           <a:p>
@@ -49639,7 +49342,7 @@
             </a:pPr>
             <a:r>
               <a:rPr lang="en-US" dirty="0"/>
-              <a:t>Eases tests of differences between models, prompts, etc. </a:t>
+              <a:t>Enables systematic comparison of models and prompts.</a:t>
             </a:r>
           </a:p>
           <a:p>
@@ -49653,7 +49356,7 @@
             </a:pPr>
             <a:r>
               <a:rPr lang="en-US" dirty="0"/>
-              <a:t>Might not be agnostic to data imbalance.</a:t>
+              <a:t>Unclear if the ChatGPT setup is agnostic to data imbalance.</a:t>
             </a:r>
           </a:p>
           <a:p>
@@ -49667,7 +49370,7 @@
             </a:pPr>
             <a:r>
               <a:rPr lang="en-US" dirty="0"/>
-              <a:t>You can screen an incredibly large number of references in a very short time – in theory, 30.000 records per minute. </a:t>
+              <a:t>Enables the screening of a very large number of references in a short time frame—potentially up to 30,000 records per minute.</a:t>
             </a:r>
           </a:p>
           <a:p>
@@ -49681,7 +49384,7 @@
             </a:pPr>
             <a:r>
               <a:rPr lang="en-US" dirty="0"/>
-              <a:t>Multiple identical screenings can be performed, and inclusion criteria can be built based on how many times a reference has been included across these screenings.</a:t>
+              <a:t>Supports multi-prompt and repeated, identical screenings, where the inclusion criteria are defined based on the frequency of selection across runs.</a:t>
             </a:r>
           </a:p>
           <a:p>
@@ -49695,51 +49398,51 @@
             </a:pPr>
             <a:r>
               <a:rPr lang="en-US" dirty="0"/>
-              <a:t>Research indicates that GPT API models are better suited for screening than ChatGPT (</a:t>
-            </a:r>
-            <a:r>
-              <a:rPr lang="en-US" sz="1600" dirty="0" err="1"/>
+              <a:t>Evidence suggests GPT API models outperform ChatGPT for screening (</a:t>
+            </a:r>
+            <a:r>
+              <a:rPr lang="en-US" sz="1800" dirty="0" err="1"/>
               <a:t>Alshami</a:t>
             </a:r>
             <a:r>
-              <a:rPr lang="en-US" sz="1600" dirty="0"/>
+              <a:rPr lang="en-US" sz="1800" dirty="0"/>
               <a:t> et al., 2023; </a:t>
             </a:r>
             <a:r>
-              <a:rPr lang="en-US" sz="1600" dirty="0" err="1"/>
+              <a:rPr lang="en-US" sz="1800" dirty="0" err="1"/>
               <a:t>Gargari</a:t>
             </a:r>
             <a:r>
-              <a:rPr lang="en-US" sz="1600" dirty="0"/>
+              <a:rPr lang="en-US" sz="1800" dirty="0"/>
               <a:t> et al., 2024; Guo et al., 2024; </a:t>
             </a:r>
             <a:r>
-              <a:rPr lang="en-US" sz="1600" dirty="0" err="1"/>
+              <a:rPr lang="en-US" sz="1800" dirty="0" err="1"/>
               <a:t>Issaiy</a:t>
             </a:r>
             <a:r>
-              <a:rPr lang="en-US" sz="1600" dirty="0"/>
+              <a:rPr lang="en-US" sz="1800" dirty="0"/>
               <a:t> et al., 2024; </a:t>
             </a:r>
             <a:r>
-              <a:rPr lang="en-US" sz="1600" dirty="0" err="1"/>
+              <a:rPr lang="en-US" sz="1800" dirty="0" err="1"/>
               <a:t>Khraisha</a:t>
             </a:r>
             <a:r>
-              <a:rPr lang="en-US" sz="1600" dirty="0"/>
+              <a:rPr lang="en-US" sz="1800" dirty="0"/>
               <a:t> et al., 2024; </a:t>
             </a:r>
             <a:r>
-              <a:rPr lang="en-US" sz="1600" dirty="0" err="1"/>
+              <a:rPr lang="en-US" sz="1800" dirty="0" err="1"/>
               <a:t>Syriani</a:t>
             </a:r>
             <a:r>
-              <a:rPr lang="en-US" sz="1600" dirty="0"/>
+              <a:rPr lang="en-US" sz="1800" dirty="0"/>
               <a:t> et al., 2024</a:t>
             </a:r>
             <a:r>
               <a:rPr lang="en-US" dirty="0"/>
-              <a:t>).</a:t>
+              <a:t>)..</a:t>
             </a:r>
           </a:p>
           <a:p>
@@ -49753,7 +49456,7 @@
             </a:pPr>
             <a:r>
               <a:rPr lang="en-US" dirty="0"/>
-              <a:t>Importantly, our setup has been scientifically tested and validated. </a:t>
+              <a:t>Our setup has been scientifically validated.</a:t>
             </a:r>
           </a:p>
         </p:txBody>
@@ -49761,7 +49464,7 @@
     </p:spTree>
     <p:extLst>
       <p:ext uri="{BB962C8B-B14F-4D97-AF65-F5344CB8AC3E}">
-        <p14:creationId xmlns:p14="http://schemas.microsoft.com/office/powerpoint/2010/main" val="4236514213"/>
+        <p14:creationId xmlns:p14="http://schemas.microsoft.com/office/powerpoint/2010/main" val="2285551730"/>
       </p:ext>
     </p:extLst>
   </p:cSld>
@@ -49793,7 +49496,7 @@
           <p:cNvPr id="2" name="Title 1">
             <a:extLst>
               <a:ext uri="{FF2B5EF4-FFF2-40B4-BE49-F238E27FC236}">
-                <a16:creationId xmlns:a16="http://schemas.microsoft.com/office/drawing/2014/main" id="{E0832CA6-9FEE-BAFD-474E-778705D2EBF4}"/>
+                <a16:creationId xmlns:a16="http://schemas.microsoft.com/office/drawing/2014/main" id="{0B7DB945-84A1-459F-BDB0-3A970869C227}"/>
               </a:ext>
             </a:extLst>
           </p:cNvPr>
@@ -49806,8 +49509,8 @@
         </p:nvSpPr>
         <p:spPr>
           <a:xfrm>
-            <a:off x="1013520" y="389503"/>
-            <a:ext cx="10158611" cy="664596"/>
+            <a:off x="1013519" y="453303"/>
+            <a:ext cx="10158611" cy="891382"/>
           </a:xfrm>
         </p:spPr>
         <p:txBody>
@@ -49815,9 +49518,10 @@
           <a:lstStyle/>
           <a:p>
             <a:r>
-              <a:rPr lang="en-US" dirty="0"/>
-              <a:t>Quality assessing AI screening</a:t>
-            </a:r>
+              <a:rPr lang="en-US" sz="3200" dirty="0"/>
+              <a:t>Quality assessing AI screenings</a:t>
+            </a:r>
+            <a:endParaRPr lang="en-US" sz="3300" dirty="0"/>
           </a:p>
         </p:txBody>
       </p:sp>
@@ -49826,7 +49530,7 @@
           <p:cNvPr id="3" name="Text Placeholder 2">
             <a:extLst>
               <a:ext uri="{FF2B5EF4-FFF2-40B4-BE49-F238E27FC236}">
-                <a16:creationId xmlns:a16="http://schemas.microsoft.com/office/drawing/2014/main" id="{CFC262BF-166C-222F-9200-80D378AFEA7A}"/>
+                <a16:creationId xmlns:a16="http://schemas.microsoft.com/office/drawing/2014/main" id="{2E605EA0-A9BC-404E-ACA1-91E58435C62E}"/>
               </a:ext>
             </a:extLst>
           </p:cNvPr>
@@ -49839,8 +49543,8 @@
         </p:nvSpPr>
         <p:spPr>
           <a:xfrm>
-            <a:off x="1013519" y="1306326"/>
-            <a:ext cx="10592881" cy="997511"/>
+            <a:off x="1013519" y="1344685"/>
+            <a:ext cx="10654606" cy="1131815"/>
           </a:xfrm>
         </p:spPr>
         <p:txBody>
@@ -49866,8 +49570,12 @@
               <a:t> = </a:t>
             </a:r>
             <a:r>
+              <a:rPr lang="it-IT" sz="1800" b="1" i="0" u="none" strike="noStrike" baseline="0" dirty="0"/>
+              <a:t>0.782</a:t>
+            </a:r>
+            <a:r>
               <a:rPr lang="it-IT" sz="1800" b="0" i="0" u="none" strike="noStrike" baseline="0" dirty="0"/>
-              <a:t>0.782, 95% </a:t>
+              <a:t>, 95% </a:t>
             </a:r>
             <a:r>
               <a:rPr lang="it-IT" sz="1800" b="0" u="none" strike="noStrike" baseline="0" dirty="0"/>
@@ -49909,7 +49617,7 @@
         </p:blipFill>
         <p:spPr>
           <a:xfrm>
-            <a:off x="1977657" y="2504369"/>
+            <a:off x="1768107" y="2476500"/>
             <a:ext cx="7396744" cy="4314768"/>
           </a:xfrm>
           <a:prstGeom prst="rect">
@@ -49920,7 +49628,7 @@
     </p:spTree>
     <p:extLst>
       <p:ext uri="{BB962C8B-B14F-4D97-AF65-F5344CB8AC3E}">
-        <p14:creationId xmlns:p14="http://schemas.microsoft.com/office/powerpoint/2010/main" val="1073868282"/>
+        <p14:creationId xmlns:p14="http://schemas.microsoft.com/office/powerpoint/2010/main" val="839839040"/>
       </p:ext>
     </p:extLst>
   </p:cSld>
@@ -49952,7 +49660,7 @@
           <p:cNvPr id="2" name="Title 1">
             <a:extLst>
               <a:ext uri="{FF2B5EF4-FFF2-40B4-BE49-F238E27FC236}">
-                <a16:creationId xmlns:a16="http://schemas.microsoft.com/office/drawing/2014/main" id="{E0832CA6-9FEE-BAFD-474E-778705D2EBF4}"/>
+                <a16:creationId xmlns:a16="http://schemas.microsoft.com/office/drawing/2014/main" id="{0B7DB945-84A1-459F-BDB0-3A970869C227}"/>
               </a:ext>
             </a:extLst>
           </p:cNvPr>
@@ -49965,8 +49673,8 @@
         </p:nvSpPr>
         <p:spPr>
           <a:xfrm>
-            <a:off x="1013520" y="389503"/>
-            <a:ext cx="10158611" cy="666412"/>
+            <a:off x="1013519" y="453303"/>
+            <a:ext cx="10158611" cy="891382"/>
           </a:xfrm>
         </p:spPr>
         <p:txBody>
@@ -49974,22 +49682,22 @@
           <a:lstStyle/>
           <a:p>
             <a:r>
-              <a:rPr lang="en-US" dirty="0"/>
-              <a:t>Quality assessing AI screening </a:t>
-            </a:r>
-            <a:r>
-              <a:rPr lang="da-DK" dirty="0"/>
+              <a:rPr lang="en-US" sz="3200" dirty="0"/>
+              <a:t>Quality assessing AI screenings </a:t>
+            </a:r>
+            <a:r>
+              <a:rPr lang="da-DK" sz="3200" dirty="0"/>
               <a:t>(</a:t>
             </a:r>
             <a:r>
-              <a:rPr lang="da-DK" dirty="0" err="1"/>
+              <a:rPr lang="en-US" sz="3200" dirty="0"/>
               <a:t>continued</a:t>
             </a:r>
             <a:r>
-              <a:rPr lang="da-DK" dirty="0"/>
+              <a:rPr lang="da-DK" sz="3200" dirty="0"/>
               <a:t>)</a:t>
             </a:r>
-            <a:endParaRPr lang="en-US" dirty="0"/>
+            <a:endParaRPr lang="en-US" sz="3300" dirty="0"/>
           </a:p>
         </p:txBody>
       </p:sp>
@@ -49998,7 +49706,7 @@
           <p:cNvPr id="3" name="Text Placeholder 2">
             <a:extLst>
               <a:ext uri="{FF2B5EF4-FFF2-40B4-BE49-F238E27FC236}">
-                <a16:creationId xmlns:a16="http://schemas.microsoft.com/office/drawing/2014/main" id="{CFC262BF-166C-222F-9200-80D378AFEA7A}"/>
+                <a16:creationId xmlns:a16="http://schemas.microsoft.com/office/drawing/2014/main" id="{2E605EA0-A9BC-404E-ACA1-91E58435C62E}"/>
               </a:ext>
             </a:extLst>
           </p:cNvPr>
@@ -50011,8 +49719,8 @@
         </p:nvSpPr>
         <p:spPr>
           <a:xfrm>
-            <a:off x="1013520" y="1397926"/>
-            <a:ext cx="10797480" cy="1541217"/>
+            <a:off x="1013519" y="1344685"/>
+            <a:ext cx="10654606" cy="1446140"/>
           </a:xfrm>
         </p:spPr>
         <p:txBody>
@@ -50030,8 +49738,12 @@
               <a:t>We find in our own group researchers have, on average, a recall = </a:t>
             </a:r>
             <a:r>
+              <a:rPr lang="en-US" sz="1800" b="1" i="0" u="none" strike="noStrike" baseline="0" dirty="0"/>
+              <a:t>0.881</a:t>
+            </a:r>
+            <a:r>
               <a:rPr lang="en-US" sz="1800" b="0" i="0" u="none" strike="noStrike" baseline="0" dirty="0"/>
-              <a:t>0.881, 95% CI [0.823, 0.931]</a:t>
+              <a:t>, 95% CI [0.823, 0.931]</a:t>
             </a:r>
             <a:r>
               <a:rPr lang="en-US" dirty="0"/>
@@ -50044,20 +49756,13 @@
               <a:t>Using data from the Norwegian Institute for Public Health, comparing researcher-researcher screenings only, we find that the average recall drops to </a:t>
             </a:r>
             <a:r>
+              <a:rPr lang="en-US" sz="1800" b="1" i="0" u="none" strike="noStrike" baseline="0" dirty="0"/>
+              <a:t>0.839</a:t>
+            </a:r>
+            <a:r>
               <a:rPr lang="en-US" sz="1800" b="0" i="0" u="none" strike="noStrike" baseline="0" dirty="0"/>
-              <a:t>0.839, 95% CI [0.737, 0.920]. </a:t>
-            </a:r>
-          </a:p>
-          <a:p>
-            <a:endParaRPr lang="it-IT" dirty="0">
-              <a:latin typeface="AdvOTf9433e2d"/>
-            </a:endParaRPr>
-          </a:p>
-          <a:p>
-            <a:pPr marL="0" indent="0">
-              <a:buNone/>
-            </a:pPr>
-            <a:endParaRPr lang="en-US" dirty="0"/>
+              <a:t>, 95% CI [0.737, 0.920]. </a:t>
+            </a:r>
           </a:p>
         </p:txBody>
       </p:sp>
@@ -50100,7 +49805,7 @@
     </p:spTree>
     <p:extLst>
       <p:ext uri="{BB962C8B-B14F-4D97-AF65-F5344CB8AC3E}">
-        <p14:creationId xmlns:p14="http://schemas.microsoft.com/office/powerpoint/2010/main" val="819782247"/>
+        <p14:creationId xmlns:p14="http://schemas.microsoft.com/office/powerpoint/2010/main" val="2393958409"/>
       </p:ext>
     </p:extLst>
   </p:cSld>
@@ -50188,36 +49893,20 @@
           <a:p>
             <a:r>
               <a:rPr lang="en-US" dirty="0"/>
-              <a:t>We have developed a benchmark scheme based on our and our Campbell students' typical screening performances, which can be used to ensure the quality of title and abstract screenings.</a:t>
-            </a:r>
+              <a:t>Based on the above-presented results, we have developed a benchmark scheme, which can be used to ensure the quality of title and abstract screenings.</a:t>
+            </a:r>
+          </a:p>
+          <a:p>
+            <a:endParaRPr lang="en-US" dirty="0"/>
           </a:p>
           <a:p>
             <a:r>
               <a:rPr lang="en-US" dirty="0"/>
-              <a:t>In general, we recommend that GPT screenings should yield recalls above 75% to be usable in high-quality reviews. </a:t>
-            </a:r>
-          </a:p>
-          <a:p>
-            <a:r>
-              <a:rPr lang="en-US" dirty="0"/>
-              <a:t>Content-experts/researchers typically have</a:t>
-            </a:r>
-            <a:r>
-              <a:rPr lang="da-DK" dirty="0"/>
-              <a:t> </a:t>
-            </a:r>
-            <a:r>
-              <a:rPr lang="en-US" dirty="0"/>
-              <a:t>recalls</a:t>
-            </a:r>
-            <a:r>
-              <a:rPr lang="da-DK" dirty="0"/>
-              <a:t> </a:t>
-            </a:r>
-            <a:r>
-              <a:rPr lang="en-US" dirty="0"/>
-              <a:t>around 83%.</a:t>
-            </a:r>
+              <a:t>In general, we recommend that GPT screenings must yield recalls above 75% to be usable in high-quality reviews. </a:t>
+            </a:r>
+          </a:p>
+          <a:p>
+            <a:endParaRPr lang="en-US" dirty="0"/>
           </a:p>
           <a:p>
             <a:r>
@@ -50339,7 +50028,7 @@
         <p:spPr>
           <a:xfrm>
             <a:off x="921054" y="1736333"/>
-            <a:ext cx="10251078" cy="4108743"/>
+            <a:ext cx="10251078" cy="4645417"/>
           </a:xfrm>
         </p:spPr>
         <p:txBody>
@@ -50357,6 +50046,18 @@
           <a:p>
             <a:r>
               <a:rPr lang="en-US" dirty="0"/>
+              <a:t>Play a key role in testing the accuracy of using AI as a second screener. </a:t>
+            </a:r>
+          </a:p>
+          <a:p>
+            <a:pPr marL="0" indent="0">
+              <a:buNone/>
+            </a:pPr>
+            <a:endParaRPr lang="en-US" dirty="0"/>
+          </a:p>
+          <a:p>
+            <a:r>
+              <a:rPr lang="en-US" dirty="0"/>
               <a:t>It allows for context-specific assessments of the efficacy of using GPT API models as second screeners.</a:t>
             </a:r>
           </a:p>
@@ -50370,7 +50071,7 @@
             </a:r>
             <a:r>
               <a:rPr lang="en-US" dirty="0"/>
-              <a:t>we cannot control model developments, the benchmark scheme ensures that we can monitor model performances over time. Meaning that if we experience that a model suddenly cannot live up to our benchmarks we can stop using it. </a:t>
+              <a:t>we cannot control model developments, the benchmark scheme ensures that we can monitor model performances over time. Meaning that if we experience that a model suddenly cannot live up to our benchmarks, we can stop using it. </a:t>
             </a:r>
           </a:p>
           <a:p>

--- a/screen-with-gpt-models.pptx
+++ b/screen-with-gpt-models.pptx
@@ -44891,7 +44891,7 @@
             </a:pPr>
             <a:r>
               <a:rPr lang="en-US" dirty="0"/>
-              <a:t>We have conducted three large-scale classification experiments with different levels of complexity in terms of the number of inclusion criteria. Herein we found that: </a:t>
+              <a:t>We have conducted three large-scale classification experiments with different levels of complexity in terms of the number of inclusion criteria. Here we found that: </a:t>
             </a:r>
             <a:br>
               <a:rPr lang="en-US" dirty="0"/>
@@ -44906,7 +44906,18 @@
             </a:pPr>
             <a:r>
               <a:rPr lang="en-US" dirty="0"/>
-              <a:t>GPT API models can perform on par with or in some cases even better typical human second screeners in high-quality systematic reviews (Vembye et al., 2025). All models yield recalls above 80% in all of our experiments while showing high exclusion rate as well. </a:t>
+              <a:t>GPT API models can perform on par with or in some cases even better than typical human second screeners in high-quality systematic reviews (Vembye et al., 2025). </a:t>
+            </a:r>
+          </a:p>
+          <a:p>
+            <a:pPr>
+              <a:spcAft>
+                <a:spcPts val="800"/>
+              </a:spcAft>
+            </a:pPr>
+            <a:r>
+              <a:rPr lang="en-US" dirty="0"/>
+              <a:t>All models yield recalls above 80% in all of our experiments while showing a high exclusion rate as well. </a:t>
             </a:r>
           </a:p>
           <a:p>
@@ -44928,11 +44939,11 @@
             </a:pPr>
             <a:r>
               <a:rPr lang="en-US" dirty="0"/>
-              <a:t>The GPT-4 and GPT-5 models outperform, </a:t>
+              <a:t>The GPT-4 and GPT-5 models outperform </a:t>
             </a:r>
             <a:r>
               <a:rPr lang="da-DK" dirty="0"/>
-              <a:t>the GPT-3.5-turbo model. </a:t>
+              <a:t>the GPT-3.5 models. </a:t>
             </a:r>
             <a:r>
               <a:rPr lang="en-US" dirty="0"/>
@@ -44951,15 +44962,7 @@
             </a:pPr>
             <a:r>
               <a:rPr lang="en-US" dirty="0"/>
-              <a:t>Moreover, our newest results suggest that GPT-4o-mini, which is 200 times cheaper than GPT-4, can perform on par the GPT-4, when using 10 screenings</a:t>
-            </a:r>
-            <a:r>
-              <a:rPr lang="da-DK" dirty="0"/>
-              <a:t>. </a:t>
-            </a:r>
-            <a:r>
-              <a:rPr lang="en-US" dirty="0"/>
-              <a:t>This is a game-changer in order to reduce the cost of this screening approach. </a:t>
+              <a:t>Moreover, we find that smaller models such as GPT-4o-mini and GPT-5-mini can be used for conducting reliable screenings. This has been a game-changer in order to reduce the cost of this screening approach. </a:t>
             </a:r>
           </a:p>
           <a:p>
@@ -45360,7 +45363,7 @@
             </a:pPr>
             <a:r>
               <a:rPr lang="en-US" dirty="0"/>
-              <a:t>Supporting American and Chinese big tech companies. </a:t>
+              <a:t>Supporting American and Chinese Big Tech companies. </a:t>
             </a:r>
           </a:p>
         </p:txBody>
@@ -46030,8 +46033,15 @@
             </a:pPr>
             <a:r>
               <a:rPr lang="en-US" dirty="0"/>
-              <a:t>THE FUTURE IS AI! I project that screening, as we know it today, will be largely be eradicated within the next 10 years. </a:t>
-            </a:r>
+              <a:t>THE FUTURE IS AI! I project that screening, as we know it today, will be largely eradicated within the next 10 years </a:t>
+            </a:r>
+            <a:r>
+              <a:rPr lang="en-US" dirty="0">
+                <a:sym typeface="Wingdings" panose="05000000000000000000" pitchFamily="2" charset="2"/>
+              </a:rPr>
+              <a:t> I believe that the relevancy of AIscreenR will be short-lived.</a:t>
+            </a:r>
+            <a:endParaRPr lang="en-US" dirty="0"/>
           </a:p>
           <a:p>
             <a:pPr marL="317500" lvl="1" indent="0">

--- a/screen-with-gpt-models.pptx
+++ b/screen-with-gpt-models.pptx
@@ -243,7 +243,7 @@
           <a:p>
             <a:fld id="{7BEB8190-3B91-4E7B-8634-E458355F2E20}" type="datetimeFigureOut">
               <a:rPr lang="en-GB" smtClean="0"/>
-              <a:t>23/04/2026</a:t>
+              <a:t>24/04/2026</a:t>
             </a:fld>
             <a:endParaRPr lang="en-GB"/>
           </a:p>
